--- a/GreenPrint_FutureForge_Deck.pptx
+++ b/GreenPrint_FutureForge_Deck.pptx
@@ -4,6 +4,9 @@
   <p:sldMasterIdLst>
     <p:sldMasterId id="2147483648" r:id="rId1"/>
   </p:sldMasterIdLst>
+  <p:notesMasterIdLst>
+    <p:notesMasterId r:id="rId12"/>
+  </p:notesMasterIdLst>
   <p:sldIdLst>
     <p:sldId id="256" r:id="rId2"/>
     <p:sldId id="257" r:id="rId3"/>
@@ -16,10 +19,7 @@
     <p:sldId id="264" r:id="rId10"/>
     <p:sldId id="265" r:id="rId11"/>
   </p:sldIdLst>
-  <p:notesMasterIdLst>
-    <p:notesMasterId r:id="rId12"/>
-  </p:notesMasterIdLst>
-  <p:sldSz cx="9144000" cy="5143500"/>
+  <p:sldSz cx="9144000" cy="5143500" type="screen16x9"/>
   <p:notesSz cx="5143500" cy="9144000"/>
   <p:defaultTextStyle>
     <a:lvl1pPr marL="0" algn="l" defTabSz="914400" rtl="0" eaLnBrk="1" latinLnBrk="0" hangingPunct="1">
@@ -113,13 +113,20 @@
       </a:defRPr>
     </a:lvl9pPr>
   </p:defaultTextStyle>
+  <p:extLst>
+    <p:ext uri="{EFAFB233-063F-42B5-8137-9DF3F51BA10A}">
+      <p15:sldGuideLst xmlns:p15="http://schemas.microsoft.com/office/powerpoint/2012/main"/>
+    </p:ext>
+  </p:extLst>
 </p:presentation>
 </file>
 
 <file path=ppt/charts/chart1.xml><?xml version="1.0" encoding="utf-8"?>
-<c:chartSpace xmlns:c="http://schemas.openxmlformats.org/drawingml/2006/chart" xmlns:a="http://schemas.openxmlformats.org/drawingml/2006/main" xmlns:r="http://schemas.openxmlformats.org/officeDocument/2006/relationships">
+<c:chartSpace xmlns:c="http://schemas.openxmlformats.org/drawingml/2006/chart" xmlns:a="http://schemas.openxmlformats.org/drawingml/2006/main" xmlns:r="http://schemas.openxmlformats.org/officeDocument/2006/relationships" xmlns:c16r2="http://schemas.microsoft.com/office/drawing/2015/06/chart">
   <c:date1904 val="0"/>
+  <c:lang val="en-US"/>
   <c:roundedCorners val="1"/>
+  <c:style val="2"/>
   <c:chart>
     <c:title>
       <c:tx>
@@ -147,7 +154,6 @@
           </a:p>
         </c:rich>
       </c:tx>
-      <c:layout/>
       <c:overlay val="0"/>
     </c:title>
     <c:autoTitleDeleted val="0"/>
@@ -191,6 +197,11 @@
               </a:solidFill>
               <a:effectLst/>
             </c:spPr>
+            <c:extLst>
+              <c:ext xmlns:c16="http://schemas.microsoft.com/office/drawing/2014/chart" uri="{C3380CC4-5D6E-409C-BE32-E72D297353CC}">
+                <c16:uniqueId val="{00000001-15ED-4289-9848-EFE803571732}"/>
+              </c:ext>
+            </c:extLst>
           </c:dPt>
           <c:dPt>
             <c:idx val="1"/>
@@ -201,6 +212,11 @@
               </a:solidFill>
               <a:effectLst/>
             </c:spPr>
+            <c:extLst>
+              <c:ext xmlns:c16="http://schemas.microsoft.com/office/drawing/2014/chart" uri="{C3380CC4-5D6E-409C-BE32-E72D297353CC}">
+                <c16:uniqueId val="{00000003-15ED-4289-9848-EFE803571732}"/>
+              </c:ext>
+            </c:extLst>
           </c:dPt>
           <c:dPt>
             <c:idx val="2"/>
@@ -211,6 +227,11 @@
               </a:solidFill>
               <a:effectLst/>
             </c:spPr>
+            <c:extLst>
+              <c:ext xmlns:c16="http://schemas.microsoft.com/office/drawing/2014/chart" uri="{C3380CC4-5D6E-409C-BE32-E72D297353CC}">
+                <c16:uniqueId val="{00000005-15ED-4289-9848-EFE803571732}"/>
+              </c:ext>
+            </c:extLst>
           </c:dPt>
           <c:dPt>
             <c:idx val="3"/>
@@ -221,6 +242,11 @@
               </a:solidFill>
               <a:effectLst/>
             </c:spPr>
+            <c:extLst>
+              <c:ext xmlns:c16="http://schemas.microsoft.com/office/drawing/2014/chart" uri="{C3380CC4-5D6E-409C-BE32-E72D297353CC}">
+                <c16:uniqueId val="{00000007-15ED-4289-9848-EFE803571732}"/>
+              </c:ext>
+            </c:extLst>
           </c:dPt>
           <c:dLbls>
             <c:dLbl>
@@ -239,6 +265,7 @@
                       <a:latin typeface="Arial"/>
                     </a:defRPr>
                   </a:pPr>
+                  <a:endParaRPr lang="en-US"/>
                 </a:p>
               </c:txPr>
               <c:showLegendKey val="0"/>
@@ -247,6 +274,12 @@
               <c:showSerName val="0"/>
               <c:showPercent val="1"/>
               <c:showBubbleSize val="0"/>
+              <c:extLst>
+                <c:ext xmlns:c15="http://schemas.microsoft.com/office/drawing/2012/chart" uri="{CE6537A1-D6FC-4f65-9D91-7224C49458BB}"/>
+                <c:ext xmlns:c16="http://schemas.microsoft.com/office/drawing/2014/chart" uri="{C3380CC4-5D6E-409C-BE32-E72D297353CC}">
+                  <c16:uniqueId val="{00000001-15ED-4289-9848-EFE803571732}"/>
+                </c:ext>
+              </c:extLst>
             </c:dLbl>
             <c:dLbl>
               <c:idx val="1"/>
@@ -264,6 +297,7 @@
                       <a:latin typeface="Arial"/>
                     </a:defRPr>
                   </a:pPr>
+                  <a:endParaRPr lang="en-US"/>
                 </a:p>
               </c:txPr>
               <c:showLegendKey val="0"/>
@@ -272,6 +306,12 @@
               <c:showSerName val="0"/>
               <c:showPercent val="1"/>
               <c:showBubbleSize val="0"/>
+              <c:extLst>
+                <c:ext xmlns:c15="http://schemas.microsoft.com/office/drawing/2012/chart" uri="{CE6537A1-D6FC-4f65-9D91-7224C49458BB}"/>
+                <c:ext xmlns:c16="http://schemas.microsoft.com/office/drawing/2014/chart" uri="{C3380CC4-5D6E-409C-BE32-E72D297353CC}">
+                  <c16:uniqueId val="{00000003-15ED-4289-9848-EFE803571732}"/>
+                </c:ext>
+              </c:extLst>
             </c:dLbl>
             <c:dLbl>
               <c:idx val="2"/>
@@ -289,6 +329,7 @@
                       <a:latin typeface="Arial"/>
                     </a:defRPr>
                   </a:pPr>
+                  <a:endParaRPr lang="en-US"/>
                 </a:p>
               </c:txPr>
               <c:showLegendKey val="0"/>
@@ -297,6 +338,12 @@
               <c:showSerName val="0"/>
               <c:showPercent val="1"/>
               <c:showBubbleSize val="0"/>
+              <c:extLst>
+                <c:ext xmlns:c15="http://schemas.microsoft.com/office/drawing/2012/chart" uri="{CE6537A1-D6FC-4f65-9D91-7224C49458BB}"/>
+                <c:ext xmlns:c16="http://schemas.microsoft.com/office/drawing/2014/chart" uri="{C3380CC4-5D6E-409C-BE32-E72D297353CC}">
+                  <c16:uniqueId val="{00000005-15ED-4289-9848-EFE803571732}"/>
+                </c:ext>
+              </c:extLst>
             </c:dLbl>
             <c:dLbl>
               <c:idx val="3"/>
@@ -314,6 +361,7 @@
                       <a:latin typeface="Arial"/>
                     </a:defRPr>
                   </a:pPr>
+                  <a:endParaRPr lang="en-US"/>
                 </a:p>
               </c:txPr>
               <c:showLegendKey val="0"/>
@@ -322,8 +370,21 @@
               <c:showSerName val="0"/>
               <c:showPercent val="1"/>
               <c:showBubbleSize val="0"/>
+              <c:extLst>
+                <c:ext xmlns:c15="http://schemas.microsoft.com/office/drawing/2012/chart" uri="{CE6537A1-D6FC-4f65-9D91-7224C49458BB}"/>
+                <c:ext xmlns:c16="http://schemas.microsoft.com/office/drawing/2014/chart" uri="{C3380CC4-5D6E-409C-BE32-E72D297353CC}">
+                  <c16:uniqueId val="{00000007-15ED-4289-9848-EFE803571732}"/>
+                </c:ext>
+              </c:extLst>
             </c:dLbl>
             <c:numFmt formatCode="0%" sourceLinked="0"/>
+            <c:spPr>
+              <a:noFill/>
+              <a:ln>
+                <a:noFill/>
+              </a:ln>
+              <a:effectLst/>
+            </c:spPr>
             <c:txPr>
               <a:bodyPr/>
               <a:lstStyle/>
@@ -336,6 +397,7 @@
                     <a:latin typeface="Arial"/>
                   </a:defRPr>
                 </a:pPr>
+                <a:endParaRPr lang="en-US"/>
               </a:p>
             </c:txPr>
             <c:showLegendKey val="0"/>
@@ -345,6 +407,9 @@
             <c:showPercent val="1"/>
             <c:showBubbleSize val="0"/>
             <c:showLeaderLines val="0"/>
+            <c:extLst>
+              <c:ext xmlns:c15="http://schemas.microsoft.com/office/drawing/2012/chart" uri="{CE6537A1-D6FC-4f65-9D91-7224C49458BB}"/>
+            </c:extLst>
           </c:dLbls>
           <c:cat>
             <c:strRef>
@@ -370,6 +435,7 @@
             <c:numRef>
               <c:f>Sheet1!$B$2:$B$5</c:f>
               <c:numCache>
+                <c:formatCode>General</c:formatCode>
                 <c:ptCount val="4"/>
                 <c:pt idx="0">
                   <c:v>35</c:v>
@@ -386,7 +452,21 @@
               </c:numCache>
             </c:numRef>
           </c:val>
+          <c:extLst>
+            <c:ext xmlns:c16="http://schemas.microsoft.com/office/drawing/2014/chart" uri="{C3380CC4-5D6E-409C-BE32-E72D297353CC}">
+              <c16:uniqueId val="{00000008-15ED-4289-9848-EFE803571732}"/>
+            </c:ext>
+          </c:extLst>
         </c:ser>
+        <c:dLbls>
+          <c:showLegendKey val="0"/>
+          <c:showVal val="0"/>
+          <c:showCatName val="0"/>
+          <c:showSerName val="0"/>
+          <c:showPercent val="0"/>
+          <c:showBubbleSize val="0"/>
+          <c:showLeaderLines val="0"/>
+        </c:dLbls>
         <c:firstSliceAng val="0"/>
         <c:holeSize val="55"/>
       </c:doughnutChart>
@@ -418,6 +498,7 @@
     </c:legend>
     <c:plotVisOnly val="1"/>
     <c:dispBlanksAs val="span"/>
+    <c:showDLblsOverMax val="1"/>
   </c:chart>
   <c:spPr>
     <a:solidFill>
@@ -456,234 +537,10 @@
           <a:chExt cx="0" cy="0"/>
         </a:xfrm>
       </p:grpSpPr>
-      <p:sp>
-        <p:nvSpPr>
-          <p:cNvPr id="2" name="Header Placeholder 1"/>
-          <p:cNvSpPr>
-            <a:spLocks noGrp="1"/>
-          </p:cNvSpPr>
-          <p:nvPr>
-            <p:ph type="hdr" sz="quarter"/>
-          </p:nvPr>
-        </p:nvSpPr>
-        <p:spPr>
-          <a:xfrm>
-            <a:off x="0" y="0"/>
-            <a:ext cx="2971800" cy="458788"/>
-          </a:xfrm>
-          <a:prstGeom prst="rect">
-            <a:avLst/>
-          </a:prstGeom>
-        </p:spPr>
-        <p:txBody>
-          <a:bodyPr vert="horz" lIns="91440" tIns="45720" rIns="91440" bIns="45720" rtlCol="0"/>
-          <a:lstStyle>
-            <a:lvl1pPr algn="l">
-              <a:defRPr sz="1200"/>
-            </a:lvl1pPr>
-          </a:lstStyle>
-          <a:p>
-            <a:endParaRPr lang="en-US"/>
-          </a:p>
-        </p:txBody>
-      </p:sp>
-      <p:sp>
-        <p:nvSpPr>
-          <p:cNvPr id="3" name="Date Placeholder 2"/>
-          <p:cNvSpPr>
-            <a:spLocks noGrp="1"/>
-          </p:cNvSpPr>
-          <p:nvPr>
-            <p:ph type="dt" idx="1"/>
-          </p:nvPr>
-        </p:nvSpPr>
-        <p:spPr>
-          <a:xfrm>
-            <a:off x="3884613" y="0"/>
-            <a:ext cx="2971800" cy="458788"/>
-          </a:xfrm>
-          <a:prstGeom prst="rect">
-            <a:avLst/>
-          </a:prstGeom>
-        </p:spPr>
-        <p:txBody>
-          <a:bodyPr vert="horz" lIns="91440" tIns="45720" rIns="91440" bIns="45720" rtlCol="0"/>
-          <a:lstStyle>
-            <a:lvl1pPr algn="r">
-              <a:defRPr sz="1200"/>
-            </a:lvl1pPr>
-          </a:lstStyle>
-          <a:p>
-            <a:fld id="{5282F153-3F37-0F45-9E97-73ACFA13230C}" type="datetimeFigureOut">
-              <a:rPr lang="en-US"/>
-              <a:t>7/23/19</a:t>
-            </a:fld>
-            <a:endParaRPr lang="en-US"/>
-          </a:p>
-        </p:txBody>
-      </p:sp>
-      <p:sp>
-        <p:nvSpPr>
-          <p:cNvPr id="4" name="Slide Image Placeholder 3"/>
-          <p:cNvSpPr>
-            <a:spLocks noGrp="1" noRot="1" noChangeAspect="1"/>
-          </p:cNvSpPr>
-          <p:nvPr>
-            <p:ph type="sldImg" idx="2"/>
-          </p:nvPr>
-        </p:nvSpPr>
-        <p:spPr>
-          <a:xfrm>
-            <a:off x="685800" y="1143000"/>
-            <a:ext cx="5486400" cy="3086100"/>
-          </a:xfrm>
-          <a:prstGeom prst="rect">
-            <a:avLst/>
-          </a:prstGeom>
-          <a:noFill/>
-          <a:ln w="12700">
-            <a:solidFill>
-              <a:prstClr val="black"/>
-            </a:solidFill>
-          </a:ln>
-        </p:spPr>
-        <p:txBody>
-          <a:bodyPr vert="horz" lIns="91440" tIns="45720" rIns="91440" bIns="45720" rtlCol="0" anchor="ctr"/>
-          <a:lstStyle/>
-          <a:p>
-            <a:endParaRPr lang="en-US"/>
-          </a:p>
-        </p:txBody>
-      </p:sp>
-      <p:sp>
-        <p:nvSpPr>
-          <p:cNvPr id="5" name="Notes Placeholder 4"/>
-          <p:cNvSpPr>
-            <a:spLocks noGrp="1"/>
-          </p:cNvSpPr>
-          <p:nvPr>
-            <p:ph type="body" sz="quarter" idx="3"/>
-          </p:nvPr>
-        </p:nvSpPr>
-        <p:spPr>
-          <a:xfrm>
-            <a:off x="685800" y="4400550"/>
-            <a:ext cx="5486400" cy="3600450"/>
-          </a:xfrm>
-          <a:prstGeom prst="rect">
-            <a:avLst/>
-          </a:prstGeom>
-        </p:spPr>
-        <p:txBody>
-          <a:bodyPr vert="horz" lIns="91440" tIns="45720" rIns="91440" bIns="45720" rtlCol="0"/>
-          <a:lstStyle/>
-          <a:p>
-            <a:pPr lvl="0"/>
-            <a:r>
-              <a:rPr lang="en-US"/>
-              <a:t>Click to edit Master text styles</a:t>
-            </a:r>
-          </a:p>
-          <a:p>
-            <a:pPr lvl="1"/>
-            <a:r>
-              <a:rPr lang="en-US"/>
-              <a:t>Second level</a:t>
-            </a:r>
-          </a:p>
-          <a:p>
-            <a:pPr lvl="2"/>
-            <a:r>
-              <a:rPr lang="en-US"/>
-              <a:t>Third level</a:t>
-            </a:r>
-          </a:p>
-          <a:p>
-            <a:pPr lvl="3"/>
-            <a:r>
-              <a:rPr lang="en-US"/>
-              <a:t>Fourth level</a:t>
-            </a:r>
-          </a:p>
-          <a:p>
-            <a:pPr lvl="4"/>
-            <a:r>
-              <a:rPr lang="en-US"/>
-              <a:t>Fifth level</a:t>
-            </a:r>
-          </a:p>
-        </p:txBody>
-      </p:sp>
-      <p:sp>
-        <p:nvSpPr>
-          <p:cNvPr id="6" name="Footer Placeholder 5"/>
-          <p:cNvSpPr>
-            <a:spLocks noGrp="1"/>
-          </p:cNvSpPr>
-          <p:nvPr>
-            <p:ph type="ftr" sz="quarter" idx="4"/>
-          </p:nvPr>
-        </p:nvSpPr>
-        <p:spPr>
-          <a:xfrm>
-            <a:off x="0" y="8685213"/>
-            <a:ext cx="2971800" cy="458787"/>
-          </a:xfrm>
-          <a:prstGeom prst="rect">
-            <a:avLst/>
-          </a:prstGeom>
-        </p:spPr>
-        <p:txBody>
-          <a:bodyPr vert="horz" lIns="91440" tIns="45720" rIns="91440" bIns="45720" rtlCol="0" anchor="b"/>
-          <a:lstStyle>
-            <a:lvl1pPr algn="l">
-              <a:defRPr sz="1200"/>
-            </a:lvl1pPr>
-          </a:lstStyle>
-          <a:p>
-            <a:endParaRPr lang="en-US"/>
-          </a:p>
-        </p:txBody>
-      </p:sp>
-      <p:sp>
-        <p:nvSpPr>
-          <p:cNvPr id="7" name="Slide Number Placeholder 6"/>
-          <p:cNvSpPr>
-            <a:spLocks noGrp="1"/>
-          </p:cNvSpPr>
-          <p:nvPr>
-            <p:ph type="sldNum" sz="quarter" idx="5"/>
-          </p:nvPr>
-        </p:nvSpPr>
-        <p:spPr>
-          <a:xfrm>
-            <a:off x="3884613" y="8685213"/>
-            <a:ext cx="2971800" cy="458787"/>
-          </a:xfrm>
-          <a:prstGeom prst="rect">
-            <a:avLst/>
-          </a:prstGeom>
-        </p:spPr>
-        <p:txBody>
-          <a:bodyPr vert="horz" lIns="91440" tIns="45720" rIns="91440" bIns="45720" rtlCol="0" anchor="b"/>
-          <a:lstStyle>
-            <a:lvl1pPr algn="r">
-              <a:defRPr sz="1200"/>
-            </a:lvl1pPr>
-          </a:lstStyle>
-          <a:p>
-            <a:fld id="{CE5E9CC1-C706-0F49-92D6-E571CC5EEA8F}" type="slidenum">
-              <a:rPr lang="en-US"/>
-              <a:t>‹#›</a:t>
-            </a:fld>
-            <a:endParaRPr lang="en-US"/>
-          </a:p>
-        </p:txBody>
-      </p:sp>
     </p:spTree>
     <p:extLst>
       <p:ext uri="{BB962C8B-B14F-4D97-AF65-F5344CB8AC3E}">
-        <p14:creationId xmlns:p14="http://schemas.microsoft.com/office/powerpoint/2010/main" val="1024086991"/>
+        <p14:creationId xmlns:p14="http://schemas.microsoft.com/office/powerpoint/2010/main" val="3687270447"/>
       </p:ext>
     </p:extLst>
   </p:cSld>
@@ -827,10 +684,6 @@
           <a:bodyPr/>
           <a:lstStyle/>
           <a:p>
-            <a:r>
-              <a:rPr lang="en-US" dirty="0"/>
-              <a:t/>
-            </a:r>
             <a:endParaRPr lang="en-US" dirty="0"/>
           </a:p>
         </p:txBody>
@@ -915,10 +768,6 @@
           <a:bodyPr/>
           <a:lstStyle/>
           <a:p>
-            <a:r>
-              <a:rPr lang="en-US" dirty="0"/>
-              <a:t/>
-            </a:r>
             <a:endParaRPr lang="en-US" dirty="0"/>
           </a:p>
         </p:txBody>
@@ -1003,10 +852,6 @@
           <a:bodyPr/>
           <a:lstStyle/>
           <a:p>
-            <a:r>
-              <a:rPr lang="en-US" dirty="0"/>
-              <a:t/>
-            </a:r>
             <a:endParaRPr lang="en-US" dirty="0"/>
           </a:p>
         </p:txBody>
@@ -1091,10 +936,6 @@
           <a:bodyPr/>
           <a:lstStyle/>
           <a:p>
-            <a:r>
-              <a:rPr lang="en-US" dirty="0"/>
-              <a:t/>
-            </a:r>
             <a:endParaRPr lang="en-US" dirty="0"/>
           </a:p>
         </p:txBody>
@@ -1179,10 +1020,6 @@
           <a:bodyPr/>
           <a:lstStyle/>
           <a:p>
-            <a:r>
-              <a:rPr lang="en-US" dirty="0"/>
-              <a:t/>
-            </a:r>
             <a:endParaRPr lang="en-US" dirty="0"/>
           </a:p>
         </p:txBody>
@@ -1267,10 +1104,6 @@
           <a:bodyPr/>
           <a:lstStyle/>
           <a:p>
-            <a:r>
-              <a:rPr lang="en-US" dirty="0"/>
-              <a:t/>
-            </a:r>
             <a:endParaRPr lang="en-US" dirty="0"/>
           </a:p>
         </p:txBody>
@@ -1355,10 +1188,6 @@
           <a:bodyPr/>
           <a:lstStyle/>
           <a:p>
-            <a:r>
-              <a:rPr lang="en-US" dirty="0"/>
-              <a:t/>
-            </a:r>
             <a:endParaRPr lang="en-US" dirty="0"/>
           </a:p>
         </p:txBody>
@@ -1443,10 +1272,6 @@
           <a:bodyPr/>
           <a:lstStyle/>
           <a:p>
-            <a:r>
-              <a:rPr lang="en-US" dirty="0"/>
-              <a:t/>
-            </a:r>
             <a:endParaRPr lang="en-US" dirty="0"/>
           </a:p>
         </p:txBody>
@@ -1531,10 +1356,6 @@
           <a:bodyPr/>
           <a:lstStyle/>
           <a:p>
-            <a:r>
-              <a:rPr lang="en-US" dirty="0"/>
-              <a:t/>
-            </a:r>
             <a:endParaRPr lang="en-US" dirty="0"/>
           </a:p>
         </p:txBody>
@@ -1619,10 +1440,6 @@
           <a:bodyPr/>
           <a:lstStyle/>
           <a:p>
-            <a:r>
-              <a:rPr lang="en-US" dirty="0"/>
-              <a:t/>
-            </a:r>
             <a:endParaRPr lang="en-US" dirty="0"/>
           </a:p>
         </p:txBody>
@@ -1696,6 +1513,11 @@
 <file path=ppt/slideMasters/slideMaster1.xml><?xml version="1.0" encoding="utf-8"?>
 <p:sldMaster xmlns:a="http://schemas.openxmlformats.org/drawingml/2006/main" xmlns:r="http://schemas.openxmlformats.org/officeDocument/2006/relationships" xmlns:p="http://schemas.openxmlformats.org/presentationml/2006/main">
   <p:cSld>
+    <p:bg>
+      <p:bgRef idx="1001">
+        <a:schemeClr val="bg1"/>
+      </p:bgRef>
+    </p:bg>
     <p:spTree>
       <p:nvGrpSpPr>
         <p:cNvPr id="1" name=""/>
@@ -1978,6 +1800,7 @@
         <a:solidFill>
           <a:srgbClr val="0A0E0B"/>
         </a:solidFill>
+        <a:effectLst/>
       </p:bgPr>
     </p:bg>
     <p:spTree>
@@ -2071,14 +1894,14 @@
       </p:sp>
       <p:pic>
         <p:nvPicPr>
-          <p:cNvPr id="5" name="Image 0" descr="preencoded.png">    </p:cNvPr>
+          <p:cNvPr id="5" name="Image 0" descr="preencoded.png"/>
           <p:cNvPicPr>
             <a:picLocks noChangeAspect="1"/>
           </p:cNvPicPr>
           <p:nvPr/>
         </p:nvPicPr>
         <p:blipFill>
-          <a:blip r:embed="rId1"/>
+          <a:blip r:embed="rId3"/>
           <a:stretch>
             <a:fillRect/>
           </a:stretch>
@@ -2114,7 +1937,7 @@
           <a:bodyPr wrap="square" lIns="0" tIns="0" rIns="0" bIns="0" rtlCol="0" anchor="ctr"/>
           <a:lstStyle/>
           <a:p>
-            <a:pPr algn="l" indent="0" marL="0">
+            <a:pPr marL="0" indent="0" algn="l">
               <a:buNone/>
             </a:pPr>
             <a:r>
@@ -2153,7 +1976,7 @@
           <a:bodyPr wrap="square" lIns="0" tIns="0" rIns="0" bIns="0" rtlCol="0" anchor="ctr"/>
           <a:lstStyle/>
           <a:p>
-            <a:pPr algn="l" indent="0" marL="0">
+            <a:pPr marL="0" indent="0" algn="l">
               <a:buNone/>
             </a:pPr>
             <a:r>
@@ -2212,7 +2035,7 @@
           <a:bodyPr wrap="square" lIns="0" tIns="0" rIns="0" bIns="0" rtlCol="0" anchor="ctr"/>
           <a:lstStyle/>
           <a:p>
-            <a:pPr algn="l" indent="0" marL="0">
+            <a:pPr marL="0" indent="0" algn="l">
               <a:buNone/>
             </a:pPr>
             <a:r>
@@ -2251,7 +2074,7 @@
           <a:bodyPr wrap="square" lIns="0" tIns="0" rIns="0" bIns="0" rtlCol="0" anchor="ctr"/>
           <a:lstStyle/>
           <a:p>
-            <a:pPr algn="l" indent="0" marL="0">
+            <a:pPr marL="0" indent="0" algn="l">
               <a:buNone/>
             </a:pPr>
             <a:r>
@@ -2335,7 +2158,7 @@
           <a:bodyPr wrap="square" lIns="0" tIns="0" rIns="0" bIns="0" rtlCol="0" anchor="ctr"/>
           <a:lstStyle/>
           <a:p>
-            <a:pPr indent="0" marL="0">
+            <a:pPr marL="0" indent="0">
               <a:buNone/>
             </a:pPr>
             <a:r>
@@ -2374,7 +2197,7 @@
           <a:bodyPr wrap="square" lIns="0" tIns="0" rIns="0" bIns="0" rtlCol="0" anchor="ctr"/>
           <a:lstStyle/>
           <a:p>
-            <a:pPr indent="0" marL="0">
+            <a:pPr marL="0" indent="0">
               <a:buNone/>
             </a:pPr>
             <a:r>
@@ -2413,7 +2236,7 @@
           <a:bodyPr wrap="square" lIns="0" tIns="0" rIns="0" bIns="0" rtlCol="0" anchor="ctr"/>
           <a:lstStyle/>
           <a:p>
-            <a:pPr indent="0" marL="0">
+            <a:pPr marL="0" indent="0">
               <a:buNone/>
             </a:pPr>
             <a:r>
@@ -2447,6 +2270,7 @@
         <a:solidFill>
           <a:srgbClr val="0A0E0B"/>
         </a:solidFill>
+        <a:effectLst/>
       </p:bgPr>
     </p:bg>
     <p:spTree>
@@ -2540,14 +2364,14 @@
       </p:sp>
       <p:pic>
         <p:nvPicPr>
-          <p:cNvPr id="5" name="Image 0" descr="preencoded.png">    </p:cNvPr>
+          <p:cNvPr id="5" name="Image 0" descr="preencoded.png"/>
           <p:cNvPicPr>
             <a:picLocks noChangeAspect="1"/>
           </p:cNvPicPr>
           <p:nvPr/>
         </p:nvPicPr>
         <p:blipFill>
-          <a:blip r:embed="rId1"/>
+          <a:blip r:embed="rId3"/>
           <a:stretch>
             <a:fillRect/>
           </a:stretch>
@@ -2583,7 +2407,7 @@
           <a:bodyPr wrap="square" lIns="0" tIns="0" rIns="0" bIns="0" rtlCol="0" anchor="ctr"/>
           <a:lstStyle/>
           <a:p>
-            <a:pPr algn="ctr" indent="0" marL="0">
+            <a:pPr marL="0" indent="0" algn="ctr">
               <a:buNone/>
             </a:pPr>
             <a:r>
@@ -2622,7 +2446,7 @@
           <a:bodyPr wrap="square" lIns="0" tIns="0" rIns="0" bIns="0" rtlCol="0" anchor="ctr"/>
           <a:lstStyle/>
           <a:p>
-            <a:pPr algn="ctr" indent="0" marL="0">
+            <a:pPr marL="0" indent="0" algn="ctr">
               <a:buNone/>
             </a:pPr>
             <a:r>
@@ -2681,7 +2505,7 @@
           <a:bodyPr wrap="square" lIns="0" tIns="0" rIns="0" bIns="0" rtlCol="0" anchor="ctr"/>
           <a:lstStyle/>
           <a:p>
-            <a:pPr algn="ctr" indent="0" marL="0">
+            <a:pPr marL="0" indent="0" algn="ctr">
               <a:buNone/>
             </a:pPr>
             <a:r>
@@ -2720,7 +2544,7 @@
           <a:bodyPr wrap="square" lIns="0" tIns="0" rIns="0" bIns="0" rtlCol="0" anchor="ctr"/>
           <a:lstStyle/>
           <a:p>
-            <a:pPr algn="ctr" indent="0" marL="0">
+            <a:pPr marL="0" indent="0" algn="ctr">
               <a:buNone/>
             </a:pPr>
             <a:r>
@@ -2804,7 +2628,7 @@
           <a:bodyPr wrap="square" lIns="0" tIns="0" rIns="0" bIns="0" rtlCol="0" anchor="ctr"/>
           <a:lstStyle/>
           <a:p>
-            <a:pPr indent="0" marL="0">
+            <a:pPr marL="0" indent="0">
               <a:buNone/>
             </a:pPr>
             <a:r>
@@ -2888,7 +2712,7 @@
           <a:bodyPr wrap="square" lIns="0" tIns="0" rIns="0" bIns="0" rtlCol="0" anchor="ctr"/>
           <a:lstStyle/>
           <a:p>
-            <a:pPr indent="0" marL="0">
+            <a:pPr marL="0" indent="0">
               <a:buNone/>
             </a:pPr>
             <a:r>
@@ -2972,7 +2796,7 @@
           <a:bodyPr wrap="square" lIns="0" tIns="0" rIns="0" bIns="0" rtlCol="0" anchor="ctr"/>
           <a:lstStyle/>
           <a:p>
-            <a:pPr indent="0" marL="0">
+            <a:pPr marL="0" indent="0">
               <a:buNone/>
             </a:pPr>
             <a:r>
@@ -3006,6 +2830,7 @@
         <a:solidFill>
           <a:srgbClr val="0A0E0B"/>
         </a:solidFill>
+        <a:effectLst/>
       </p:bgPr>
     </p:bg>
     <p:spTree>
@@ -3043,11 +2868,11 @@
           <a:bodyPr wrap="square" lIns="0" tIns="0" rIns="0" bIns="0" rtlCol="0" anchor="ctr"/>
           <a:lstStyle/>
           <a:p>
-            <a:pPr algn="l" indent="0" marL="0">
-              <a:buNone/>
-            </a:pPr>
-            <a:r>
-              <a:rPr lang="en-US" sz="800" b="1" spc="400" kern="0" dirty="0">
+            <a:pPr marL="0" indent="0" algn="l">
+              <a:buNone/>
+            </a:pPr>
+            <a:r>
+              <a:rPr lang="en-US" sz="800" b="1" kern="0" spc="400" dirty="0">
                 <a:solidFill>
                   <a:srgbClr val="22C55E"/>
                 </a:solidFill>
@@ -3079,7 +2904,7 @@
           <a:bodyPr wrap="square" lIns="0" tIns="0" rIns="0" bIns="0" rtlCol="0" anchor="ctr"/>
           <a:lstStyle/>
           <a:p>
-            <a:pPr algn="l" indent="0" marL="0">
+            <a:pPr marL="0" indent="0" algn="l">
               <a:buNone/>
             </a:pPr>
             <a:r>
@@ -3096,7 +2921,7 @@
             <a:endParaRPr lang="en-US" sz="4000" dirty="0"/>
           </a:p>
           <a:p>
-            <a:pPr algn="l" indent="0" marL="0">
+            <a:pPr marL="0" indent="0" algn="l">
               <a:buNone/>
             </a:pPr>
             <a:r>
@@ -3135,7 +2960,7 @@
           <a:bodyPr wrap="square" lIns="0" tIns="0" rIns="0" bIns="0" rtlCol="0" anchor="ctr"/>
           <a:lstStyle/>
           <a:p>
-            <a:pPr algn="l" indent="0" marL="0">
+            <a:pPr marL="0" indent="0" algn="l">
               <a:buNone/>
             </a:pPr>
             <a:r>
@@ -3219,7 +3044,7 @@
           <a:bodyPr wrap="square" lIns="0" tIns="0" rIns="0" bIns="0" rtlCol="0" anchor="ctr"/>
           <a:lstStyle/>
           <a:p>
-            <a:pPr indent="0" marL="0">
+            <a:pPr marL="0" indent="0">
               <a:buNone/>
             </a:pPr>
             <a:r>
@@ -3258,7 +3083,7 @@
           <a:bodyPr wrap="square" lIns="0" tIns="0" rIns="0" bIns="0" rtlCol="0" anchor="ctr"/>
           <a:lstStyle/>
           <a:p>
-            <a:pPr indent="0" marL="0">
+            <a:pPr marL="0" indent="0">
               <a:buNone/>
             </a:pPr>
             <a:r>
@@ -3342,7 +3167,7 @@
           <a:bodyPr wrap="square" lIns="0" tIns="0" rIns="0" bIns="0" rtlCol="0" anchor="ctr"/>
           <a:lstStyle/>
           <a:p>
-            <a:pPr indent="0" marL="0">
+            <a:pPr marL="0" indent="0">
               <a:buNone/>
             </a:pPr>
             <a:r>
@@ -3381,7 +3206,7 @@
           <a:bodyPr wrap="square" lIns="0" tIns="0" rIns="0" bIns="0" rtlCol="0" anchor="ctr"/>
           <a:lstStyle/>
           <a:p>
-            <a:pPr indent="0" marL="0">
+            <a:pPr marL="0" indent="0">
               <a:buNone/>
             </a:pPr>
             <a:r>
@@ -3465,7 +3290,7 @@
           <a:bodyPr wrap="square" lIns="0" tIns="0" rIns="0" bIns="0" rtlCol="0" anchor="ctr"/>
           <a:lstStyle/>
           <a:p>
-            <a:pPr indent="0" marL="0">
+            <a:pPr marL="0" indent="0">
               <a:buNone/>
             </a:pPr>
             <a:r>
@@ -3504,7 +3329,7 @@
           <a:bodyPr wrap="square" lIns="0" tIns="0" rIns="0" bIns="0" rtlCol="0" anchor="ctr"/>
           <a:lstStyle/>
           <a:p>
-            <a:pPr indent="0" marL="0">
+            <a:pPr marL="0" indent="0">
               <a:buNone/>
             </a:pPr>
             <a:r>
@@ -3588,7 +3413,7 @@
           <a:bodyPr wrap="square" lIns="0" tIns="0" rIns="0" bIns="0" rtlCol="0" anchor="ctr"/>
           <a:lstStyle/>
           <a:p>
-            <a:pPr indent="0" marL="0">
+            <a:pPr marL="0" indent="0">
               <a:buNone/>
             </a:pPr>
             <a:r>
@@ -3627,7 +3452,7 @@
           <a:bodyPr wrap="square" lIns="0" tIns="0" rIns="0" bIns="0" rtlCol="0" anchor="ctr"/>
           <a:lstStyle/>
           <a:p>
-            <a:pPr indent="0" marL="0">
+            <a:pPr marL="0" indent="0">
               <a:buNone/>
             </a:pPr>
             <a:r>
@@ -3644,7 +3469,7 @@
             <a:endParaRPr lang="en-US" sz="1100" dirty="0"/>
           </a:p>
           <a:p>
-            <a:pPr indent="0" marL="0">
+            <a:pPr marL="0" indent="0">
               <a:buNone/>
             </a:pPr>
             <a:r>
@@ -3683,7 +3508,7 @@
           <a:bodyPr wrap="square" lIns="0" tIns="0" rIns="0" bIns="0" rtlCol="0" anchor="ctr"/>
           <a:lstStyle/>
           <a:p>
-            <a:pPr indent="0" marL="0">
+            <a:pPr marL="0" indent="0">
               <a:buNone/>
             </a:pPr>
             <a:r>
@@ -3717,6 +3542,7 @@
         <a:solidFill>
           <a:srgbClr val="0A0E0B"/>
         </a:solidFill>
+        <a:effectLst/>
       </p:bgPr>
     </p:bg>
     <p:spTree>
@@ -3754,11 +3580,11 @@
           <a:bodyPr wrap="square" lIns="0" tIns="0" rIns="0" bIns="0" rtlCol="0" anchor="ctr"/>
           <a:lstStyle/>
           <a:p>
-            <a:pPr algn="l" indent="0" marL="0">
-              <a:buNone/>
-            </a:pPr>
-            <a:r>
-              <a:rPr lang="en-US" sz="800" b="1" spc="400" kern="0" dirty="0">
+            <a:pPr marL="0" indent="0" algn="l">
+              <a:buNone/>
+            </a:pPr>
+            <a:r>
+              <a:rPr lang="en-US" sz="800" b="1" kern="0" spc="400" dirty="0">
                 <a:solidFill>
                   <a:srgbClr val="22C55E"/>
                 </a:solidFill>
@@ -3790,7 +3616,7 @@
           <a:bodyPr wrap="square" lIns="0" tIns="0" rIns="0" bIns="0" rtlCol="0" anchor="ctr"/>
           <a:lstStyle/>
           <a:p>
-            <a:pPr algn="ctr" indent="0" marL="0">
+            <a:pPr marL="0" indent="0" algn="ctr">
               <a:buNone/>
             </a:pPr>
             <a:r>
@@ -3829,7 +3655,7 @@
           <a:bodyPr wrap="square" lIns="0" tIns="0" rIns="0" bIns="0" rtlCol="0" anchor="ctr"/>
           <a:lstStyle/>
           <a:p>
-            <a:pPr algn="ctr" indent="0" marL="0">
+            <a:pPr marL="0" indent="0" algn="ctr">
               <a:buNone/>
             </a:pPr>
             <a:r>
@@ -3846,7 +3672,7 @@
             <a:endParaRPr lang="en-US" sz="1500" dirty="0"/>
           </a:p>
           <a:p>
-            <a:pPr algn="ctr" indent="0" marL="0">
+            <a:pPr marL="0" indent="0" algn="ctr">
               <a:buNone/>
             </a:pPr>
             <a:r>
@@ -3930,11 +3756,11 @@
           <a:bodyPr wrap="square" lIns="0" tIns="0" rIns="0" bIns="0" rtlCol="0" anchor="ctr"/>
           <a:lstStyle/>
           <a:p>
-            <a:pPr indent="0" marL="0">
-              <a:buNone/>
-            </a:pPr>
-            <a:r>
-              <a:rPr lang="en-US" sz="1000" b="1" spc="200" kern="0" dirty="0">
+            <a:pPr marL="0" indent="0">
+              <a:buNone/>
+            </a:pPr>
+            <a:r>
+              <a:rPr lang="en-US" sz="1000" b="1" kern="0" spc="200" dirty="0">
                 <a:solidFill>
                   <a:srgbClr val="22C55E"/>
                 </a:solidFill>
@@ -3950,379 +3776,7 @@
       </p:sp>
       <p:pic>
         <p:nvPicPr>
-          <p:cNvPr id="8" name="Image 0" descr="preencoded.png">    </p:cNvPr>
-          <p:cNvPicPr>
-            <a:picLocks noChangeAspect="1"/>
-          </p:cNvPicPr>
-          <p:nvPr/>
-        </p:nvPicPr>
-        <p:blipFill>
-          <a:blip r:embed="rId1"/>
-          <a:stretch>
-            <a:fillRect/>
-          </a:stretch>
-        </p:blipFill>
-        <p:spPr>
-          <a:xfrm>
-            <a:off x="512064" y="2606040"/>
-            <a:ext cx="502920" cy="502920"/>
-          </a:xfrm>
-          <a:prstGeom prst="rect">
-            <a:avLst/>
-          </a:prstGeom>
-        </p:spPr>
-      </p:pic>
-      <p:sp>
-        <p:nvSpPr>
-          <p:cNvPr id="9" name="Text 6"/>
-          <p:cNvSpPr/>
-          <p:nvPr/>
-        </p:nvSpPr>
-        <p:spPr>
-          <a:xfrm>
-            <a:off x="512064" y="3200400"/>
-            <a:ext cx="2377440" cy="411480"/>
-          </a:xfrm>
-          <a:prstGeom prst="rect">
-            <a:avLst/>
-          </a:prstGeom>
-          <a:noFill/>
-          <a:ln/>
-        </p:spPr>
-        <p:txBody>
-          <a:bodyPr wrap="square" lIns="0" tIns="0" rIns="0" bIns="0" rtlCol="0" anchor="ctr"/>
-          <a:lstStyle/>
-          <a:p>
-            <a:pPr indent="0" marL="0">
-              <a:buNone/>
-            </a:pPr>
-            <a:r>
-              <a:rPr lang="en-US" sz="1800" b="1" dirty="0">
-                <a:solidFill>
-                  <a:srgbClr val="FFFFFF"/>
-                </a:solidFill>
-                <a:latin typeface="Trebuchet MS" pitchFamily="34" charset="0"/>
-                <a:ea typeface="Trebuchet MS" pitchFamily="34" charset="-122"/>
-                <a:cs typeface="Trebuchet MS" pitchFamily="34" charset="-120"/>
-              </a:rPr>
-              <a:t>Calculate</a:t>
-            </a:r>
-            <a:endParaRPr lang="en-US" sz="1800" dirty="0"/>
-          </a:p>
-        </p:txBody>
-      </p:sp>
-      <p:sp>
-        <p:nvSpPr>
-          <p:cNvPr id="10" name="Text 7"/>
-          <p:cNvSpPr/>
-          <p:nvPr/>
-        </p:nvSpPr>
-        <p:spPr>
-          <a:xfrm>
-            <a:off x="512064" y="3639312"/>
-            <a:ext cx="2377440" cy="914400"/>
-          </a:xfrm>
-          <a:prstGeom prst="rect">
-            <a:avLst/>
-          </a:prstGeom>
-          <a:noFill/>
-          <a:ln/>
-        </p:spPr>
-        <p:txBody>
-          <a:bodyPr wrap="square" lIns="0" tIns="0" rIns="0" bIns="0" rtlCol="0" anchor="ctr"/>
-          <a:lstStyle/>
-          <a:p>
-            <a:pPr indent="0" marL="0">
-              <a:buNone/>
-            </a:pPr>
-            <a:r>
-              <a:rPr lang="en-US" sz="1050" dirty="0">
-                <a:solidFill>
-                  <a:srgbClr val="E8EDE9"/>
-                </a:solidFill>
-                <a:latin typeface="Calibri" pitchFamily="34" charset="0"/>
-                <a:ea typeface="Calibri" pitchFamily="34" charset="-122"/>
-                <a:cs typeface="Calibri" pitchFamily="34" charset="-120"/>
-              </a:rPr>
-              <a:t>Multi-step footprint calculator with real emission factors across food, transport, and home energy. Or Quick Mode — 30 seconds.</a:t>
-            </a:r>
-            <a:endParaRPr lang="en-US" sz="1050" dirty="0"/>
-          </a:p>
-        </p:txBody>
-      </p:sp>
-      <p:sp>
-        <p:nvSpPr>
-          <p:cNvPr id="11" name="Shape 8"/>
-          <p:cNvSpPr/>
-          <p:nvPr/>
-        </p:nvSpPr>
-        <p:spPr>
-          <a:xfrm>
-            <a:off x="3209544" y="2103120"/>
-            <a:ext cx="2651760" cy="2606040"/>
-          </a:xfrm>
-          <a:prstGeom prst="rect">
-            <a:avLst/>
-          </a:prstGeom>
-          <a:solidFill>
-            <a:srgbClr val="1A2218"/>
-          </a:solidFill>
-          <a:ln w="6350">
-            <a:solidFill>
-              <a:srgbClr val="223020"/>
-            </a:solidFill>
-            <a:prstDash val="solid"/>
-          </a:ln>
-        </p:spPr>
-      </p:sp>
-      <p:sp>
-        <p:nvSpPr>
-          <p:cNvPr id="12" name="Shape 9"/>
-          <p:cNvSpPr/>
-          <p:nvPr/>
-        </p:nvSpPr>
-        <p:spPr>
-          <a:xfrm>
-            <a:off x="3209544" y="2103120"/>
-            <a:ext cx="2651760" cy="45720"/>
-          </a:xfrm>
-          <a:prstGeom prst="rect">
-            <a:avLst/>
-          </a:prstGeom>
-          <a:solidFill>
-            <a:srgbClr val="4ADE80"/>
-          </a:solidFill>
-          <a:ln/>
-        </p:spPr>
-      </p:sp>
-      <p:sp>
-        <p:nvSpPr>
-          <p:cNvPr id="13" name="Text 10"/>
-          <p:cNvSpPr/>
-          <p:nvPr/>
-        </p:nvSpPr>
-        <p:spPr>
-          <a:xfrm>
-            <a:off x="3374136" y="2212848"/>
-            <a:ext cx="548640" cy="365760"/>
-          </a:xfrm>
-          <a:prstGeom prst="rect">
-            <a:avLst/>
-          </a:prstGeom>
-          <a:noFill/>
-          <a:ln/>
-        </p:spPr>
-        <p:txBody>
-          <a:bodyPr wrap="square" lIns="0" tIns="0" rIns="0" bIns="0" rtlCol="0" anchor="ctr"/>
-          <a:lstStyle/>
-          <a:p>
-            <a:pPr indent="0" marL="0">
-              <a:buNone/>
-            </a:pPr>
-            <a:r>
-              <a:rPr lang="en-US" sz="1000" b="1" spc="200" kern="0" dirty="0">
-                <a:solidFill>
-                  <a:srgbClr val="22C55E"/>
-                </a:solidFill>
-                <a:latin typeface="Trebuchet MS" pitchFamily="34" charset="0"/>
-                <a:ea typeface="Trebuchet MS" pitchFamily="34" charset="-122"/>
-                <a:cs typeface="Trebuchet MS" pitchFamily="34" charset="-120"/>
-              </a:rPr>
-              <a:t>02</a:t>
-            </a:r>
-            <a:endParaRPr lang="en-US" sz="1000" dirty="0"/>
-          </a:p>
-        </p:txBody>
-      </p:sp>
-      <p:pic>
-        <p:nvPicPr>
-          <p:cNvPr id="14" name="Image 1" descr="preencoded.png">    </p:cNvPr>
-          <p:cNvPicPr>
-            <a:picLocks noChangeAspect="1"/>
-          </p:cNvPicPr>
-          <p:nvPr/>
-        </p:nvPicPr>
-        <p:blipFill>
-          <a:blip r:embed="rId2"/>
-          <a:stretch>
-            <a:fillRect/>
-          </a:stretch>
-        </p:blipFill>
-        <p:spPr>
-          <a:xfrm>
-            <a:off x="3374136" y="2606040"/>
-            <a:ext cx="502920" cy="502920"/>
-          </a:xfrm>
-          <a:prstGeom prst="rect">
-            <a:avLst/>
-          </a:prstGeom>
-        </p:spPr>
-      </p:pic>
-      <p:sp>
-        <p:nvSpPr>
-          <p:cNvPr id="15" name="Text 11"/>
-          <p:cNvSpPr/>
-          <p:nvPr/>
-        </p:nvSpPr>
-        <p:spPr>
-          <a:xfrm>
-            <a:off x="3374136" y="3200400"/>
-            <a:ext cx="2377440" cy="411480"/>
-          </a:xfrm>
-          <a:prstGeom prst="rect">
-            <a:avLst/>
-          </a:prstGeom>
-          <a:noFill/>
-          <a:ln/>
-        </p:spPr>
-        <p:txBody>
-          <a:bodyPr wrap="square" lIns="0" tIns="0" rIns="0" bIns="0" rtlCol="0" anchor="ctr"/>
-          <a:lstStyle/>
-          <a:p>
-            <a:pPr indent="0" marL="0">
-              <a:buNone/>
-            </a:pPr>
-            <a:r>
-              <a:rPr lang="en-US" sz="1800" b="1" dirty="0">
-                <a:solidFill>
-                  <a:srgbClr val="FFFFFF"/>
-                </a:solidFill>
-                <a:latin typeface="Trebuchet MS" pitchFamily="34" charset="0"/>
-                <a:ea typeface="Trebuchet MS" pitchFamily="34" charset="-122"/>
-                <a:cs typeface="Trebuchet MS" pitchFamily="34" charset="-120"/>
-              </a:rPr>
-              <a:t>Connect</a:t>
-            </a:r>
-            <a:endParaRPr lang="en-US" sz="1800" dirty="0"/>
-          </a:p>
-        </p:txBody>
-      </p:sp>
-      <p:sp>
-        <p:nvSpPr>
-          <p:cNvPr id="16" name="Text 12"/>
-          <p:cNvSpPr/>
-          <p:nvPr/>
-        </p:nvSpPr>
-        <p:spPr>
-          <a:xfrm>
-            <a:off x="3374136" y="3639312"/>
-            <a:ext cx="2377440" cy="914400"/>
-          </a:xfrm>
-          <a:prstGeom prst="rect">
-            <a:avLst/>
-          </a:prstGeom>
-          <a:noFill/>
-          <a:ln/>
-        </p:spPr>
-        <p:txBody>
-          <a:bodyPr wrap="square" lIns="0" tIns="0" rIns="0" bIns="0" rtlCol="0" anchor="ctr"/>
-          <a:lstStyle/>
-          <a:p>
-            <a:pPr indent="0" marL="0">
-              <a:buNone/>
-            </a:pPr>
-            <a:r>
-              <a:rPr lang="en-US" sz="1050" dirty="0">
-                <a:solidFill>
-                  <a:srgbClr val="E8EDE9"/>
-                </a:solidFill>
-                <a:latin typeface="Calibri" pitchFamily="34" charset="0"/>
-                <a:ea typeface="Calibri" pitchFamily="34" charset="-122"/>
-                <a:cs typeface="Calibri" pitchFamily="34" charset="-120"/>
-              </a:rPr>
-              <a:t>Live interactive map powered by OpenStreetMap. Shows food banks, recycling depots, community fridges, and green initiatives near you.</a:t>
-            </a:r>
-            <a:endParaRPr lang="en-US" sz="1050" dirty="0"/>
-          </a:p>
-        </p:txBody>
-      </p:sp>
-      <p:sp>
-        <p:nvSpPr>
-          <p:cNvPr id="17" name="Shape 13"/>
-          <p:cNvSpPr/>
-          <p:nvPr/>
-        </p:nvSpPr>
-        <p:spPr>
-          <a:xfrm>
-            <a:off x="6071616" y="2103120"/>
-            <a:ext cx="2651760" cy="2606040"/>
-          </a:xfrm>
-          <a:prstGeom prst="rect">
-            <a:avLst/>
-          </a:prstGeom>
-          <a:solidFill>
-            <a:srgbClr val="1A2218"/>
-          </a:solidFill>
-          <a:ln w="6350">
-            <a:solidFill>
-              <a:srgbClr val="223020"/>
-            </a:solidFill>
-            <a:prstDash val="solid"/>
-          </a:ln>
-        </p:spPr>
-      </p:sp>
-      <p:sp>
-        <p:nvSpPr>
-          <p:cNvPr id="18" name="Shape 14"/>
-          <p:cNvSpPr/>
-          <p:nvPr/>
-        </p:nvSpPr>
-        <p:spPr>
-          <a:xfrm>
-            <a:off x="6071616" y="2103120"/>
-            <a:ext cx="2651760" cy="45720"/>
-          </a:xfrm>
-          <a:prstGeom prst="rect">
-            <a:avLst/>
-          </a:prstGeom>
-          <a:solidFill>
-            <a:srgbClr val="4ADE80"/>
-          </a:solidFill>
-          <a:ln/>
-        </p:spPr>
-      </p:sp>
-      <p:sp>
-        <p:nvSpPr>
-          <p:cNvPr id="19" name="Text 15"/>
-          <p:cNvSpPr/>
-          <p:nvPr/>
-        </p:nvSpPr>
-        <p:spPr>
-          <a:xfrm>
-            <a:off x="6236208" y="2212848"/>
-            <a:ext cx="548640" cy="365760"/>
-          </a:xfrm>
-          <a:prstGeom prst="rect">
-            <a:avLst/>
-          </a:prstGeom>
-          <a:noFill/>
-          <a:ln/>
-        </p:spPr>
-        <p:txBody>
-          <a:bodyPr wrap="square" lIns="0" tIns="0" rIns="0" bIns="0" rtlCol="0" anchor="ctr"/>
-          <a:lstStyle/>
-          <a:p>
-            <a:pPr indent="0" marL="0">
-              <a:buNone/>
-            </a:pPr>
-            <a:r>
-              <a:rPr lang="en-US" sz="1000" b="1" spc="200" kern="0" dirty="0">
-                <a:solidFill>
-                  <a:srgbClr val="22C55E"/>
-                </a:solidFill>
-                <a:latin typeface="Trebuchet MS" pitchFamily="34" charset="0"/>
-                <a:ea typeface="Trebuchet MS" pitchFamily="34" charset="-122"/>
-                <a:cs typeface="Trebuchet MS" pitchFamily="34" charset="-120"/>
-              </a:rPr>
-              <a:t>03</a:t>
-            </a:r>
-            <a:endParaRPr lang="en-US" sz="1000" dirty="0"/>
-          </a:p>
-        </p:txBody>
-      </p:sp>
-      <p:pic>
-        <p:nvPicPr>
-          <p:cNvPr id="20" name="Image 2" descr="preencoded.png">    </p:cNvPr>
+          <p:cNvPr id="8" name="Image 0" descr="preencoded.png"/>
           <p:cNvPicPr>
             <a:picLocks noChangeAspect="1"/>
           </p:cNvPicPr>
@@ -4336,7 +3790,7 @@
         </p:blipFill>
         <p:spPr>
           <a:xfrm>
-            <a:off x="6236208" y="2606040"/>
+            <a:off x="512064" y="2606040"/>
             <a:ext cx="502920" cy="502920"/>
           </a:xfrm>
           <a:prstGeom prst="rect">
@@ -4346,13 +3800,13 @@
       </p:pic>
       <p:sp>
         <p:nvSpPr>
-          <p:cNvPr id="21" name="Text 16"/>
-          <p:cNvSpPr/>
-          <p:nvPr/>
-        </p:nvSpPr>
-        <p:spPr>
-          <a:xfrm>
-            <a:off x="6236208" y="3200400"/>
+          <p:cNvPr id="9" name="Text 6"/>
+          <p:cNvSpPr/>
+          <p:nvPr/>
+        </p:nvSpPr>
+        <p:spPr>
+          <a:xfrm>
+            <a:off x="512064" y="3200400"/>
             <a:ext cx="2377440" cy="411480"/>
           </a:xfrm>
           <a:prstGeom prst="rect">
@@ -4365,7 +3819,7 @@
           <a:bodyPr wrap="square" lIns="0" tIns="0" rIns="0" bIns="0" rtlCol="0" anchor="ctr"/>
           <a:lstStyle/>
           <a:p>
-            <a:pPr indent="0" marL="0">
+            <a:pPr marL="0" indent="0">
               <a:buNone/>
             </a:pPr>
             <a:r>
@@ -4377,7 +3831,7 @@
                 <a:ea typeface="Trebuchet MS" pitchFamily="34" charset="-122"/>
                 <a:cs typeface="Trebuchet MS" pitchFamily="34" charset="-120"/>
               </a:rPr>
-              <a:t>Commit</a:t>
+              <a:t>Calculate</a:t>
             </a:r>
             <a:endParaRPr lang="en-US" sz="1800" dirty="0"/>
           </a:p>
@@ -4385,13 +3839,13 @@
       </p:sp>
       <p:sp>
         <p:nvSpPr>
-          <p:cNvPr id="22" name="Text 17"/>
-          <p:cNvSpPr/>
-          <p:nvPr/>
-        </p:nvSpPr>
-        <p:spPr>
-          <a:xfrm>
-            <a:off x="6236208" y="3639312"/>
+          <p:cNvPr id="10" name="Text 7"/>
+          <p:cNvSpPr/>
+          <p:nvPr/>
+        </p:nvSpPr>
+        <p:spPr>
+          <a:xfrm>
+            <a:off x="512064" y="3639312"/>
             <a:ext cx="2377440" cy="914400"/>
           </a:xfrm>
           <a:prstGeom prst="rect">
@@ -4404,7 +3858,7 @@
           <a:bodyPr wrap="square" lIns="0" tIns="0" rIns="0" bIns="0" rtlCol="0" anchor="ctr"/>
           <a:lstStyle/>
           <a:p>
-            <a:pPr indent="0" marL="0">
+            <a:pPr marL="0" indent="0">
               <a:buNone/>
             </a:pPr>
             <a:r>
@@ -4416,15 +3870,99 @@
                 <a:ea typeface="Calibri" pitchFamily="34" charset="-122"/>
                 <a:cs typeface="Calibri" pitchFamily="34" charset="-120"/>
               </a:rPr>
-              <a:t>AI action plan, What If simulator, 7-day check-in, badge system, and a neighbourhood counter showing collective impact.</a:t>
+              <a:t>Multi-step footprint calculator with real emission factors across food, transport, and home energy. Or Quick Mode — 30 seconds.</a:t>
             </a:r>
             <a:endParaRPr lang="en-US" sz="1050" dirty="0"/>
+          </a:p>
+        </p:txBody>
+      </p:sp>
+      <p:sp>
+        <p:nvSpPr>
+          <p:cNvPr id="11" name="Shape 8"/>
+          <p:cNvSpPr/>
+          <p:nvPr/>
+        </p:nvSpPr>
+        <p:spPr>
+          <a:xfrm>
+            <a:off x="3209544" y="2103120"/>
+            <a:ext cx="2651760" cy="2606040"/>
+          </a:xfrm>
+          <a:prstGeom prst="rect">
+            <a:avLst/>
+          </a:prstGeom>
+          <a:solidFill>
+            <a:srgbClr val="1A2218"/>
+          </a:solidFill>
+          <a:ln w="6350">
+            <a:solidFill>
+              <a:srgbClr val="223020"/>
+            </a:solidFill>
+            <a:prstDash val="solid"/>
+          </a:ln>
+        </p:spPr>
+      </p:sp>
+      <p:sp>
+        <p:nvSpPr>
+          <p:cNvPr id="12" name="Shape 9"/>
+          <p:cNvSpPr/>
+          <p:nvPr/>
+        </p:nvSpPr>
+        <p:spPr>
+          <a:xfrm>
+            <a:off x="3209544" y="2103120"/>
+            <a:ext cx="2651760" cy="45720"/>
+          </a:xfrm>
+          <a:prstGeom prst="rect">
+            <a:avLst/>
+          </a:prstGeom>
+          <a:solidFill>
+            <a:srgbClr val="4ADE80"/>
+          </a:solidFill>
+          <a:ln/>
+        </p:spPr>
+      </p:sp>
+      <p:sp>
+        <p:nvSpPr>
+          <p:cNvPr id="13" name="Text 10"/>
+          <p:cNvSpPr/>
+          <p:nvPr/>
+        </p:nvSpPr>
+        <p:spPr>
+          <a:xfrm>
+            <a:off x="3374136" y="2212848"/>
+            <a:ext cx="548640" cy="365760"/>
+          </a:xfrm>
+          <a:prstGeom prst="rect">
+            <a:avLst/>
+          </a:prstGeom>
+          <a:noFill/>
+          <a:ln/>
+        </p:spPr>
+        <p:txBody>
+          <a:bodyPr wrap="square" lIns="0" tIns="0" rIns="0" bIns="0" rtlCol="0" anchor="ctr"/>
+          <a:lstStyle/>
+          <a:p>
+            <a:pPr marL="0" indent="0">
+              <a:buNone/>
+            </a:pPr>
+            <a:r>
+              <a:rPr lang="en-US" sz="1000" b="1" kern="0" spc="200" dirty="0">
+                <a:solidFill>
+                  <a:srgbClr val="22C55E"/>
+                </a:solidFill>
+                <a:latin typeface="Trebuchet MS" pitchFamily="34" charset="0"/>
+                <a:ea typeface="Trebuchet MS" pitchFamily="34" charset="-122"/>
+                <a:cs typeface="Trebuchet MS" pitchFamily="34" charset="-120"/>
+              </a:rPr>
+              <a:t>02</a:t>
+            </a:r>
+            <a:endParaRPr lang="en-US" sz="1000" dirty="0"/>
           </a:p>
         </p:txBody>
       </p:sp>
       <p:pic>
         <p:nvPicPr>
-          <p:cNvPr id="23" name="Image 3" descr="preencoded.png">    </p:cNvPr>
+          <p:cNvPr id="14" name="Image 1" descr="preencoded.png"/>
           <p:cNvPicPr>
             <a:picLocks noChangeAspect="1"/>
           </p:cNvPicPr>
@@ -4438,6 +3976,294 @@
         </p:blipFill>
         <p:spPr>
           <a:xfrm>
+            <a:off x="3374136" y="2606040"/>
+            <a:ext cx="502920" cy="502920"/>
+          </a:xfrm>
+          <a:prstGeom prst="rect">
+            <a:avLst/>
+          </a:prstGeom>
+        </p:spPr>
+      </p:pic>
+      <p:sp>
+        <p:nvSpPr>
+          <p:cNvPr id="15" name="Text 11"/>
+          <p:cNvSpPr/>
+          <p:nvPr/>
+        </p:nvSpPr>
+        <p:spPr>
+          <a:xfrm>
+            <a:off x="3374136" y="3200400"/>
+            <a:ext cx="2377440" cy="411480"/>
+          </a:xfrm>
+          <a:prstGeom prst="rect">
+            <a:avLst/>
+          </a:prstGeom>
+          <a:noFill/>
+          <a:ln/>
+        </p:spPr>
+        <p:txBody>
+          <a:bodyPr wrap="square" lIns="0" tIns="0" rIns="0" bIns="0" rtlCol="0" anchor="ctr"/>
+          <a:lstStyle/>
+          <a:p>
+            <a:pPr marL="0" indent="0">
+              <a:buNone/>
+            </a:pPr>
+            <a:r>
+              <a:rPr lang="en-US" sz="1800" b="1" dirty="0">
+                <a:solidFill>
+                  <a:srgbClr val="FFFFFF"/>
+                </a:solidFill>
+                <a:latin typeface="Trebuchet MS" pitchFamily="34" charset="0"/>
+                <a:ea typeface="Trebuchet MS" pitchFamily="34" charset="-122"/>
+                <a:cs typeface="Trebuchet MS" pitchFamily="34" charset="-120"/>
+              </a:rPr>
+              <a:t>Connect</a:t>
+            </a:r>
+            <a:endParaRPr lang="en-US" sz="1800" dirty="0"/>
+          </a:p>
+        </p:txBody>
+      </p:sp>
+      <p:sp>
+        <p:nvSpPr>
+          <p:cNvPr id="16" name="Text 12"/>
+          <p:cNvSpPr/>
+          <p:nvPr/>
+        </p:nvSpPr>
+        <p:spPr>
+          <a:xfrm>
+            <a:off x="3374136" y="3639312"/>
+            <a:ext cx="2377440" cy="914400"/>
+          </a:xfrm>
+          <a:prstGeom prst="rect">
+            <a:avLst/>
+          </a:prstGeom>
+          <a:noFill/>
+          <a:ln/>
+        </p:spPr>
+        <p:txBody>
+          <a:bodyPr wrap="square" lIns="0" tIns="0" rIns="0" bIns="0" rtlCol="0" anchor="ctr"/>
+          <a:lstStyle/>
+          <a:p>
+            <a:pPr marL="0" indent="0">
+              <a:buNone/>
+            </a:pPr>
+            <a:r>
+              <a:rPr lang="en-US" sz="1050" dirty="0">
+                <a:solidFill>
+                  <a:srgbClr val="E8EDE9"/>
+                </a:solidFill>
+                <a:latin typeface="Calibri" pitchFamily="34" charset="0"/>
+                <a:ea typeface="Calibri" pitchFamily="34" charset="-122"/>
+                <a:cs typeface="Calibri" pitchFamily="34" charset="-120"/>
+              </a:rPr>
+              <a:t>Live interactive map powered by OpenStreetMap. Shows food banks, recycling depots, community fridges, and green initiatives near you.</a:t>
+            </a:r>
+            <a:endParaRPr lang="en-US" sz="1050" dirty="0"/>
+          </a:p>
+        </p:txBody>
+      </p:sp>
+      <p:sp>
+        <p:nvSpPr>
+          <p:cNvPr id="17" name="Shape 13"/>
+          <p:cNvSpPr/>
+          <p:nvPr/>
+        </p:nvSpPr>
+        <p:spPr>
+          <a:xfrm>
+            <a:off x="6071616" y="2103120"/>
+            <a:ext cx="2651760" cy="2606040"/>
+          </a:xfrm>
+          <a:prstGeom prst="rect">
+            <a:avLst/>
+          </a:prstGeom>
+          <a:solidFill>
+            <a:srgbClr val="1A2218"/>
+          </a:solidFill>
+          <a:ln w="6350">
+            <a:solidFill>
+              <a:srgbClr val="223020"/>
+            </a:solidFill>
+            <a:prstDash val="solid"/>
+          </a:ln>
+        </p:spPr>
+      </p:sp>
+      <p:sp>
+        <p:nvSpPr>
+          <p:cNvPr id="18" name="Shape 14"/>
+          <p:cNvSpPr/>
+          <p:nvPr/>
+        </p:nvSpPr>
+        <p:spPr>
+          <a:xfrm>
+            <a:off x="6071616" y="2103120"/>
+            <a:ext cx="2651760" cy="45720"/>
+          </a:xfrm>
+          <a:prstGeom prst="rect">
+            <a:avLst/>
+          </a:prstGeom>
+          <a:solidFill>
+            <a:srgbClr val="4ADE80"/>
+          </a:solidFill>
+          <a:ln/>
+        </p:spPr>
+      </p:sp>
+      <p:sp>
+        <p:nvSpPr>
+          <p:cNvPr id="19" name="Text 15"/>
+          <p:cNvSpPr/>
+          <p:nvPr/>
+        </p:nvSpPr>
+        <p:spPr>
+          <a:xfrm>
+            <a:off x="6236208" y="2212848"/>
+            <a:ext cx="548640" cy="365760"/>
+          </a:xfrm>
+          <a:prstGeom prst="rect">
+            <a:avLst/>
+          </a:prstGeom>
+          <a:noFill/>
+          <a:ln/>
+        </p:spPr>
+        <p:txBody>
+          <a:bodyPr wrap="square" lIns="0" tIns="0" rIns="0" bIns="0" rtlCol="0" anchor="ctr"/>
+          <a:lstStyle/>
+          <a:p>
+            <a:pPr marL="0" indent="0">
+              <a:buNone/>
+            </a:pPr>
+            <a:r>
+              <a:rPr lang="en-US" sz="1000" b="1" kern="0" spc="200" dirty="0">
+                <a:solidFill>
+                  <a:srgbClr val="22C55E"/>
+                </a:solidFill>
+                <a:latin typeface="Trebuchet MS" pitchFamily="34" charset="0"/>
+                <a:ea typeface="Trebuchet MS" pitchFamily="34" charset="-122"/>
+                <a:cs typeface="Trebuchet MS" pitchFamily="34" charset="-120"/>
+              </a:rPr>
+              <a:t>03</a:t>
+            </a:r>
+            <a:endParaRPr lang="en-US" sz="1000" dirty="0"/>
+          </a:p>
+        </p:txBody>
+      </p:sp>
+      <p:pic>
+        <p:nvPicPr>
+          <p:cNvPr id="20" name="Image 2" descr="preencoded.png"/>
+          <p:cNvPicPr>
+            <a:picLocks noChangeAspect="1"/>
+          </p:cNvPicPr>
+          <p:nvPr/>
+        </p:nvPicPr>
+        <p:blipFill>
+          <a:blip r:embed="rId5"/>
+          <a:stretch>
+            <a:fillRect/>
+          </a:stretch>
+        </p:blipFill>
+        <p:spPr>
+          <a:xfrm>
+            <a:off x="6236208" y="2606040"/>
+            <a:ext cx="502920" cy="502920"/>
+          </a:xfrm>
+          <a:prstGeom prst="rect">
+            <a:avLst/>
+          </a:prstGeom>
+        </p:spPr>
+      </p:pic>
+      <p:sp>
+        <p:nvSpPr>
+          <p:cNvPr id="21" name="Text 16"/>
+          <p:cNvSpPr/>
+          <p:nvPr/>
+        </p:nvSpPr>
+        <p:spPr>
+          <a:xfrm>
+            <a:off x="6236208" y="3200400"/>
+            <a:ext cx="2377440" cy="411480"/>
+          </a:xfrm>
+          <a:prstGeom prst="rect">
+            <a:avLst/>
+          </a:prstGeom>
+          <a:noFill/>
+          <a:ln/>
+        </p:spPr>
+        <p:txBody>
+          <a:bodyPr wrap="square" lIns="0" tIns="0" rIns="0" bIns="0" rtlCol="0" anchor="ctr"/>
+          <a:lstStyle/>
+          <a:p>
+            <a:pPr marL="0" indent="0">
+              <a:buNone/>
+            </a:pPr>
+            <a:r>
+              <a:rPr lang="en-US" sz="1800" b="1" dirty="0">
+                <a:solidFill>
+                  <a:srgbClr val="FFFFFF"/>
+                </a:solidFill>
+                <a:latin typeface="Trebuchet MS" pitchFamily="34" charset="0"/>
+                <a:ea typeface="Trebuchet MS" pitchFamily="34" charset="-122"/>
+                <a:cs typeface="Trebuchet MS" pitchFamily="34" charset="-120"/>
+              </a:rPr>
+              <a:t>Commit</a:t>
+            </a:r>
+            <a:endParaRPr lang="en-US" sz="1800" dirty="0"/>
+          </a:p>
+        </p:txBody>
+      </p:sp>
+      <p:sp>
+        <p:nvSpPr>
+          <p:cNvPr id="22" name="Text 17"/>
+          <p:cNvSpPr/>
+          <p:nvPr/>
+        </p:nvSpPr>
+        <p:spPr>
+          <a:xfrm>
+            <a:off x="6236208" y="3639312"/>
+            <a:ext cx="2377440" cy="914400"/>
+          </a:xfrm>
+          <a:prstGeom prst="rect">
+            <a:avLst/>
+          </a:prstGeom>
+          <a:noFill/>
+          <a:ln/>
+        </p:spPr>
+        <p:txBody>
+          <a:bodyPr wrap="square" lIns="0" tIns="0" rIns="0" bIns="0" rtlCol="0" anchor="ctr"/>
+          <a:lstStyle/>
+          <a:p>
+            <a:pPr marL="0" indent="0">
+              <a:buNone/>
+            </a:pPr>
+            <a:r>
+              <a:rPr lang="en-US" sz="1050" dirty="0">
+                <a:solidFill>
+                  <a:srgbClr val="E8EDE9"/>
+                </a:solidFill>
+                <a:latin typeface="Calibri" pitchFamily="34" charset="0"/>
+                <a:ea typeface="Calibri" pitchFamily="34" charset="-122"/>
+                <a:cs typeface="Calibri" pitchFamily="34" charset="-120"/>
+              </a:rPr>
+              <a:t>AI action plan, What If simulator, 7-day check-in, badge system, and a neighbourhood counter showing collective impact.</a:t>
+            </a:r>
+            <a:endParaRPr lang="en-US" sz="1050" dirty="0"/>
+          </a:p>
+        </p:txBody>
+      </p:sp>
+      <p:pic>
+        <p:nvPicPr>
+          <p:cNvPr id="23" name="Image 3" descr="preencoded.png"/>
+          <p:cNvPicPr>
+            <a:picLocks noChangeAspect="1"/>
+          </p:cNvPicPr>
+          <p:nvPr/>
+        </p:nvPicPr>
+        <p:blipFill>
+          <a:blip r:embed="rId6"/>
+          <a:stretch>
+            <a:fillRect/>
+          </a:stretch>
+        </p:blipFill>
+        <p:spPr>
+          <a:xfrm>
             <a:off x="2999232" y="3246120"/>
             <a:ext cx="118872" cy="118872"/>
           </a:xfrm>
@@ -4448,14 +4274,14 @@
       </p:pic>
       <p:pic>
         <p:nvPicPr>
-          <p:cNvPr id="24" name="Image 4" descr="preencoded.png">    </p:cNvPr>
+          <p:cNvPr id="24" name="Image 4" descr="preencoded.png"/>
           <p:cNvPicPr>
             <a:picLocks noChangeAspect="1"/>
           </p:cNvPicPr>
           <p:nvPr/>
         </p:nvPicPr>
         <p:blipFill>
-          <a:blip r:embed="rId5"/>
+          <a:blip r:embed="rId6"/>
           <a:stretch>
             <a:fillRect/>
           </a:stretch>
@@ -4486,6 +4312,7 @@
         <a:solidFill>
           <a:srgbClr val="0A0E0B"/>
         </a:solidFill>
+        <a:effectLst/>
       </p:bgPr>
     </p:bg>
     <p:spTree>
@@ -4523,11 +4350,11 @@
           <a:bodyPr wrap="square" lIns="0" tIns="0" rIns="0" bIns="0" rtlCol="0" anchor="ctr"/>
           <a:lstStyle/>
           <a:p>
-            <a:pPr algn="l" indent="0" marL="0">
-              <a:buNone/>
-            </a:pPr>
-            <a:r>
-              <a:rPr lang="en-US" sz="800" b="1" spc="400" kern="0" dirty="0">
+            <a:pPr marL="0" indent="0" algn="l">
+              <a:buNone/>
+            </a:pPr>
+            <a:r>
+              <a:rPr lang="en-US" sz="800" b="1" kern="0" spc="400" dirty="0">
                 <a:solidFill>
                   <a:srgbClr val="22C55E"/>
                 </a:solidFill>
@@ -4559,7 +4386,7 @@
           <a:bodyPr wrap="square" lIns="0" tIns="0" rIns="0" bIns="0" rtlCol="0" anchor="ctr"/>
           <a:lstStyle/>
           <a:p>
-            <a:pPr indent="0" marL="0">
+            <a:pPr marL="0" indent="0">
               <a:buNone/>
             </a:pPr>
             <a:r>
@@ -4623,7 +4450,7 @@
           <a:bodyPr wrap="square" lIns="0" tIns="0" rIns="0" bIns="0" rtlCol="0" anchor="ctr"/>
           <a:lstStyle/>
           <a:p>
-            <a:pPr algn="ctr" indent="0" marL="0">
+            <a:pPr marL="0" indent="0" algn="ctr">
               <a:buNone/>
             </a:pPr>
             <a:r>
@@ -4663,491 +4490,7 @@
       </p:sp>
       <p:pic>
         <p:nvPicPr>
-          <p:cNvPr id="7" name="Image 0" descr="preencoded.png">    </p:cNvPr>
-          <p:cNvPicPr>
-            <a:picLocks noChangeAspect="1"/>
-          </p:cNvPicPr>
-          <p:nvPr/>
-        </p:nvPicPr>
-        <p:blipFill>
-          <a:blip r:embed="rId1"/>
-          <a:stretch>
-            <a:fillRect/>
-          </a:stretch>
-        </p:blipFill>
-        <p:spPr>
-          <a:xfrm>
-            <a:off x="1143000" y="1307592"/>
-            <a:ext cx="438912" cy="438912"/>
-          </a:xfrm>
-          <a:prstGeom prst="rect">
-            <a:avLst/>
-          </a:prstGeom>
-        </p:spPr>
-      </p:pic>
-      <p:sp>
-        <p:nvSpPr>
-          <p:cNvPr id="8" name="Text 5"/>
-          <p:cNvSpPr/>
-          <p:nvPr/>
-        </p:nvSpPr>
-        <p:spPr>
-          <a:xfrm>
-            <a:off x="1737360" y="1280160"/>
-            <a:ext cx="5029200" cy="320040"/>
-          </a:xfrm>
-          <a:prstGeom prst="rect">
-            <a:avLst/>
-          </a:prstGeom>
-          <a:noFill/>
-          <a:ln/>
-        </p:spPr>
-        <p:txBody>
-          <a:bodyPr wrap="square" lIns="0" tIns="0" rIns="0" bIns="0" rtlCol="0" anchor="ctr"/>
-          <a:lstStyle/>
-          <a:p>
-            <a:pPr indent="0" marL="0">
-              <a:buNone/>
-            </a:pPr>
-            <a:r>
-              <a:rPr lang="en-US" sz="1400" b="1" dirty="0">
-                <a:solidFill>
-                  <a:srgbClr val="FFFFFF"/>
-                </a:solidFill>
-                <a:latin typeface="Trebuchet MS" pitchFamily="34" charset="0"/>
-                <a:ea typeface="Trebuchet MS" pitchFamily="34" charset="-122"/>
-                <a:cs typeface="Trebuchet MS" pitchFamily="34" charset="-120"/>
-              </a:rPr>
-              <a:t>Answer questions about your lifestyle</a:t>
-            </a:r>
-            <a:endParaRPr lang="en-US" sz="1400" dirty="0"/>
-          </a:p>
-        </p:txBody>
-      </p:sp>
-      <p:sp>
-        <p:nvSpPr>
-          <p:cNvPr id="9" name="Text 6"/>
-          <p:cNvSpPr/>
-          <p:nvPr/>
-        </p:nvSpPr>
-        <p:spPr>
-          <a:xfrm>
-            <a:off x="1737360" y="1618488"/>
-            <a:ext cx="5029200" cy="685800"/>
-          </a:xfrm>
-          <a:prstGeom prst="rect">
-            <a:avLst/>
-          </a:prstGeom>
-          <a:noFill/>
-          <a:ln/>
-        </p:spPr>
-        <p:txBody>
-          <a:bodyPr wrap="square" lIns="0" tIns="0" rIns="0" bIns="0" rtlCol="0" anchor="ctr"/>
-          <a:lstStyle/>
-          <a:p>
-            <a:pPr indent="0" marL="0">
-              <a:buNone/>
-            </a:pPr>
-            <a:r>
-              <a:rPr lang="en-US" sz="1050" dirty="0">
-                <a:solidFill>
-                  <a:srgbClr val="E8EDE9"/>
-                </a:solidFill>
-                <a:latin typeface="Calibri" pitchFamily="34" charset="0"/>
-                <a:ea typeface="Calibri" pitchFamily="34" charset="-122"/>
-                <a:cs typeface="Calibri" pitchFamily="34" charset="-120"/>
-              </a:rPr>
-              <a:t>Pick from diet type, transport mode, home heating, and flight habits. Or choose a lifestyle archetype and skip the form entirely.</a:t>
-            </a:r>
-            <a:endParaRPr lang="en-US" sz="1050" dirty="0"/>
-          </a:p>
-        </p:txBody>
-      </p:sp>
-      <p:sp>
-        <p:nvSpPr>
-          <p:cNvPr id="10" name="Shape 7"/>
-          <p:cNvSpPr/>
-          <p:nvPr/>
-        </p:nvSpPr>
-        <p:spPr>
-          <a:xfrm>
-            <a:off x="6949440" y="1353312"/>
-            <a:ext cx="1783080" cy="310896"/>
-          </a:xfrm>
-          <a:prstGeom prst="rect">
-            <a:avLst/>
-          </a:prstGeom>
-          <a:solidFill>
-            <a:srgbClr val="000000">
-              <a:alpha val="0"/>
-            </a:srgbClr>
-          </a:solidFill>
-          <a:ln w="10160">
-            <a:solidFill>
-              <a:srgbClr val="22C55E"/>
-            </a:solidFill>
-            <a:prstDash val="solid"/>
-          </a:ln>
-        </p:spPr>
-      </p:sp>
-      <p:sp>
-        <p:nvSpPr>
-          <p:cNvPr id="11" name="Text 8"/>
-          <p:cNvSpPr/>
-          <p:nvPr/>
-        </p:nvSpPr>
-        <p:spPr>
-          <a:xfrm>
-            <a:off x="6949440" y="1353312"/>
-            <a:ext cx="1783080" cy="310896"/>
-          </a:xfrm>
-          <a:prstGeom prst="rect">
-            <a:avLst/>
-          </a:prstGeom>
-          <a:noFill/>
-          <a:ln/>
-        </p:spPr>
-        <p:txBody>
-          <a:bodyPr wrap="square" lIns="0" tIns="0" rIns="0" bIns="0" rtlCol="0" anchor="ctr"/>
-          <a:lstStyle/>
-          <a:p>
-            <a:pPr algn="ctr" indent="0" marL="0">
-              <a:buNone/>
-            </a:pPr>
-            <a:r>
-              <a:rPr lang="en-US" sz="850" b="1" dirty="0">
-                <a:solidFill>
-                  <a:srgbClr val="22C55E"/>
-                </a:solidFill>
-                <a:latin typeface="Calibri" pitchFamily="34" charset="0"/>
-                <a:ea typeface="Calibri" pitchFamily="34" charset="-122"/>
-                <a:cs typeface="Calibri" pitchFamily="34" charset="-120"/>
-              </a:rPr>
-              <a:t>3 min or 30 sec</a:t>
-            </a:r>
-            <a:endParaRPr lang="en-US" sz="850" dirty="0"/>
-          </a:p>
-        </p:txBody>
-      </p:sp>
-      <p:sp>
-        <p:nvSpPr>
-          <p:cNvPr id="12" name="Shape 9"/>
-          <p:cNvSpPr/>
-          <p:nvPr/>
-        </p:nvSpPr>
-        <p:spPr>
-          <a:xfrm>
-            <a:off x="457200" y="2514600"/>
-            <a:ext cx="502920" cy="502920"/>
-          </a:xfrm>
-          <a:prstGeom prst="ellipse">
-            <a:avLst/>
-          </a:prstGeom>
-          <a:solidFill>
-            <a:srgbClr val="131810"/>
-          </a:solidFill>
-          <a:ln w="19050">
-            <a:solidFill>
-              <a:srgbClr val="22C55E"/>
-            </a:solidFill>
-            <a:prstDash val="solid"/>
-          </a:ln>
-        </p:spPr>
-      </p:sp>
-      <p:sp>
-        <p:nvSpPr>
-          <p:cNvPr id="13" name="Text 10"/>
-          <p:cNvSpPr/>
-          <p:nvPr/>
-        </p:nvSpPr>
-        <p:spPr>
-          <a:xfrm>
-            <a:off x="457200" y="2569464"/>
-            <a:ext cx="502920" cy="365760"/>
-          </a:xfrm>
-          <a:prstGeom prst="rect">
-            <a:avLst/>
-          </a:prstGeom>
-          <a:noFill/>
-          <a:ln/>
-        </p:spPr>
-        <p:txBody>
-          <a:bodyPr wrap="square" lIns="0" tIns="0" rIns="0" bIns="0" rtlCol="0" anchor="ctr"/>
-          <a:lstStyle/>
-          <a:p>
-            <a:pPr algn="ctr" indent="0" marL="0">
-              <a:buNone/>
-            </a:pPr>
-            <a:r>
-              <a:rPr lang="en-US" sz="1800" b="1" dirty="0">
-                <a:solidFill>
-                  <a:srgbClr val="4ADE80"/>
-                </a:solidFill>
-                <a:latin typeface="Trebuchet MS" pitchFamily="34" charset="0"/>
-                <a:ea typeface="Trebuchet MS" pitchFamily="34" charset="-122"/>
-                <a:cs typeface="Trebuchet MS" pitchFamily="34" charset="-120"/>
-              </a:rPr>
-              <a:t>2</a:t>
-            </a:r>
-            <a:endParaRPr lang="en-US" sz="1800" dirty="0"/>
-          </a:p>
-        </p:txBody>
-      </p:sp>
-      <p:sp>
-        <p:nvSpPr>
-          <p:cNvPr id="14" name="Shape 11"/>
-          <p:cNvSpPr/>
-          <p:nvPr/>
-        </p:nvSpPr>
-        <p:spPr>
-          <a:xfrm>
-            <a:off x="676656" y="3017520"/>
-            <a:ext cx="18288" cy="749808"/>
-          </a:xfrm>
-          <a:prstGeom prst="rect">
-            <a:avLst/>
-          </a:prstGeom>
-          <a:solidFill>
-            <a:srgbClr val="3D5240"/>
-          </a:solidFill>
-          <a:ln/>
-        </p:spPr>
-      </p:sp>
-      <p:pic>
-        <p:nvPicPr>
-          <p:cNvPr id="15" name="Image 1" descr="preencoded.png">    </p:cNvPr>
-          <p:cNvPicPr>
-            <a:picLocks noChangeAspect="1"/>
-          </p:cNvPicPr>
-          <p:nvPr/>
-        </p:nvPicPr>
-        <p:blipFill>
-          <a:blip r:embed="rId2"/>
-          <a:stretch>
-            <a:fillRect/>
-          </a:stretch>
-        </p:blipFill>
-        <p:spPr>
-          <a:xfrm>
-            <a:off x="1143000" y="2542032"/>
-            <a:ext cx="438912" cy="438912"/>
-          </a:xfrm>
-          <a:prstGeom prst="rect">
-            <a:avLst/>
-          </a:prstGeom>
-        </p:spPr>
-      </p:pic>
-      <p:sp>
-        <p:nvSpPr>
-          <p:cNvPr id="16" name="Text 12"/>
-          <p:cNvSpPr/>
-          <p:nvPr/>
-        </p:nvSpPr>
-        <p:spPr>
-          <a:xfrm>
-            <a:off x="1737360" y="2514600"/>
-            <a:ext cx="5029200" cy="320040"/>
-          </a:xfrm>
-          <a:prstGeom prst="rect">
-            <a:avLst/>
-          </a:prstGeom>
-          <a:noFill/>
-          <a:ln/>
-        </p:spPr>
-        <p:txBody>
-          <a:bodyPr wrap="square" lIns="0" tIns="0" rIns="0" bIns="0" rtlCol="0" anchor="ctr"/>
-          <a:lstStyle/>
-          <a:p>
-            <a:pPr indent="0" marL="0">
-              <a:buNone/>
-            </a:pPr>
-            <a:r>
-              <a:rPr lang="en-US" sz="1400" b="1" dirty="0">
-                <a:solidFill>
-                  <a:srgbClr val="FFFFFF"/>
-                </a:solidFill>
-                <a:latin typeface="Trebuchet MS" pitchFamily="34" charset="0"/>
-                <a:ea typeface="Trebuchet MS" pitchFamily="34" charset="-122"/>
-                <a:cs typeface="Trebuchet MS" pitchFamily="34" charset="-120"/>
-              </a:rPr>
-              <a:t>Get your scored footprint</a:t>
-            </a:r>
-            <a:endParaRPr lang="en-US" sz="1400" dirty="0"/>
-          </a:p>
-        </p:txBody>
-      </p:sp>
-      <p:sp>
-        <p:nvSpPr>
-          <p:cNvPr id="17" name="Text 13"/>
-          <p:cNvSpPr/>
-          <p:nvPr/>
-        </p:nvSpPr>
-        <p:spPr>
-          <a:xfrm>
-            <a:off x="1737360" y="2852928"/>
-            <a:ext cx="5029200" cy="685800"/>
-          </a:xfrm>
-          <a:prstGeom prst="rect">
-            <a:avLst/>
-          </a:prstGeom>
-          <a:noFill/>
-          <a:ln/>
-        </p:spPr>
-        <p:txBody>
-          <a:bodyPr wrap="square" lIns="0" tIns="0" rIns="0" bIns="0" rtlCol="0" anchor="ctr"/>
-          <a:lstStyle/>
-          <a:p>
-            <a:pPr indent="0" marL="0">
-              <a:buNone/>
-            </a:pPr>
-            <a:r>
-              <a:rPr lang="en-US" sz="1050" dirty="0">
-                <a:solidFill>
-                  <a:srgbClr val="E8EDE9"/>
-                </a:solidFill>
-                <a:latin typeface="Calibri" pitchFamily="34" charset="0"/>
-                <a:ea typeface="Calibri" pitchFamily="34" charset="-122"/>
-                <a:cs typeface="Calibri" pitchFamily="34" charset="-120"/>
-              </a:rPr>
-              <a:t>See your total in tCO₂e/year split across food, transport, and home energy. Compared against the Canadian average (9.2t) and the 2030 global target (2.5t).</a:t>
-            </a:r>
-            <a:endParaRPr lang="en-US" sz="1050" dirty="0"/>
-          </a:p>
-        </p:txBody>
-      </p:sp>
-      <p:sp>
-        <p:nvSpPr>
-          <p:cNvPr id="18" name="Shape 14"/>
-          <p:cNvSpPr/>
-          <p:nvPr/>
-        </p:nvSpPr>
-        <p:spPr>
-          <a:xfrm>
-            <a:off x="6949440" y="2587752"/>
-            <a:ext cx="1783080" cy="310896"/>
-          </a:xfrm>
-          <a:prstGeom prst="rect">
-            <a:avLst/>
-          </a:prstGeom>
-          <a:solidFill>
-            <a:srgbClr val="000000">
-              <a:alpha val="0"/>
-            </a:srgbClr>
-          </a:solidFill>
-          <a:ln w="10160">
-            <a:solidFill>
-              <a:srgbClr val="60A5FA"/>
-            </a:solidFill>
-            <a:prstDash val="solid"/>
-          </a:ln>
-        </p:spPr>
-      </p:sp>
-      <p:sp>
-        <p:nvSpPr>
-          <p:cNvPr id="19" name="Text 15"/>
-          <p:cNvSpPr/>
-          <p:nvPr/>
-        </p:nvSpPr>
-        <p:spPr>
-          <a:xfrm>
-            <a:off x="6949440" y="2587752"/>
-            <a:ext cx="1783080" cy="310896"/>
-          </a:xfrm>
-          <a:prstGeom prst="rect">
-            <a:avLst/>
-          </a:prstGeom>
-          <a:noFill/>
-          <a:ln/>
-        </p:spPr>
-        <p:txBody>
-          <a:bodyPr wrap="square" lIns="0" tIns="0" rIns="0" bIns="0" rtlCol="0" anchor="ctr"/>
-          <a:lstStyle/>
-          <a:p>
-            <a:pPr algn="ctr" indent="0" marL="0">
-              <a:buNone/>
-            </a:pPr>
-            <a:r>
-              <a:rPr lang="en-US" sz="850" b="1" dirty="0">
-                <a:solidFill>
-                  <a:srgbClr val="60A5FA"/>
-                </a:solidFill>
-                <a:latin typeface="Calibri" pitchFamily="34" charset="0"/>
-                <a:ea typeface="Calibri" pitchFamily="34" charset="-122"/>
-                <a:cs typeface="Calibri" pitchFamily="34" charset="-120"/>
-              </a:rPr>
-              <a:t>Real emission factors</a:t>
-            </a:r>
-            <a:endParaRPr lang="en-US" sz="850" dirty="0"/>
-          </a:p>
-        </p:txBody>
-      </p:sp>
-      <p:sp>
-        <p:nvSpPr>
-          <p:cNvPr id="20" name="Shape 16"/>
-          <p:cNvSpPr/>
-          <p:nvPr/>
-        </p:nvSpPr>
-        <p:spPr>
-          <a:xfrm>
-            <a:off x="457200" y="3749040"/>
-            <a:ext cx="502920" cy="502920"/>
-          </a:xfrm>
-          <a:prstGeom prst="ellipse">
-            <a:avLst/>
-          </a:prstGeom>
-          <a:solidFill>
-            <a:srgbClr val="131810"/>
-          </a:solidFill>
-          <a:ln w="19050">
-            <a:solidFill>
-              <a:srgbClr val="22C55E"/>
-            </a:solidFill>
-            <a:prstDash val="solid"/>
-          </a:ln>
-        </p:spPr>
-      </p:sp>
-      <p:sp>
-        <p:nvSpPr>
-          <p:cNvPr id="21" name="Text 17"/>
-          <p:cNvSpPr/>
-          <p:nvPr/>
-        </p:nvSpPr>
-        <p:spPr>
-          <a:xfrm>
-            <a:off x="457200" y="3803904"/>
-            <a:ext cx="502920" cy="365760"/>
-          </a:xfrm>
-          <a:prstGeom prst="rect">
-            <a:avLst/>
-          </a:prstGeom>
-          <a:noFill/>
-          <a:ln/>
-        </p:spPr>
-        <p:txBody>
-          <a:bodyPr wrap="square" lIns="0" tIns="0" rIns="0" bIns="0" rtlCol="0" anchor="ctr"/>
-          <a:lstStyle/>
-          <a:p>
-            <a:pPr algn="ctr" indent="0" marL="0">
-              <a:buNone/>
-            </a:pPr>
-            <a:r>
-              <a:rPr lang="en-US" sz="1800" b="1" dirty="0">
-                <a:solidFill>
-                  <a:srgbClr val="4ADE80"/>
-                </a:solidFill>
-                <a:latin typeface="Trebuchet MS" pitchFamily="34" charset="0"/>
-                <a:ea typeface="Trebuchet MS" pitchFamily="34" charset="-122"/>
-                <a:cs typeface="Trebuchet MS" pitchFamily="34" charset="-120"/>
-              </a:rPr>
-              <a:t>3</a:t>
-            </a:r>
-            <a:endParaRPr lang="en-US" sz="1800" dirty="0"/>
-          </a:p>
-        </p:txBody>
-      </p:sp>
-      <p:pic>
-        <p:nvPicPr>
-          <p:cNvPr id="22" name="Image 2" descr="preencoded.png">    </p:cNvPr>
+          <p:cNvPr id="7" name="Image 0" descr="preencoded.png"/>
           <p:cNvPicPr>
             <a:picLocks noChangeAspect="1"/>
           </p:cNvPicPr>
@@ -5161,7 +4504,7 @@
         </p:blipFill>
         <p:spPr>
           <a:xfrm>
-            <a:off x="1143000" y="3776472"/>
+            <a:off x="1143000" y="1307592"/>
             <a:ext cx="438912" cy="438912"/>
           </a:xfrm>
           <a:prstGeom prst="rect">
@@ -5171,13 +4514,13 @@
       </p:pic>
       <p:sp>
         <p:nvSpPr>
-          <p:cNvPr id="23" name="Text 18"/>
-          <p:cNvSpPr/>
-          <p:nvPr/>
-        </p:nvSpPr>
-        <p:spPr>
-          <a:xfrm>
-            <a:off x="1737360" y="3749040"/>
+          <p:cNvPr id="8" name="Text 5"/>
+          <p:cNvSpPr/>
+          <p:nvPr/>
+        </p:nvSpPr>
+        <p:spPr>
+          <a:xfrm>
+            <a:off x="1737360" y="1280160"/>
             <a:ext cx="5029200" cy="320040"/>
           </a:xfrm>
           <a:prstGeom prst="rect">
@@ -5190,7 +4533,7 @@
           <a:bodyPr wrap="square" lIns="0" tIns="0" rIns="0" bIns="0" rtlCol="0" anchor="ctr"/>
           <a:lstStyle/>
           <a:p>
-            <a:pPr indent="0" marL="0">
+            <a:pPr marL="0" indent="0">
               <a:buNone/>
             </a:pPr>
             <a:r>
@@ -5202,6 +4545,490 @@
                 <a:ea typeface="Trebuchet MS" pitchFamily="34" charset="-122"/>
                 <a:cs typeface="Trebuchet MS" pitchFamily="34" charset="-120"/>
               </a:rPr>
+              <a:t>Answer questions about your lifestyle</a:t>
+            </a:r>
+            <a:endParaRPr lang="en-US" sz="1400" dirty="0"/>
+          </a:p>
+        </p:txBody>
+      </p:sp>
+      <p:sp>
+        <p:nvSpPr>
+          <p:cNvPr id="9" name="Text 6"/>
+          <p:cNvSpPr/>
+          <p:nvPr/>
+        </p:nvSpPr>
+        <p:spPr>
+          <a:xfrm>
+            <a:off x="1737360" y="1618488"/>
+            <a:ext cx="5029200" cy="685800"/>
+          </a:xfrm>
+          <a:prstGeom prst="rect">
+            <a:avLst/>
+          </a:prstGeom>
+          <a:noFill/>
+          <a:ln/>
+        </p:spPr>
+        <p:txBody>
+          <a:bodyPr wrap="square" lIns="0" tIns="0" rIns="0" bIns="0" rtlCol="0" anchor="ctr"/>
+          <a:lstStyle/>
+          <a:p>
+            <a:pPr marL="0" indent="0">
+              <a:buNone/>
+            </a:pPr>
+            <a:r>
+              <a:rPr lang="en-US" sz="1050" dirty="0">
+                <a:solidFill>
+                  <a:srgbClr val="E8EDE9"/>
+                </a:solidFill>
+                <a:latin typeface="Calibri" pitchFamily="34" charset="0"/>
+                <a:ea typeface="Calibri" pitchFamily="34" charset="-122"/>
+                <a:cs typeface="Calibri" pitchFamily="34" charset="-120"/>
+              </a:rPr>
+              <a:t>Pick from diet type, transport mode, home heating, and flight habits. Or choose a lifestyle archetype and skip the form entirely.</a:t>
+            </a:r>
+            <a:endParaRPr lang="en-US" sz="1050" dirty="0"/>
+          </a:p>
+        </p:txBody>
+      </p:sp>
+      <p:sp>
+        <p:nvSpPr>
+          <p:cNvPr id="10" name="Shape 7"/>
+          <p:cNvSpPr/>
+          <p:nvPr/>
+        </p:nvSpPr>
+        <p:spPr>
+          <a:xfrm>
+            <a:off x="6949440" y="1353312"/>
+            <a:ext cx="1783080" cy="310896"/>
+          </a:xfrm>
+          <a:prstGeom prst="rect">
+            <a:avLst/>
+          </a:prstGeom>
+          <a:solidFill>
+            <a:srgbClr val="000000">
+              <a:alpha val="0"/>
+            </a:srgbClr>
+          </a:solidFill>
+          <a:ln w="10160">
+            <a:solidFill>
+              <a:srgbClr val="22C55E"/>
+            </a:solidFill>
+            <a:prstDash val="solid"/>
+          </a:ln>
+        </p:spPr>
+      </p:sp>
+      <p:sp>
+        <p:nvSpPr>
+          <p:cNvPr id="11" name="Text 8"/>
+          <p:cNvSpPr/>
+          <p:nvPr/>
+        </p:nvSpPr>
+        <p:spPr>
+          <a:xfrm>
+            <a:off x="6949440" y="1353312"/>
+            <a:ext cx="1783080" cy="310896"/>
+          </a:xfrm>
+          <a:prstGeom prst="rect">
+            <a:avLst/>
+          </a:prstGeom>
+          <a:noFill/>
+          <a:ln/>
+        </p:spPr>
+        <p:txBody>
+          <a:bodyPr wrap="square" lIns="0" tIns="0" rIns="0" bIns="0" rtlCol="0" anchor="ctr"/>
+          <a:lstStyle/>
+          <a:p>
+            <a:pPr marL="0" indent="0" algn="ctr">
+              <a:buNone/>
+            </a:pPr>
+            <a:r>
+              <a:rPr lang="en-US" sz="850" b="1" dirty="0">
+                <a:solidFill>
+                  <a:srgbClr val="22C55E"/>
+                </a:solidFill>
+                <a:latin typeface="Calibri" pitchFamily="34" charset="0"/>
+                <a:ea typeface="Calibri" pitchFamily="34" charset="-122"/>
+                <a:cs typeface="Calibri" pitchFamily="34" charset="-120"/>
+              </a:rPr>
+              <a:t>3 min or 30 sec</a:t>
+            </a:r>
+            <a:endParaRPr lang="en-US" sz="850" dirty="0"/>
+          </a:p>
+        </p:txBody>
+      </p:sp>
+      <p:sp>
+        <p:nvSpPr>
+          <p:cNvPr id="12" name="Shape 9"/>
+          <p:cNvSpPr/>
+          <p:nvPr/>
+        </p:nvSpPr>
+        <p:spPr>
+          <a:xfrm>
+            <a:off x="457200" y="2514600"/>
+            <a:ext cx="502920" cy="502920"/>
+          </a:xfrm>
+          <a:prstGeom prst="ellipse">
+            <a:avLst/>
+          </a:prstGeom>
+          <a:solidFill>
+            <a:srgbClr val="131810"/>
+          </a:solidFill>
+          <a:ln w="19050">
+            <a:solidFill>
+              <a:srgbClr val="22C55E"/>
+            </a:solidFill>
+            <a:prstDash val="solid"/>
+          </a:ln>
+        </p:spPr>
+      </p:sp>
+      <p:sp>
+        <p:nvSpPr>
+          <p:cNvPr id="13" name="Text 10"/>
+          <p:cNvSpPr/>
+          <p:nvPr/>
+        </p:nvSpPr>
+        <p:spPr>
+          <a:xfrm>
+            <a:off x="457200" y="2569464"/>
+            <a:ext cx="502920" cy="365760"/>
+          </a:xfrm>
+          <a:prstGeom prst="rect">
+            <a:avLst/>
+          </a:prstGeom>
+          <a:noFill/>
+          <a:ln/>
+        </p:spPr>
+        <p:txBody>
+          <a:bodyPr wrap="square" lIns="0" tIns="0" rIns="0" bIns="0" rtlCol="0" anchor="ctr"/>
+          <a:lstStyle/>
+          <a:p>
+            <a:pPr marL="0" indent="0" algn="ctr">
+              <a:buNone/>
+            </a:pPr>
+            <a:r>
+              <a:rPr lang="en-US" sz="1800" b="1" dirty="0">
+                <a:solidFill>
+                  <a:srgbClr val="4ADE80"/>
+                </a:solidFill>
+                <a:latin typeface="Trebuchet MS" pitchFamily="34" charset="0"/>
+                <a:ea typeface="Trebuchet MS" pitchFamily="34" charset="-122"/>
+                <a:cs typeface="Trebuchet MS" pitchFamily="34" charset="-120"/>
+              </a:rPr>
+              <a:t>2</a:t>
+            </a:r>
+            <a:endParaRPr lang="en-US" sz="1800" dirty="0"/>
+          </a:p>
+        </p:txBody>
+      </p:sp>
+      <p:sp>
+        <p:nvSpPr>
+          <p:cNvPr id="14" name="Shape 11"/>
+          <p:cNvSpPr/>
+          <p:nvPr/>
+        </p:nvSpPr>
+        <p:spPr>
+          <a:xfrm>
+            <a:off x="676656" y="3017520"/>
+            <a:ext cx="18288" cy="749808"/>
+          </a:xfrm>
+          <a:prstGeom prst="rect">
+            <a:avLst/>
+          </a:prstGeom>
+          <a:solidFill>
+            <a:srgbClr val="3D5240"/>
+          </a:solidFill>
+          <a:ln/>
+        </p:spPr>
+      </p:sp>
+      <p:pic>
+        <p:nvPicPr>
+          <p:cNvPr id="15" name="Image 1" descr="preencoded.png"/>
+          <p:cNvPicPr>
+            <a:picLocks noChangeAspect="1"/>
+          </p:cNvPicPr>
+          <p:nvPr/>
+        </p:nvPicPr>
+        <p:blipFill>
+          <a:blip r:embed="rId4"/>
+          <a:stretch>
+            <a:fillRect/>
+          </a:stretch>
+        </p:blipFill>
+        <p:spPr>
+          <a:xfrm>
+            <a:off x="1143000" y="2542032"/>
+            <a:ext cx="438912" cy="438912"/>
+          </a:xfrm>
+          <a:prstGeom prst="rect">
+            <a:avLst/>
+          </a:prstGeom>
+        </p:spPr>
+      </p:pic>
+      <p:sp>
+        <p:nvSpPr>
+          <p:cNvPr id="16" name="Text 12"/>
+          <p:cNvSpPr/>
+          <p:nvPr/>
+        </p:nvSpPr>
+        <p:spPr>
+          <a:xfrm>
+            <a:off x="1737360" y="2514600"/>
+            <a:ext cx="5029200" cy="320040"/>
+          </a:xfrm>
+          <a:prstGeom prst="rect">
+            <a:avLst/>
+          </a:prstGeom>
+          <a:noFill/>
+          <a:ln/>
+        </p:spPr>
+        <p:txBody>
+          <a:bodyPr wrap="square" lIns="0" tIns="0" rIns="0" bIns="0" rtlCol="0" anchor="ctr"/>
+          <a:lstStyle/>
+          <a:p>
+            <a:pPr marL="0" indent="0">
+              <a:buNone/>
+            </a:pPr>
+            <a:r>
+              <a:rPr lang="en-US" sz="1400" b="1" dirty="0">
+                <a:solidFill>
+                  <a:srgbClr val="FFFFFF"/>
+                </a:solidFill>
+                <a:latin typeface="Trebuchet MS" pitchFamily="34" charset="0"/>
+                <a:ea typeface="Trebuchet MS" pitchFamily="34" charset="-122"/>
+                <a:cs typeface="Trebuchet MS" pitchFamily="34" charset="-120"/>
+              </a:rPr>
+              <a:t>Get your scored footprint</a:t>
+            </a:r>
+            <a:endParaRPr lang="en-US" sz="1400" dirty="0"/>
+          </a:p>
+        </p:txBody>
+      </p:sp>
+      <p:sp>
+        <p:nvSpPr>
+          <p:cNvPr id="17" name="Text 13"/>
+          <p:cNvSpPr/>
+          <p:nvPr/>
+        </p:nvSpPr>
+        <p:spPr>
+          <a:xfrm>
+            <a:off x="1737360" y="2852928"/>
+            <a:ext cx="5029200" cy="685800"/>
+          </a:xfrm>
+          <a:prstGeom prst="rect">
+            <a:avLst/>
+          </a:prstGeom>
+          <a:noFill/>
+          <a:ln/>
+        </p:spPr>
+        <p:txBody>
+          <a:bodyPr wrap="square" lIns="0" tIns="0" rIns="0" bIns="0" rtlCol="0" anchor="ctr"/>
+          <a:lstStyle/>
+          <a:p>
+            <a:pPr marL="0" indent="0">
+              <a:buNone/>
+            </a:pPr>
+            <a:r>
+              <a:rPr lang="en-US" sz="1050" dirty="0">
+                <a:solidFill>
+                  <a:srgbClr val="E8EDE9"/>
+                </a:solidFill>
+                <a:latin typeface="Calibri" pitchFamily="34" charset="0"/>
+                <a:ea typeface="Calibri" pitchFamily="34" charset="-122"/>
+                <a:cs typeface="Calibri" pitchFamily="34" charset="-120"/>
+              </a:rPr>
+              <a:t>See your total in tCO₂e/year split across food, transport, and home energy. Compared against the Canadian average (9.2t) and the 2030 global target (2.5t).</a:t>
+            </a:r>
+            <a:endParaRPr lang="en-US" sz="1050" dirty="0"/>
+          </a:p>
+        </p:txBody>
+      </p:sp>
+      <p:sp>
+        <p:nvSpPr>
+          <p:cNvPr id="18" name="Shape 14"/>
+          <p:cNvSpPr/>
+          <p:nvPr/>
+        </p:nvSpPr>
+        <p:spPr>
+          <a:xfrm>
+            <a:off x="6949440" y="2587752"/>
+            <a:ext cx="1783080" cy="310896"/>
+          </a:xfrm>
+          <a:prstGeom prst="rect">
+            <a:avLst/>
+          </a:prstGeom>
+          <a:solidFill>
+            <a:srgbClr val="000000">
+              <a:alpha val="0"/>
+            </a:srgbClr>
+          </a:solidFill>
+          <a:ln w="10160">
+            <a:solidFill>
+              <a:srgbClr val="60A5FA"/>
+            </a:solidFill>
+            <a:prstDash val="solid"/>
+          </a:ln>
+        </p:spPr>
+      </p:sp>
+      <p:sp>
+        <p:nvSpPr>
+          <p:cNvPr id="19" name="Text 15"/>
+          <p:cNvSpPr/>
+          <p:nvPr/>
+        </p:nvSpPr>
+        <p:spPr>
+          <a:xfrm>
+            <a:off x="6949440" y="2587752"/>
+            <a:ext cx="1783080" cy="310896"/>
+          </a:xfrm>
+          <a:prstGeom prst="rect">
+            <a:avLst/>
+          </a:prstGeom>
+          <a:noFill/>
+          <a:ln/>
+        </p:spPr>
+        <p:txBody>
+          <a:bodyPr wrap="square" lIns="0" tIns="0" rIns="0" bIns="0" rtlCol="0" anchor="ctr"/>
+          <a:lstStyle/>
+          <a:p>
+            <a:pPr marL="0" indent="0" algn="ctr">
+              <a:buNone/>
+            </a:pPr>
+            <a:r>
+              <a:rPr lang="en-US" sz="850" b="1" dirty="0">
+                <a:solidFill>
+                  <a:srgbClr val="60A5FA"/>
+                </a:solidFill>
+                <a:latin typeface="Calibri" pitchFamily="34" charset="0"/>
+                <a:ea typeface="Calibri" pitchFamily="34" charset="-122"/>
+                <a:cs typeface="Calibri" pitchFamily="34" charset="-120"/>
+              </a:rPr>
+              <a:t>Real emission factors</a:t>
+            </a:r>
+            <a:endParaRPr lang="en-US" sz="850" dirty="0"/>
+          </a:p>
+        </p:txBody>
+      </p:sp>
+      <p:sp>
+        <p:nvSpPr>
+          <p:cNvPr id="20" name="Shape 16"/>
+          <p:cNvSpPr/>
+          <p:nvPr/>
+        </p:nvSpPr>
+        <p:spPr>
+          <a:xfrm>
+            <a:off x="457200" y="3749040"/>
+            <a:ext cx="502920" cy="502920"/>
+          </a:xfrm>
+          <a:prstGeom prst="ellipse">
+            <a:avLst/>
+          </a:prstGeom>
+          <a:solidFill>
+            <a:srgbClr val="131810"/>
+          </a:solidFill>
+          <a:ln w="19050">
+            <a:solidFill>
+              <a:srgbClr val="22C55E"/>
+            </a:solidFill>
+            <a:prstDash val="solid"/>
+          </a:ln>
+        </p:spPr>
+      </p:sp>
+      <p:sp>
+        <p:nvSpPr>
+          <p:cNvPr id="21" name="Text 17"/>
+          <p:cNvSpPr/>
+          <p:nvPr/>
+        </p:nvSpPr>
+        <p:spPr>
+          <a:xfrm>
+            <a:off x="457200" y="3803904"/>
+            <a:ext cx="502920" cy="365760"/>
+          </a:xfrm>
+          <a:prstGeom prst="rect">
+            <a:avLst/>
+          </a:prstGeom>
+          <a:noFill/>
+          <a:ln/>
+        </p:spPr>
+        <p:txBody>
+          <a:bodyPr wrap="square" lIns="0" tIns="0" rIns="0" bIns="0" rtlCol="0" anchor="ctr"/>
+          <a:lstStyle/>
+          <a:p>
+            <a:pPr marL="0" indent="0" algn="ctr">
+              <a:buNone/>
+            </a:pPr>
+            <a:r>
+              <a:rPr lang="en-US" sz="1800" b="1" dirty="0">
+                <a:solidFill>
+                  <a:srgbClr val="4ADE80"/>
+                </a:solidFill>
+                <a:latin typeface="Trebuchet MS" pitchFamily="34" charset="0"/>
+                <a:ea typeface="Trebuchet MS" pitchFamily="34" charset="-122"/>
+                <a:cs typeface="Trebuchet MS" pitchFamily="34" charset="-120"/>
+              </a:rPr>
+              <a:t>3</a:t>
+            </a:r>
+            <a:endParaRPr lang="en-US" sz="1800" dirty="0"/>
+          </a:p>
+        </p:txBody>
+      </p:sp>
+      <p:pic>
+        <p:nvPicPr>
+          <p:cNvPr id="22" name="Image 2" descr="preencoded.png"/>
+          <p:cNvPicPr>
+            <a:picLocks noChangeAspect="1"/>
+          </p:cNvPicPr>
+          <p:nvPr/>
+        </p:nvPicPr>
+        <p:blipFill>
+          <a:blip r:embed="rId5"/>
+          <a:stretch>
+            <a:fillRect/>
+          </a:stretch>
+        </p:blipFill>
+        <p:spPr>
+          <a:xfrm>
+            <a:off x="1143000" y="3776472"/>
+            <a:ext cx="438912" cy="438912"/>
+          </a:xfrm>
+          <a:prstGeom prst="rect">
+            <a:avLst/>
+          </a:prstGeom>
+        </p:spPr>
+      </p:pic>
+      <p:sp>
+        <p:nvSpPr>
+          <p:cNvPr id="23" name="Text 18"/>
+          <p:cNvSpPr/>
+          <p:nvPr/>
+        </p:nvSpPr>
+        <p:spPr>
+          <a:xfrm>
+            <a:off x="1737360" y="3749040"/>
+            <a:ext cx="5029200" cy="320040"/>
+          </a:xfrm>
+          <a:prstGeom prst="rect">
+            <a:avLst/>
+          </a:prstGeom>
+          <a:noFill/>
+          <a:ln/>
+        </p:spPr>
+        <p:txBody>
+          <a:bodyPr wrap="square" lIns="0" tIns="0" rIns="0" bIns="0" rtlCol="0" anchor="ctr"/>
+          <a:lstStyle/>
+          <a:p>
+            <a:pPr marL="0" indent="0">
+              <a:buNone/>
+            </a:pPr>
+            <a:r>
+              <a:rPr lang="en-US" sz="1400" b="1" dirty="0">
+                <a:solidFill>
+                  <a:srgbClr val="FFFFFF"/>
+                </a:solidFill>
+                <a:latin typeface="Trebuchet MS" pitchFamily="34" charset="0"/>
+                <a:ea typeface="Trebuchet MS" pitchFamily="34" charset="-122"/>
+                <a:cs typeface="Trebuchet MS" pitchFamily="34" charset="-120"/>
+              </a:rPr>
               <a:t>Act locally with an AI plan + live map</a:t>
             </a:r>
             <a:endParaRPr lang="en-US" sz="1400" dirty="0"/>
@@ -5229,7 +5056,7 @@
           <a:bodyPr wrap="square" lIns="0" tIns="0" rIns="0" bIns="0" rtlCol="0" anchor="ctr"/>
           <a:lstStyle/>
           <a:p>
-            <a:pPr indent="0" marL="0">
+            <a:pPr marL="0" indent="0">
               <a:buNone/>
             </a:pPr>
             <a:r>
@@ -5295,7 +5122,7 @@
           <a:bodyPr wrap="square" lIns="0" tIns="0" rIns="0" bIns="0" rtlCol="0" anchor="ctr"/>
           <a:lstStyle/>
           <a:p>
-            <a:pPr algn="ctr" indent="0" marL="0">
+            <a:pPr marL="0" indent="0" algn="ctr">
               <a:buNone/>
             </a:pPr>
             <a:r>
@@ -5329,6 +5156,7 @@
         <a:solidFill>
           <a:srgbClr val="0A0E0B"/>
         </a:solidFill>
+        <a:effectLst/>
       </p:bgPr>
     </p:bg>
     <p:spTree>
@@ -5366,11 +5194,11 @@
           <a:bodyPr wrap="square" lIns="0" tIns="0" rIns="0" bIns="0" rtlCol="0" anchor="ctr"/>
           <a:lstStyle/>
           <a:p>
-            <a:pPr algn="l" indent="0" marL="0">
-              <a:buNone/>
-            </a:pPr>
-            <a:r>
-              <a:rPr lang="en-US" sz="800" b="1" spc="400" kern="0" dirty="0">
+            <a:pPr marL="0" indent="0" algn="l">
+              <a:buNone/>
+            </a:pPr>
+            <a:r>
+              <a:rPr lang="en-US" sz="800" b="1" kern="0" spc="400" dirty="0">
                 <a:solidFill>
                   <a:srgbClr val="22C55E"/>
                 </a:solidFill>
@@ -5402,7 +5230,7 @@
           <a:bodyPr wrap="square" lIns="0" tIns="0" rIns="0" bIns="0" rtlCol="0" anchor="ctr"/>
           <a:lstStyle/>
           <a:p>
-            <a:pPr indent="0" marL="0">
+            <a:pPr marL="0" indent="0">
               <a:buNone/>
             </a:pPr>
             <a:r>
@@ -5467,301 +5295,7 @@
       </p:sp>
       <p:pic>
         <p:nvPicPr>
-          <p:cNvPr id="6" name="Image 0" descr="preencoded.png">    </p:cNvPr>
-          <p:cNvPicPr>
-            <a:picLocks noChangeAspect="1"/>
-          </p:cNvPicPr>
-          <p:nvPr/>
-        </p:nvPicPr>
-        <p:blipFill>
-          <a:blip r:embed="rId1"/>
-          <a:stretch>
-            <a:fillRect/>
-          </a:stretch>
-        </p:blipFill>
-        <p:spPr>
-          <a:xfrm>
-            <a:off x="512064" y="1280160"/>
-            <a:ext cx="384048" cy="384048"/>
-          </a:xfrm>
-          <a:prstGeom prst="rect">
-            <a:avLst/>
-          </a:prstGeom>
-        </p:spPr>
-      </p:pic>
-      <p:sp>
-        <p:nvSpPr>
-          <p:cNvPr id="7" name="Text 4"/>
-          <p:cNvSpPr/>
-          <p:nvPr/>
-        </p:nvSpPr>
-        <p:spPr>
-          <a:xfrm>
-            <a:off x="512064" y="1719072"/>
-            <a:ext cx="2194560" cy="347472"/>
-          </a:xfrm>
-          <a:prstGeom prst="rect">
-            <a:avLst/>
-          </a:prstGeom>
-          <a:noFill/>
-          <a:ln/>
-        </p:spPr>
-        <p:txBody>
-          <a:bodyPr wrap="square" lIns="0" tIns="0" rIns="0" bIns="0" rtlCol="0" anchor="ctr"/>
-          <a:lstStyle/>
-          <a:p>
-            <a:pPr indent="0" marL="0">
-              <a:buNone/>
-            </a:pPr>
-            <a:r>
-              <a:rPr lang="en-US" sz="1300" b="1" dirty="0">
-                <a:solidFill>
-                  <a:srgbClr val="FFFFFF"/>
-                </a:solidFill>
-                <a:latin typeface="Trebuchet MS" pitchFamily="34" charset="0"/>
-                <a:ea typeface="Trebuchet MS" pitchFamily="34" charset="-122"/>
-                <a:cs typeface="Trebuchet MS" pitchFamily="34" charset="-120"/>
-              </a:rPr>
-              <a:t>Quick Mode</a:t>
-            </a:r>
-            <a:endParaRPr lang="en-US" sz="1300" dirty="0"/>
-          </a:p>
-        </p:txBody>
-      </p:sp>
-      <p:sp>
-        <p:nvSpPr>
-          <p:cNvPr id="8" name="Text 5"/>
-          <p:cNvSpPr/>
-          <p:nvPr/>
-        </p:nvSpPr>
-        <p:spPr>
-          <a:xfrm>
-            <a:off x="512064" y="2057400"/>
-            <a:ext cx="2194560" cy="594360"/>
-          </a:xfrm>
-          <a:prstGeom prst="rect">
-            <a:avLst/>
-          </a:prstGeom>
-          <a:noFill/>
-          <a:ln/>
-        </p:spPr>
-        <p:txBody>
-          <a:bodyPr wrap="square" lIns="0" tIns="0" rIns="0" bIns="0" rtlCol="0" anchor="ctr"/>
-          <a:lstStyle/>
-          <a:p>
-            <a:pPr indent="0" marL="0">
-              <a:buNone/>
-            </a:pPr>
-            <a:r>
-              <a:rPr lang="en-US" sz="950" dirty="0">
-                <a:solidFill>
-                  <a:srgbClr val="E8EDE9"/>
-                </a:solidFill>
-                <a:latin typeface="Calibri" pitchFamily="34" charset="0"/>
-                <a:ea typeface="Calibri" pitchFamily="34" charset="-122"/>
-                <a:cs typeface="Calibri" pitchFamily="34" charset="-120"/>
-              </a:rPr>
-              <a:t>Choose a lifestyle archetype and get your full scored footprint in 30 seconds. No form required.</a:t>
-            </a:r>
-            <a:endParaRPr lang="en-US" sz="950" dirty="0"/>
-          </a:p>
-        </p:txBody>
-      </p:sp>
-      <p:sp>
-        <p:nvSpPr>
-          <p:cNvPr id="9" name="Shape 6"/>
-          <p:cNvSpPr/>
-          <p:nvPr/>
-        </p:nvSpPr>
-        <p:spPr>
-          <a:xfrm>
-            <a:off x="3026664" y="1097280"/>
-            <a:ext cx="2468880" cy="1645920"/>
-          </a:xfrm>
-          <a:prstGeom prst="rect">
-            <a:avLst/>
-          </a:prstGeom>
-          <a:solidFill>
-            <a:srgbClr val="1A2218"/>
-          </a:solidFill>
-          <a:ln w="6350">
-            <a:solidFill>
-              <a:srgbClr val="223020"/>
-            </a:solidFill>
-            <a:prstDash val="solid"/>
-          </a:ln>
-        </p:spPr>
-      </p:sp>
-      <p:sp>
-        <p:nvSpPr>
-          <p:cNvPr id="10" name="Shape 7"/>
-          <p:cNvSpPr/>
-          <p:nvPr/>
-        </p:nvSpPr>
-        <p:spPr>
-          <a:xfrm>
-            <a:off x="3026664" y="2697480"/>
-            <a:ext cx="2468880" cy="45720"/>
-          </a:xfrm>
-          <a:prstGeom prst="rect">
-            <a:avLst/>
-          </a:prstGeom>
-          <a:solidFill>
-            <a:srgbClr val="4ADE80"/>
-          </a:solidFill>
-          <a:ln/>
-        </p:spPr>
-      </p:sp>
-      <p:pic>
-        <p:nvPicPr>
-          <p:cNvPr id="11" name="Image 1" descr="preencoded.png">    </p:cNvPr>
-          <p:cNvPicPr>
-            <a:picLocks noChangeAspect="1"/>
-          </p:cNvPicPr>
-          <p:nvPr/>
-        </p:nvPicPr>
-        <p:blipFill>
-          <a:blip r:embed="rId2"/>
-          <a:stretch>
-            <a:fillRect/>
-          </a:stretch>
-        </p:blipFill>
-        <p:spPr>
-          <a:xfrm>
-            <a:off x="3191256" y="1280160"/>
-            <a:ext cx="384048" cy="384048"/>
-          </a:xfrm>
-          <a:prstGeom prst="rect">
-            <a:avLst/>
-          </a:prstGeom>
-        </p:spPr>
-      </p:pic>
-      <p:sp>
-        <p:nvSpPr>
-          <p:cNvPr id="12" name="Text 8"/>
-          <p:cNvSpPr/>
-          <p:nvPr/>
-        </p:nvSpPr>
-        <p:spPr>
-          <a:xfrm>
-            <a:off x="3191256" y="1719072"/>
-            <a:ext cx="2194560" cy="347472"/>
-          </a:xfrm>
-          <a:prstGeom prst="rect">
-            <a:avLst/>
-          </a:prstGeom>
-          <a:noFill/>
-          <a:ln/>
-        </p:spPr>
-        <p:txBody>
-          <a:bodyPr wrap="square" lIns="0" tIns="0" rIns="0" bIns="0" rtlCol="0" anchor="ctr"/>
-          <a:lstStyle/>
-          <a:p>
-            <a:pPr indent="0" marL="0">
-              <a:buNone/>
-            </a:pPr>
-            <a:r>
-              <a:rPr lang="en-US" sz="1300" b="1" dirty="0">
-                <a:solidFill>
-                  <a:srgbClr val="FFFFFF"/>
-                </a:solidFill>
-                <a:latin typeface="Trebuchet MS" pitchFamily="34" charset="0"/>
-                <a:ea typeface="Trebuchet MS" pitchFamily="34" charset="-122"/>
-                <a:cs typeface="Trebuchet MS" pitchFamily="34" charset="-120"/>
-              </a:rPr>
-              <a:t>Live Map</a:t>
-            </a:r>
-            <a:endParaRPr lang="en-US" sz="1300" dirty="0"/>
-          </a:p>
-        </p:txBody>
-      </p:sp>
-      <p:sp>
-        <p:nvSpPr>
-          <p:cNvPr id="13" name="Text 9"/>
-          <p:cNvSpPr/>
-          <p:nvPr/>
-        </p:nvSpPr>
-        <p:spPr>
-          <a:xfrm>
-            <a:off x="3191256" y="2057400"/>
-            <a:ext cx="2194560" cy="594360"/>
-          </a:xfrm>
-          <a:prstGeom prst="rect">
-            <a:avLst/>
-          </a:prstGeom>
-          <a:noFill/>
-          <a:ln/>
-        </p:spPr>
-        <p:txBody>
-          <a:bodyPr wrap="square" lIns="0" tIns="0" rIns="0" bIns="0" rtlCol="0" anchor="ctr"/>
-          <a:lstStyle/>
-          <a:p>
-            <a:pPr indent="0" marL="0">
-              <a:buNone/>
-            </a:pPr>
-            <a:r>
-              <a:rPr lang="en-US" sz="950" dirty="0">
-                <a:solidFill>
-                  <a:srgbClr val="E8EDE9"/>
-                </a:solidFill>
-                <a:latin typeface="Calibri" pitchFamily="34" charset="0"/>
-                <a:ea typeface="Calibri" pitchFamily="34" charset="-122"/>
-                <a:cs typeface="Calibri" pitchFamily="34" charset="-120"/>
-              </a:rPr>
-              <a:t>Leaflet.js + Overpass API. Real food banks, recycling depots, community fridges near you.</a:t>
-            </a:r>
-            <a:endParaRPr lang="en-US" sz="950" dirty="0"/>
-          </a:p>
-        </p:txBody>
-      </p:sp>
-      <p:sp>
-        <p:nvSpPr>
-          <p:cNvPr id="14" name="Shape 10"/>
-          <p:cNvSpPr/>
-          <p:nvPr/>
-        </p:nvSpPr>
-        <p:spPr>
-          <a:xfrm>
-            <a:off x="5705856" y="1097280"/>
-            <a:ext cx="2468880" cy="1645920"/>
-          </a:xfrm>
-          <a:prstGeom prst="rect">
-            <a:avLst/>
-          </a:prstGeom>
-          <a:solidFill>
-            <a:srgbClr val="1A2218"/>
-          </a:solidFill>
-          <a:ln w="6350">
-            <a:solidFill>
-              <a:srgbClr val="223020"/>
-            </a:solidFill>
-            <a:prstDash val="solid"/>
-          </a:ln>
-        </p:spPr>
-      </p:sp>
-      <p:sp>
-        <p:nvSpPr>
-          <p:cNvPr id="15" name="Shape 11"/>
-          <p:cNvSpPr/>
-          <p:nvPr/>
-        </p:nvSpPr>
-        <p:spPr>
-          <a:xfrm>
-            <a:off x="5705856" y="2697480"/>
-            <a:ext cx="2468880" cy="45720"/>
-          </a:xfrm>
-          <a:prstGeom prst="rect">
-            <a:avLst/>
-          </a:prstGeom>
-          <a:solidFill>
-            <a:srgbClr val="60A5FA"/>
-          </a:solidFill>
-          <a:ln/>
-        </p:spPr>
-      </p:sp>
-      <p:pic>
-        <p:nvPicPr>
-          <p:cNvPr id="16" name="Image 2" descr="preencoded.png">    </p:cNvPr>
+          <p:cNvPr id="6" name="Image 0" descr="preencoded.png"/>
           <p:cNvPicPr>
             <a:picLocks noChangeAspect="1"/>
           </p:cNvPicPr>
@@ -5775,7 +5309,7 @@
         </p:blipFill>
         <p:spPr>
           <a:xfrm>
-            <a:off x="5870448" y="1280160"/>
+            <a:off x="512064" y="1280160"/>
             <a:ext cx="384048" cy="384048"/>
           </a:xfrm>
           <a:prstGeom prst="rect">
@@ -5785,13 +5319,13 @@
       </p:pic>
       <p:sp>
         <p:nvSpPr>
-          <p:cNvPr id="17" name="Text 12"/>
-          <p:cNvSpPr/>
-          <p:nvPr/>
-        </p:nvSpPr>
-        <p:spPr>
-          <a:xfrm>
-            <a:off x="5870448" y="1719072"/>
+          <p:cNvPr id="7" name="Text 4"/>
+          <p:cNvSpPr/>
+          <p:nvPr/>
+        </p:nvSpPr>
+        <p:spPr>
+          <a:xfrm>
+            <a:off x="512064" y="1719072"/>
             <a:ext cx="2194560" cy="347472"/>
           </a:xfrm>
           <a:prstGeom prst="rect">
@@ -5804,7 +5338,7 @@
           <a:bodyPr wrap="square" lIns="0" tIns="0" rIns="0" bIns="0" rtlCol="0" anchor="ctr"/>
           <a:lstStyle/>
           <a:p>
-            <a:pPr indent="0" marL="0">
+            <a:pPr marL="0" indent="0">
               <a:buNone/>
             </a:pPr>
             <a:r>
@@ -5816,7 +5350,7 @@
                 <a:ea typeface="Trebuchet MS" pitchFamily="34" charset="-122"/>
                 <a:cs typeface="Trebuchet MS" pitchFamily="34" charset="-120"/>
               </a:rPr>
-              <a:t>AI Action Plan</a:t>
+              <a:t>Quick Mode</a:t>
             </a:r>
             <a:endParaRPr lang="en-US" sz="1300" dirty="0"/>
           </a:p>
@@ -5824,13 +5358,13 @@
       </p:sp>
       <p:sp>
         <p:nvSpPr>
-          <p:cNvPr id="18" name="Text 13"/>
-          <p:cNvSpPr/>
-          <p:nvPr/>
-        </p:nvSpPr>
-        <p:spPr>
-          <a:xfrm>
-            <a:off x="5870448" y="2057400"/>
+          <p:cNvPr id="8" name="Text 5"/>
+          <p:cNvSpPr/>
+          <p:nvPr/>
+        </p:nvSpPr>
+        <p:spPr>
+          <a:xfrm>
+            <a:off x="512064" y="2057400"/>
             <a:ext cx="2194560" cy="594360"/>
           </a:xfrm>
           <a:prstGeom prst="rect">
@@ -5843,7 +5377,7 @@
           <a:bodyPr wrap="square" lIns="0" tIns="0" rIns="0" bIns="0" rtlCol="0" anchor="ctr"/>
           <a:lstStyle/>
           <a:p>
-            <a:pPr indent="0" marL="0">
+            <a:pPr marL="0" indent="0">
               <a:buNone/>
             </a:pPr>
             <a:r>
@@ -5855,7 +5389,7 @@
                 <a:ea typeface="Calibri" pitchFamily="34" charset="-122"/>
                 <a:cs typeface="Calibri" pitchFamily="34" charset="-120"/>
               </a:rPr>
-              <a:t>Gemini 2.0 Flash generates a specific plan based on your actual diet type, transport, and heating.</a:t>
+              <a:t>Choose a lifestyle archetype and get your full scored footprint in 30 seconds. No form required.</a:t>
             </a:r>
             <a:endParaRPr lang="en-US" sz="950" dirty="0"/>
           </a:p>
@@ -5863,13 +5397,13 @@
       </p:sp>
       <p:sp>
         <p:nvSpPr>
-          <p:cNvPr id="19" name="Shape 14"/>
-          <p:cNvSpPr/>
-          <p:nvPr/>
-        </p:nvSpPr>
-        <p:spPr>
-          <a:xfrm>
-            <a:off x="1682496" y="3017520"/>
+          <p:cNvPr id="9" name="Shape 6"/>
+          <p:cNvSpPr/>
+          <p:nvPr/>
+        </p:nvSpPr>
+        <p:spPr>
+          <a:xfrm>
+            <a:off x="3026664" y="1097280"/>
             <a:ext cx="2468880" cy="1645920"/>
           </a:xfrm>
           <a:prstGeom prst="rect">
@@ -5888,27 +5422,27 @@
       </p:sp>
       <p:sp>
         <p:nvSpPr>
-          <p:cNvPr id="20" name="Shape 15"/>
-          <p:cNvSpPr/>
-          <p:nvPr/>
-        </p:nvSpPr>
-        <p:spPr>
-          <a:xfrm>
-            <a:off x="1682496" y="4617720"/>
+          <p:cNvPr id="10" name="Shape 7"/>
+          <p:cNvSpPr/>
+          <p:nvPr/>
+        </p:nvSpPr>
+        <p:spPr>
+          <a:xfrm>
+            <a:off x="3026664" y="2697480"/>
             <a:ext cx="2468880" cy="45720"/>
           </a:xfrm>
           <a:prstGeom prst="rect">
             <a:avLst/>
           </a:prstGeom>
           <a:solidFill>
-            <a:srgbClr val="86EFAC"/>
+            <a:srgbClr val="4ADE80"/>
           </a:solidFill>
           <a:ln/>
         </p:spPr>
       </p:sp>
       <p:pic>
         <p:nvPicPr>
-          <p:cNvPr id="21" name="Image 3" descr="preencoded.png">    </p:cNvPr>
+          <p:cNvPr id="11" name="Image 1" descr="preencoded.png"/>
           <p:cNvPicPr>
             <a:picLocks noChangeAspect="1"/>
           </p:cNvPicPr>
@@ -5922,7 +5456,7 @@
         </p:blipFill>
         <p:spPr>
           <a:xfrm>
-            <a:off x="1847088" y="3200400"/>
+            <a:off x="3191256" y="1280160"/>
             <a:ext cx="384048" cy="384048"/>
           </a:xfrm>
           <a:prstGeom prst="rect">
@@ -5932,13 +5466,13 @@
       </p:pic>
       <p:sp>
         <p:nvSpPr>
-          <p:cNvPr id="22" name="Text 16"/>
-          <p:cNvSpPr/>
-          <p:nvPr/>
-        </p:nvSpPr>
-        <p:spPr>
-          <a:xfrm>
-            <a:off x="1847088" y="3639312"/>
+          <p:cNvPr id="12" name="Text 8"/>
+          <p:cNvSpPr/>
+          <p:nvPr/>
+        </p:nvSpPr>
+        <p:spPr>
+          <a:xfrm>
+            <a:off x="3191256" y="1719072"/>
             <a:ext cx="2194560" cy="347472"/>
           </a:xfrm>
           <a:prstGeom prst="rect">
@@ -5951,7 +5485,7 @@
           <a:bodyPr wrap="square" lIns="0" tIns="0" rIns="0" bIns="0" rtlCol="0" anchor="ctr"/>
           <a:lstStyle/>
           <a:p>
-            <a:pPr indent="0" marL="0">
+            <a:pPr marL="0" indent="0">
               <a:buNone/>
             </a:pPr>
             <a:r>
@@ -5963,7 +5497,7 @@
                 <a:ea typeface="Trebuchet MS" pitchFamily="34" charset="-122"/>
                 <a:cs typeface="Trebuchet MS" pitchFamily="34" charset="-120"/>
               </a:rPr>
-              <a:t>What If Simulator</a:t>
+              <a:t>Live Map</a:t>
             </a:r>
             <a:endParaRPr lang="en-US" sz="1300" dirty="0"/>
           </a:p>
@@ -5971,13 +5505,13 @@
       </p:sp>
       <p:sp>
         <p:nvSpPr>
-          <p:cNvPr id="23" name="Text 17"/>
-          <p:cNvSpPr/>
-          <p:nvPr/>
-        </p:nvSpPr>
-        <p:spPr>
-          <a:xfrm>
-            <a:off x="1847088" y="3977640"/>
+          <p:cNvPr id="13" name="Text 9"/>
+          <p:cNvSpPr/>
+          <p:nvPr/>
+        </p:nvSpPr>
+        <p:spPr>
+          <a:xfrm>
+            <a:off x="3191256" y="2057400"/>
             <a:ext cx="2194560" cy="594360"/>
           </a:xfrm>
           <a:prstGeom prst="rect">
@@ -5990,7 +5524,7 @@
           <a:bodyPr wrap="square" lIns="0" tIns="0" rIns="0" bIns="0" rtlCol="0" anchor="ctr"/>
           <a:lstStyle/>
           <a:p>
-            <a:pPr indent="0" marL="0">
+            <a:pPr marL="0" indent="0">
               <a:buNone/>
             </a:pPr>
             <a:r>
@@ -6002,7 +5536,7 @@
                 <a:ea typeface="Calibri" pitchFamily="34" charset="-122"/>
                 <a:cs typeface="Calibri" pitchFamily="34" charset="-120"/>
               </a:rPr>
-              <a:t>Adjust diet, transport, flights, or heating and watch your projected CO₂ update live.</a:t>
+              <a:t>Leaflet.js + Overpass API. Real food banks, recycling depots, community fridges near you.</a:t>
             </a:r>
             <a:endParaRPr lang="en-US" sz="950" dirty="0"/>
           </a:p>
@@ -6010,13 +5544,13 @@
       </p:sp>
       <p:sp>
         <p:nvSpPr>
-          <p:cNvPr id="24" name="Shape 18"/>
-          <p:cNvSpPr/>
-          <p:nvPr/>
-        </p:nvSpPr>
-        <p:spPr>
-          <a:xfrm>
-            <a:off x="4361688" y="3017520"/>
+          <p:cNvPr id="14" name="Shape 10"/>
+          <p:cNvSpPr/>
+          <p:nvPr/>
+        </p:nvSpPr>
+        <p:spPr>
+          <a:xfrm>
+            <a:off x="5705856" y="1097280"/>
             <a:ext cx="2468880" cy="1645920"/>
           </a:xfrm>
           <a:prstGeom prst="rect">
@@ -6035,27 +5569,27 @@
       </p:sp>
       <p:sp>
         <p:nvSpPr>
-          <p:cNvPr id="25" name="Shape 19"/>
-          <p:cNvSpPr/>
-          <p:nvPr/>
-        </p:nvSpPr>
-        <p:spPr>
-          <a:xfrm>
-            <a:off x="4361688" y="4617720"/>
+          <p:cNvPr id="15" name="Shape 11"/>
+          <p:cNvSpPr/>
+          <p:nvPr/>
+        </p:nvSpPr>
+        <p:spPr>
+          <a:xfrm>
+            <a:off x="5705856" y="2697480"/>
             <a:ext cx="2468880" cy="45720"/>
           </a:xfrm>
           <a:prstGeom prst="rect">
             <a:avLst/>
           </a:prstGeom>
           <a:solidFill>
-            <a:srgbClr val="FB923C"/>
+            <a:srgbClr val="60A5FA"/>
           </a:solidFill>
           <a:ln/>
         </p:spPr>
       </p:sp>
       <p:pic>
         <p:nvPicPr>
-          <p:cNvPr id="26" name="Image 4" descr="preencoded.png">    </p:cNvPr>
+          <p:cNvPr id="16" name="Image 2" descr="preencoded.png"/>
           <p:cNvPicPr>
             <a:picLocks noChangeAspect="1"/>
           </p:cNvPicPr>
@@ -6069,7 +5603,7 @@
         </p:blipFill>
         <p:spPr>
           <a:xfrm>
-            <a:off x="4526280" y="3200400"/>
+            <a:off x="5870448" y="1280160"/>
             <a:ext cx="384048" cy="384048"/>
           </a:xfrm>
           <a:prstGeom prst="rect">
@@ -6079,13 +5613,13 @@
       </p:pic>
       <p:sp>
         <p:nvSpPr>
-          <p:cNvPr id="27" name="Text 20"/>
-          <p:cNvSpPr/>
-          <p:nvPr/>
-        </p:nvSpPr>
-        <p:spPr>
-          <a:xfrm>
-            <a:off x="4526280" y="3639312"/>
+          <p:cNvPr id="17" name="Text 12"/>
+          <p:cNvSpPr/>
+          <p:nvPr/>
+        </p:nvSpPr>
+        <p:spPr>
+          <a:xfrm>
+            <a:off x="5870448" y="1719072"/>
             <a:ext cx="2194560" cy="347472"/>
           </a:xfrm>
           <a:prstGeom prst="rect">
@@ -6098,7 +5632,7 @@
           <a:bodyPr wrap="square" lIns="0" tIns="0" rIns="0" bIns="0" rtlCol="0" anchor="ctr"/>
           <a:lstStyle/>
           <a:p>
-            <a:pPr indent="0" marL="0">
+            <a:pPr marL="0" indent="0">
               <a:buNone/>
             </a:pPr>
             <a:r>
@@ -6110,7 +5644,7 @@
                 <a:ea typeface="Trebuchet MS" pitchFamily="34" charset="-122"/>
                 <a:cs typeface="Trebuchet MS" pitchFamily="34" charset="-120"/>
               </a:rPr>
-              <a:t>7-Day Check-In</a:t>
+              <a:t>AI Action Plan</a:t>
             </a:r>
             <a:endParaRPr lang="en-US" sz="1300" dirty="0"/>
           </a:p>
@@ -6118,13 +5652,13 @@
       </p:sp>
       <p:sp>
         <p:nvSpPr>
-          <p:cNvPr id="28" name="Text 21"/>
-          <p:cNvSpPr/>
-          <p:nvPr/>
-        </p:nvSpPr>
-        <p:spPr>
-          <a:xfrm>
-            <a:off x="4526280" y="3977640"/>
+          <p:cNvPr id="18" name="Text 13"/>
+          <p:cNvSpPr/>
+          <p:nvPr/>
+        </p:nvSpPr>
+        <p:spPr>
+          <a:xfrm>
+            <a:off x="5870448" y="2057400"/>
             <a:ext cx="2194560" cy="594360"/>
           </a:xfrm>
           <a:prstGeom prst="rect">
@@ -6137,7 +5671,7 @@
           <a:bodyPr wrap="square" lIns="0" tIns="0" rIns="0" bIns="0" rtlCol="0" anchor="ctr"/>
           <a:lstStyle/>
           <a:p>
-            <a:pPr indent="0" marL="0">
+            <a:pPr marL="0" indent="0">
               <a:buNone/>
             </a:pPr>
             <a:r>
@@ -6149,6 +5683,300 @@
                 <a:ea typeface="Calibri" pitchFamily="34" charset="-122"/>
                 <a:cs typeface="Calibri" pitchFamily="34" charset="-120"/>
               </a:rPr>
+              <a:t>Gemini 2.0 Flash generates a specific plan based on your actual diet type, transport, and heating.</a:t>
+            </a:r>
+            <a:endParaRPr lang="en-US" sz="950" dirty="0"/>
+          </a:p>
+        </p:txBody>
+      </p:sp>
+      <p:sp>
+        <p:nvSpPr>
+          <p:cNvPr id="19" name="Shape 14"/>
+          <p:cNvSpPr/>
+          <p:nvPr/>
+        </p:nvSpPr>
+        <p:spPr>
+          <a:xfrm>
+            <a:off x="1682496" y="3017520"/>
+            <a:ext cx="2468880" cy="1645920"/>
+          </a:xfrm>
+          <a:prstGeom prst="rect">
+            <a:avLst/>
+          </a:prstGeom>
+          <a:solidFill>
+            <a:srgbClr val="1A2218"/>
+          </a:solidFill>
+          <a:ln w="6350">
+            <a:solidFill>
+              <a:srgbClr val="223020"/>
+            </a:solidFill>
+            <a:prstDash val="solid"/>
+          </a:ln>
+        </p:spPr>
+      </p:sp>
+      <p:sp>
+        <p:nvSpPr>
+          <p:cNvPr id="20" name="Shape 15"/>
+          <p:cNvSpPr/>
+          <p:nvPr/>
+        </p:nvSpPr>
+        <p:spPr>
+          <a:xfrm>
+            <a:off x="1682496" y="4617720"/>
+            <a:ext cx="2468880" cy="45720"/>
+          </a:xfrm>
+          <a:prstGeom prst="rect">
+            <a:avLst/>
+          </a:prstGeom>
+          <a:solidFill>
+            <a:srgbClr val="86EFAC"/>
+          </a:solidFill>
+          <a:ln/>
+        </p:spPr>
+      </p:sp>
+      <p:pic>
+        <p:nvPicPr>
+          <p:cNvPr id="21" name="Image 3" descr="preencoded.png"/>
+          <p:cNvPicPr>
+            <a:picLocks noChangeAspect="1"/>
+          </p:cNvPicPr>
+          <p:nvPr/>
+        </p:nvPicPr>
+        <p:blipFill>
+          <a:blip r:embed="rId6"/>
+          <a:stretch>
+            <a:fillRect/>
+          </a:stretch>
+        </p:blipFill>
+        <p:spPr>
+          <a:xfrm>
+            <a:off x="1847088" y="3200400"/>
+            <a:ext cx="384048" cy="384048"/>
+          </a:xfrm>
+          <a:prstGeom prst="rect">
+            <a:avLst/>
+          </a:prstGeom>
+        </p:spPr>
+      </p:pic>
+      <p:sp>
+        <p:nvSpPr>
+          <p:cNvPr id="22" name="Text 16"/>
+          <p:cNvSpPr/>
+          <p:nvPr/>
+        </p:nvSpPr>
+        <p:spPr>
+          <a:xfrm>
+            <a:off x="1847088" y="3639312"/>
+            <a:ext cx="2194560" cy="347472"/>
+          </a:xfrm>
+          <a:prstGeom prst="rect">
+            <a:avLst/>
+          </a:prstGeom>
+          <a:noFill/>
+          <a:ln/>
+        </p:spPr>
+        <p:txBody>
+          <a:bodyPr wrap="square" lIns="0" tIns="0" rIns="0" bIns="0" rtlCol="0" anchor="ctr"/>
+          <a:lstStyle/>
+          <a:p>
+            <a:pPr marL="0" indent="0">
+              <a:buNone/>
+            </a:pPr>
+            <a:r>
+              <a:rPr lang="en-US" sz="1300" b="1" dirty="0">
+                <a:solidFill>
+                  <a:srgbClr val="FFFFFF"/>
+                </a:solidFill>
+                <a:latin typeface="Trebuchet MS" pitchFamily="34" charset="0"/>
+                <a:ea typeface="Trebuchet MS" pitchFamily="34" charset="-122"/>
+                <a:cs typeface="Trebuchet MS" pitchFamily="34" charset="-120"/>
+              </a:rPr>
+              <a:t>What If Simulator</a:t>
+            </a:r>
+            <a:endParaRPr lang="en-US" sz="1300" dirty="0"/>
+          </a:p>
+        </p:txBody>
+      </p:sp>
+      <p:sp>
+        <p:nvSpPr>
+          <p:cNvPr id="23" name="Text 17"/>
+          <p:cNvSpPr/>
+          <p:nvPr/>
+        </p:nvSpPr>
+        <p:spPr>
+          <a:xfrm>
+            <a:off x="1847088" y="3977640"/>
+            <a:ext cx="2194560" cy="594360"/>
+          </a:xfrm>
+          <a:prstGeom prst="rect">
+            <a:avLst/>
+          </a:prstGeom>
+          <a:noFill/>
+          <a:ln/>
+        </p:spPr>
+        <p:txBody>
+          <a:bodyPr wrap="square" lIns="0" tIns="0" rIns="0" bIns="0" rtlCol="0" anchor="ctr"/>
+          <a:lstStyle/>
+          <a:p>
+            <a:pPr marL="0" indent="0">
+              <a:buNone/>
+            </a:pPr>
+            <a:r>
+              <a:rPr lang="en-US" sz="950" dirty="0">
+                <a:solidFill>
+                  <a:srgbClr val="E8EDE9"/>
+                </a:solidFill>
+                <a:latin typeface="Calibri" pitchFamily="34" charset="0"/>
+                <a:ea typeface="Calibri" pitchFamily="34" charset="-122"/>
+                <a:cs typeface="Calibri" pitchFamily="34" charset="-120"/>
+              </a:rPr>
+              <a:t>Adjust diet, transport, flights, or heating and watch your projected CO₂ update live.</a:t>
+            </a:r>
+            <a:endParaRPr lang="en-US" sz="950" dirty="0"/>
+          </a:p>
+        </p:txBody>
+      </p:sp>
+      <p:sp>
+        <p:nvSpPr>
+          <p:cNvPr id="24" name="Shape 18"/>
+          <p:cNvSpPr/>
+          <p:nvPr/>
+        </p:nvSpPr>
+        <p:spPr>
+          <a:xfrm>
+            <a:off x="4361688" y="3017520"/>
+            <a:ext cx="2468880" cy="1645920"/>
+          </a:xfrm>
+          <a:prstGeom prst="rect">
+            <a:avLst/>
+          </a:prstGeom>
+          <a:solidFill>
+            <a:srgbClr val="1A2218"/>
+          </a:solidFill>
+          <a:ln w="6350">
+            <a:solidFill>
+              <a:srgbClr val="223020"/>
+            </a:solidFill>
+            <a:prstDash val="solid"/>
+          </a:ln>
+        </p:spPr>
+      </p:sp>
+      <p:sp>
+        <p:nvSpPr>
+          <p:cNvPr id="25" name="Shape 19"/>
+          <p:cNvSpPr/>
+          <p:nvPr/>
+        </p:nvSpPr>
+        <p:spPr>
+          <a:xfrm>
+            <a:off x="4361688" y="4617720"/>
+            <a:ext cx="2468880" cy="45720"/>
+          </a:xfrm>
+          <a:prstGeom prst="rect">
+            <a:avLst/>
+          </a:prstGeom>
+          <a:solidFill>
+            <a:srgbClr val="FB923C"/>
+          </a:solidFill>
+          <a:ln/>
+        </p:spPr>
+      </p:sp>
+      <p:pic>
+        <p:nvPicPr>
+          <p:cNvPr id="26" name="Image 4" descr="preencoded.png"/>
+          <p:cNvPicPr>
+            <a:picLocks noChangeAspect="1"/>
+          </p:cNvPicPr>
+          <p:nvPr/>
+        </p:nvPicPr>
+        <p:blipFill>
+          <a:blip r:embed="rId7"/>
+          <a:stretch>
+            <a:fillRect/>
+          </a:stretch>
+        </p:blipFill>
+        <p:spPr>
+          <a:xfrm>
+            <a:off x="4526280" y="3200400"/>
+            <a:ext cx="384048" cy="384048"/>
+          </a:xfrm>
+          <a:prstGeom prst="rect">
+            <a:avLst/>
+          </a:prstGeom>
+        </p:spPr>
+      </p:pic>
+      <p:sp>
+        <p:nvSpPr>
+          <p:cNvPr id="27" name="Text 20"/>
+          <p:cNvSpPr/>
+          <p:nvPr/>
+        </p:nvSpPr>
+        <p:spPr>
+          <a:xfrm>
+            <a:off x="4526280" y="3639312"/>
+            <a:ext cx="2194560" cy="347472"/>
+          </a:xfrm>
+          <a:prstGeom prst="rect">
+            <a:avLst/>
+          </a:prstGeom>
+          <a:noFill/>
+          <a:ln/>
+        </p:spPr>
+        <p:txBody>
+          <a:bodyPr wrap="square" lIns="0" tIns="0" rIns="0" bIns="0" rtlCol="0" anchor="ctr"/>
+          <a:lstStyle/>
+          <a:p>
+            <a:pPr marL="0" indent="0">
+              <a:buNone/>
+            </a:pPr>
+            <a:r>
+              <a:rPr lang="en-US" sz="1300" b="1" dirty="0">
+                <a:solidFill>
+                  <a:srgbClr val="FFFFFF"/>
+                </a:solidFill>
+                <a:latin typeface="Trebuchet MS" pitchFamily="34" charset="0"/>
+                <a:ea typeface="Trebuchet MS" pitchFamily="34" charset="-122"/>
+                <a:cs typeface="Trebuchet MS" pitchFamily="34" charset="-120"/>
+              </a:rPr>
+              <a:t>7-Day Check-In</a:t>
+            </a:r>
+            <a:endParaRPr lang="en-US" sz="1300" dirty="0"/>
+          </a:p>
+        </p:txBody>
+      </p:sp>
+      <p:sp>
+        <p:nvSpPr>
+          <p:cNvPr id="28" name="Text 21"/>
+          <p:cNvSpPr/>
+          <p:nvPr/>
+        </p:nvSpPr>
+        <p:spPr>
+          <a:xfrm>
+            <a:off x="4526280" y="3977640"/>
+            <a:ext cx="2194560" cy="594360"/>
+          </a:xfrm>
+          <a:prstGeom prst="rect">
+            <a:avLst/>
+          </a:prstGeom>
+          <a:noFill/>
+          <a:ln/>
+        </p:spPr>
+        <p:txBody>
+          <a:bodyPr wrap="square" lIns="0" tIns="0" rIns="0" bIns="0" rtlCol="0" anchor="ctr"/>
+          <a:lstStyle/>
+          <a:p>
+            <a:pPr marL="0" indent="0">
+              <a:buNone/>
+            </a:pPr>
+            <a:r>
+              <a:rPr lang="en-US" sz="950" dirty="0">
+                <a:solidFill>
+                  <a:srgbClr val="E8EDE9"/>
+                </a:solidFill>
+                <a:latin typeface="Calibri" pitchFamily="34" charset="0"/>
+                <a:ea typeface="Calibri" pitchFamily="34" charset="-122"/>
+                <a:cs typeface="Calibri" pitchFamily="34" charset="-120"/>
+              </a:rPr>
               <a:t>Commit to one action. Return in a week. Log it. See your actual CO₂ saved calculated.</a:t>
             </a:r>
             <a:endParaRPr lang="en-US" sz="950" dirty="0"/>
@@ -6176,7 +6004,7 @@
           <a:bodyPr wrap="square" lIns="0" tIns="0" rIns="0" bIns="0" rtlCol="0" anchor="ctr"/>
           <a:lstStyle/>
           <a:p>
-            <a:pPr algn="ctr" indent="0" marL="0">
+            <a:pPr marL="0" indent="0" algn="ctr">
               <a:buNone/>
             </a:pPr>
             <a:r>
@@ -6210,6 +6038,7 @@
         <a:solidFill>
           <a:srgbClr val="0A0E0B"/>
         </a:solidFill>
+        <a:effectLst/>
       </p:bgPr>
     </p:bg>
     <p:spTree>
@@ -6247,11 +6076,11 @@
           <a:bodyPr wrap="square" lIns="0" tIns="0" rIns="0" bIns="0" rtlCol="0" anchor="ctr"/>
           <a:lstStyle/>
           <a:p>
-            <a:pPr algn="l" indent="0" marL="0">
-              <a:buNone/>
-            </a:pPr>
-            <a:r>
-              <a:rPr lang="en-US" sz="800" b="1" spc="400" kern="0" dirty="0">
+            <a:pPr marL="0" indent="0" algn="l">
+              <a:buNone/>
+            </a:pPr>
+            <a:r>
+              <a:rPr lang="en-US" sz="800" b="1" kern="0" spc="400" dirty="0">
                 <a:solidFill>
                   <a:srgbClr val="22C55E"/>
                 </a:solidFill>
@@ -6283,7 +6112,7 @@
           <a:bodyPr wrap="square" lIns="0" tIns="0" rIns="0" bIns="0" rtlCol="0" anchor="ctr"/>
           <a:lstStyle/>
           <a:p>
-            <a:pPr indent="0" marL="0">
+            <a:pPr marL="0" indent="0">
               <a:buNone/>
             </a:pPr>
             <a:r>
@@ -6300,7 +6129,7 @@
             <a:endParaRPr lang="en-US" sz="2800" dirty="0"/>
           </a:p>
           <a:p>
-            <a:pPr indent="0" marL="0">
+            <a:pPr marL="0" indent="0">
               <a:buNone/>
             </a:pPr>
             <a:r>
@@ -6339,7 +6168,7 @@
           <a:bodyPr wrap="square" lIns="0" tIns="0" rIns="0" bIns="0" rtlCol="0" anchor="ctr"/>
           <a:lstStyle/>
           <a:p>
-            <a:pPr indent="0" marL="0">
+            <a:pPr marL="0" indent="0">
               <a:buNone/>
             </a:pPr>
             <a:r>
@@ -6423,7 +6252,7 @@
           <a:bodyPr wrap="square" lIns="0" tIns="0" rIns="0" bIns="0" rtlCol="0" anchor="ctr"/>
           <a:lstStyle/>
           <a:p>
-            <a:pPr indent="0" marL="0">
+            <a:pPr marL="0" indent="0">
               <a:buNone/>
             </a:pPr>
             <a:r>
@@ -6462,7 +6291,7 @@
           <a:bodyPr wrap="square" lIns="0" tIns="0" rIns="0" bIns="0" rtlCol="0" anchor="ctr"/>
           <a:lstStyle/>
           <a:p>
-            <a:pPr indent="0" marL="0">
+            <a:pPr marL="0" indent="0">
               <a:buNone/>
             </a:pPr>
             <a:r>
@@ -6546,7 +6375,7 @@
           <a:bodyPr wrap="square" lIns="0" tIns="0" rIns="0" bIns="0" rtlCol="0" anchor="ctr"/>
           <a:lstStyle/>
           <a:p>
-            <a:pPr indent="0" marL="0">
+            <a:pPr marL="0" indent="0">
               <a:buNone/>
             </a:pPr>
             <a:r>
@@ -6585,7 +6414,7 @@
           <a:bodyPr wrap="square" lIns="0" tIns="0" rIns="0" bIns="0" rtlCol="0" anchor="ctr"/>
           <a:lstStyle/>
           <a:p>
-            <a:pPr indent="0" marL="0">
+            <a:pPr marL="0" indent="0">
               <a:buNone/>
             </a:pPr>
             <a:r>
@@ -6669,7 +6498,7 @@
           <a:bodyPr wrap="square" lIns="0" tIns="0" rIns="0" bIns="0" rtlCol="0" anchor="ctr"/>
           <a:lstStyle/>
           <a:p>
-            <a:pPr indent="0" marL="0">
+            <a:pPr marL="0" indent="0">
               <a:buNone/>
             </a:pPr>
             <a:r>
@@ -6708,7 +6537,7 @@
           <a:bodyPr wrap="square" lIns="0" tIns="0" rIns="0" bIns="0" rtlCol="0" anchor="ctr"/>
           <a:lstStyle/>
           <a:p>
-            <a:pPr indent="0" marL="0">
+            <a:pPr marL="0" indent="0">
               <a:buNone/>
             </a:pPr>
             <a:r>
@@ -6792,7 +6621,7 @@
           <a:bodyPr wrap="square" lIns="0" tIns="0" rIns="0" bIns="0" rtlCol="0" anchor="ctr"/>
           <a:lstStyle/>
           <a:p>
-            <a:pPr indent="0" marL="0">
+            <a:pPr marL="0" indent="0">
               <a:buNone/>
             </a:pPr>
             <a:r>
@@ -6831,7 +6660,7 @@
           <a:bodyPr wrap="square" lIns="0" tIns="0" rIns="0" bIns="0" rtlCol="0" anchor="ctr"/>
           <a:lstStyle/>
           <a:p>
-            <a:pPr indent="0" marL="0">
+            <a:pPr marL="0" indent="0">
               <a:buNone/>
             </a:pPr>
             <a:r>
@@ -6915,7 +6744,7 @@
           <a:bodyPr wrap="square" lIns="0" tIns="0" rIns="0" bIns="0" rtlCol="0" anchor="ctr"/>
           <a:lstStyle/>
           <a:p>
-            <a:pPr indent="0" marL="0">
+            <a:pPr marL="0" indent="0">
               <a:buNone/>
             </a:pPr>
             <a:r>
@@ -6954,7 +6783,7 @@
           <a:bodyPr wrap="square" lIns="0" tIns="0" rIns="0" bIns="0" rtlCol="0" anchor="ctr"/>
           <a:lstStyle/>
           <a:p>
-            <a:pPr indent="0" marL="0">
+            <a:pPr marL="0" indent="0">
               <a:buNone/>
             </a:pPr>
             <a:r>
@@ -7019,133 +6848,7 @@
       </p:sp>
       <p:pic>
         <p:nvPicPr>
-          <p:cNvPr id="27" name="Image 0" descr="preencoded.png">    </p:cNvPr>
-          <p:cNvPicPr>
-            <a:picLocks noChangeAspect="1"/>
-          </p:cNvPicPr>
-          <p:nvPr/>
-        </p:nvPicPr>
-        <p:blipFill>
-          <a:blip r:embed="rId1"/>
-          <a:stretch>
-            <a:fillRect/>
-          </a:stretch>
-        </p:blipFill>
-        <p:spPr>
-          <a:xfrm>
-            <a:off x="640080" y="2999232"/>
-            <a:ext cx="201168" cy="201168"/>
-          </a:xfrm>
-          <a:prstGeom prst="rect">
-            <a:avLst/>
-          </a:prstGeom>
-        </p:spPr>
-      </p:pic>
-      <p:sp>
-        <p:nvSpPr>
-          <p:cNvPr id="28" name="Text 25"/>
-          <p:cNvSpPr/>
-          <p:nvPr/>
-        </p:nvSpPr>
-        <p:spPr>
-          <a:xfrm>
-            <a:off x="932688" y="2980944"/>
-            <a:ext cx="3017520" cy="274320"/>
-          </a:xfrm>
-          <a:prstGeom prst="rect">
-            <a:avLst/>
-          </a:prstGeom>
-          <a:noFill/>
-          <a:ln/>
-        </p:spPr>
-        <p:txBody>
-          <a:bodyPr wrap="square" lIns="0" tIns="0" rIns="0" bIns="0" rtlCol="0" anchor="ctr"/>
-          <a:lstStyle/>
-          <a:p>
-            <a:pPr indent="0" marL="0">
-              <a:buNone/>
-            </a:pPr>
-            <a:r>
-              <a:rPr lang="en-US" sz="1150" dirty="0">
-                <a:solidFill>
-                  <a:srgbClr val="E8EDE9"/>
-                </a:solidFill>
-                <a:latin typeface="Calibri" pitchFamily="34" charset="0"/>
-                <a:ea typeface="Calibri" pitchFamily="34" charset="-122"/>
-                <a:cs typeface="Calibri" pitchFamily="34" charset="-120"/>
-              </a:rPr>
-              <a:t>Works on any device, any browser</a:t>
-            </a:r>
-            <a:endParaRPr lang="en-US" sz="1150" dirty="0"/>
-          </a:p>
-        </p:txBody>
-      </p:sp>
-      <p:pic>
-        <p:nvPicPr>
-          <p:cNvPr id="29" name="Image 1" descr="preencoded.png">    </p:cNvPr>
-          <p:cNvPicPr>
-            <a:picLocks noChangeAspect="1"/>
-          </p:cNvPicPr>
-          <p:nvPr/>
-        </p:nvPicPr>
-        <p:blipFill>
-          <a:blip r:embed="rId2"/>
-          <a:stretch>
-            <a:fillRect/>
-          </a:stretch>
-        </p:blipFill>
-        <p:spPr>
-          <a:xfrm>
-            <a:off x="640080" y="3502152"/>
-            <a:ext cx="201168" cy="201168"/>
-          </a:xfrm>
-          <a:prstGeom prst="rect">
-            <a:avLst/>
-          </a:prstGeom>
-        </p:spPr>
-      </p:pic>
-      <p:sp>
-        <p:nvSpPr>
-          <p:cNvPr id="30" name="Text 26"/>
-          <p:cNvSpPr/>
-          <p:nvPr/>
-        </p:nvSpPr>
-        <p:spPr>
-          <a:xfrm>
-            <a:off x="932688" y="3483864"/>
-            <a:ext cx="3017520" cy="274320"/>
-          </a:xfrm>
-          <a:prstGeom prst="rect">
-            <a:avLst/>
-          </a:prstGeom>
-          <a:noFill/>
-          <a:ln/>
-        </p:spPr>
-        <p:txBody>
-          <a:bodyPr wrap="square" lIns="0" tIns="0" rIns="0" bIns="0" rtlCol="0" anchor="ctr"/>
-          <a:lstStyle/>
-          <a:p>
-            <a:pPr indent="0" marL="0">
-              <a:buNone/>
-            </a:pPr>
-            <a:r>
-              <a:rPr lang="en-US" sz="1150" dirty="0">
-                <a:solidFill>
-                  <a:srgbClr val="E8EDE9"/>
-                </a:solidFill>
-                <a:latin typeface="Calibri" pitchFamily="34" charset="0"/>
-                <a:ea typeface="Calibri" pitchFamily="34" charset="-122"/>
-                <a:cs typeface="Calibri" pitchFamily="34" charset="-120"/>
-              </a:rPr>
-              <a:t>No install, no account, no cost</a:t>
-            </a:r>
-            <a:endParaRPr lang="en-US" sz="1150" dirty="0"/>
-          </a:p>
-        </p:txBody>
-      </p:sp>
-      <p:pic>
-        <p:nvPicPr>
-          <p:cNvPr id="31" name="Image 2" descr="preencoded.png">    </p:cNvPr>
+          <p:cNvPr id="27" name="Image 0" descr="preencoded.png"/>
           <p:cNvPicPr>
             <a:picLocks noChangeAspect="1"/>
           </p:cNvPicPr>
@@ -7159,6 +6862,132 @@
         </p:blipFill>
         <p:spPr>
           <a:xfrm>
+            <a:off x="640080" y="2999232"/>
+            <a:ext cx="201168" cy="201168"/>
+          </a:xfrm>
+          <a:prstGeom prst="rect">
+            <a:avLst/>
+          </a:prstGeom>
+        </p:spPr>
+      </p:pic>
+      <p:sp>
+        <p:nvSpPr>
+          <p:cNvPr id="28" name="Text 25"/>
+          <p:cNvSpPr/>
+          <p:nvPr/>
+        </p:nvSpPr>
+        <p:spPr>
+          <a:xfrm>
+            <a:off x="932688" y="2980944"/>
+            <a:ext cx="3017520" cy="274320"/>
+          </a:xfrm>
+          <a:prstGeom prst="rect">
+            <a:avLst/>
+          </a:prstGeom>
+          <a:noFill/>
+          <a:ln/>
+        </p:spPr>
+        <p:txBody>
+          <a:bodyPr wrap="square" lIns="0" tIns="0" rIns="0" bIns="0" rtlCol="0" anchor="ctr"/>
+          <a:lstStyle/>
+          <a:p>
+            <a:pPr marL="0" indent="0">
+              <a:buNone/>
+            </a:pPr>
+            <a:r>
+              <a:rPr lang="en-US" sz="1150" dirty="0">
+                <a:solidFill>
+                  <a:srgbClr val="E8EDE9"/>
+                </a:solidFill>
+                <a:latin typeface="Calibri" pitchFamily="34" charset="0"/>
+                <a:ea typeface="Calibri" pitchFamily="34" charset="-122"/>
+                <a:cs typeface="Calibri" pitchFamily="34" charset="-120"/>
+              </a:rPr>
+              <a:t>Works on any device, any browser</a:t>
+            </a:r>
+            <a:endParaRPr lang="en-US" sz="1150" dirty="0"/>
+          </a:p>
+        </p:txBody>
+      </p:sp>
+      <p:pic>
+        <p:nvPicPr>
+          <p:cNvPr id="29" name="Image 1" descr="preencoded.png"/>
+          <p:cNvPicPr>
+            <a:picLocks noChangeAspect="1"/>
+          </p:cNvPicPr>
+          <p:nvPr/>
+        </p:nvPicPr>
+        <p:blipFill>
+          <a:blip r:embed="rId3"/>
+          <a:stretch>
+            <a:fillRect/>
+          </a:stretch>
+        </p:blipFill>
+        <p:spPr>
+          <a:xfrm>
+            <a:off x="640080" y="3502152"/>
+            <a:ext cx="201168" cy="201168"/>
+          </a:xfrm>
+          <a:prstGeom prst="rect">
+            <a:avLst/>
+          </a:prstGeom>
+        </p:spPr>
+      </p:pic>
+      <p:sp>
+        <p:nvSpPr>
+          <p:cNvPr id="30" name="Text 26"/>
+          <p:cNvSpPr/>
+          <p:nvPr/>
+        </p:nvSpPr>
+        <p:spPr>
+          <a:xfrm>
+            <a:off x="932688" y="3483864"/>
+            <a:ext cx="3017520" cy="274320"/>
+          </a:xfrm>
+          <a:prstGeom prst="rect">
+            <a:avLst/>
+          </a:prstGeom>
+          <a:noFill/>
+          <a:ln/>
+        </p:spPr>
+        <p:txBody>
+          <a:bodyPr wrap="square" lIns="0" tIns="0" rIns="0" bIns="0" rtlCol="0" anchor="ctr"/>
+          <a:lstStyle/>
+          <a:p>
+            <a:pPr marL="0" indent="0">
+              <a:buNone/>
+            </a:pPr>
+            <a:r>
+              <a:rPr lang="en-US" sz="1150" dirty="0">
+                <a:solidFill>
+                  <a:srgbClr val="E8EDE9"/>
+                </a:solidFill>
+                <a:latin typeface="Calibri" pitchFamily="34" charset="0"/>
+                <a:ea typeface="Calibri" pitchFamily="34" charset="-122"/>
+                <a:cs typeface="Calibri" pitchFamily="34" charset="-120"/>
+              </a:rPr>
+              <a:t>No install, no account, no cost</a:t>
+            </a:r>
+            <a:endParaRPr lang="en-US" sz="1150" dirty="0"/>
+          </a:p>
+        </p:txBody>
+      </p:sp>
+      <p:pic>
+        <p:nvPicPr>
+          <p:cNvPr id="31" name="Image 2" descr="preencoded.png"/>
+          <p:cNvPicPr>
+            <a:picLocks noChangeAspect="1"/>
+          </p:cNvPicPr>
+          <p:nvPr/>
+        </p:nvPicPr>
+        <p:blipFill>
+          <a:blip r:embed="rId3"/>
+          <a:stretch>
+            <a:fillRect/>
+          </a:stretch>
+        </p:blipFill>
+        <p:spPr>
+          <a:xfrm>
             <a:off x="640080" y="4005072"/>
             <a:ext cx="201168" cy="201168"/>
           </a:xfrm>
@@ -7188,7 +7017,7 @@
           <a:bodyPr wrap="square" lIns="0" tIns="0" rIns="0" bIns="0" rtlCol="0" anchor="ctr"/>
           <a:lstStyle/>
           <a:p>
-            <a:pPr indent="0" marL="0">
+            <a:pPr marL="0" indent="0">
               <a:buNone/>
             </a:pPr>
             <a:r>
@@ -7222,6 +7051,7 @@
         <a:solidFill>
           <a:srgbClr val="0A0E0B"/>
         </a:solidFill>
+        <a:effectLst/>
       </p:bgPr>
     </p:bg>
     <p:spTree>
@@ -7259,11 +7089,11 @@
           <a:bodyPr wrap="square" lIns="0" tIns="0" rIns="0" bIns="0" rtlCol="0" anchor="ctr"/>
           <a:lstStyle/>
           <a:p>
-            <a:pPr algn="l" indent="0" marL="0">
-              <a:buNone/>
-            </a:pPr>
-            <a:r>
-              <a:rPr lang="en-US" sz="800" b="1" spc="400" kern="0" dirty="0">
+            <a:pPr marL="0" indent="0" algn="l">
+              <a:buNone/>
+            </a:pPr>
+            <a:r>
+              <a:rPr lang="en-US" sz="800" b="1" kern="0" spc="400" dirty="0">
                 <a:solidFill>
                   <a:srgbClr val="22C55E"/>
                 </a:solidFill>
@@ -7295,7 +7125,7 @@
           <a:bodyPr wrap="square" lIns="0" tIns="0" rIns="0" bIns="0" rtlCol="0" anchor="ctr"/>
           <a:lstStyle/>
           <a:p>
-            <a:pPr indent="0" marL="0">
+            <a:pPr marL="0" indent="0">
               <a:buNone/>
             </a:pPr>
             <a:r>
@@ -7312,7 +7142,7 @@
             <a:endParaRPr lang="en-US" sz="3000" dirty="0"/>
           </a:p>
           <a:p>
-            <a:pPr indent="0" marL="0">
+            <a:pPr marL="0" indent="0">
               <a:buNone/>
             </a:pPr>
             <a:r>
@@ -7332,14 +7162,14 @@
       </p:sp>
       <p:pic>
         <p:nvPicPr>
-          <p:cNvPr id="4" name="Image 0" descr="preencoded.png">    </p:cNvPr>
+          <p:cNvPr id="4" name="Image 0" descr="preencoded.png"/>
           <p:cNvPicPr>
             <a:picLocks noChangeAspect="1"/>
           </p:cNvPicPr>
           <p:nvPr/>
         </p:nvPicPr>
         <p:blipFill>
-          <a:blip r:embed="rId1"/>
+          <a:blip r:embed="rId3"/>
           <a:stretch>
             <a:fillRect/>
           </a:stretch>
@@ -7420,11 +7250,11 @@
           <a:bodyPr wrap="square" lIns="0" tIns="0" rIns="0" bIns="0" rtlCol="0" anchor="ctr"/>
           <a:lstStyle/>
           <a:p>
-            <a:pPr indent="0" marL="0">
-              <a:buNone/>
-            </a:pPr>
-            <a:r>
-              <a:rPr lang="en-US" sz="800" b="1" spc="200" kern="0" dirty="0">
+            <a:pPr marL="0" indent="0">
+              <a:buNone/>
+            </a:pPr>
+            <a:r>
+              <a:rPr lang="en-US" sz="800" b="1" kern="0" spc="200" dirty="0">
                 <a:solidFill>
                   <a:srgbClr val="4ADE80"/>
                 </a:solidFill>
@@ -7459,7 +7289,7 @@
           <a:bodyPr wrap="square" lIns="0" tIns="0" rIns="0" bIns="0" rtlCol="0" anchor="ctr"/>
           <a:lstStyle/>
           <a:p>
-            <a:pPr indent="0" marL="0">
+            <a:pPr marL="0" indent="0">
               <a:buNone/>
             </a:pPr>
             <a:r>
@@ -7498,7 +7328,7 @@
           <a:bodyPr wrap="square" lIns="0" tIns="0" rIns="0" bIns="0" rtlCol="0" anchor="ctr"/>
           <a:lstStyle/>
           <a:p>
-            <a:pPr indent="0" marL="0">
+            <a:pPr marL="0" indent="0">
               <a:buNone/>
             </a:pPr>
             <a:r>
@@ -7582,11 +7412,11 @@
           <a:bodyPr wrap="square" lIns="0" tIns="0" rIns="0" bIns="0" rtlCol="0" anchor="ctr"/>
           <a:lstStyle/>
           <a:p>
-            <a:pPr indent="0" marL="0">
-              <a:buNone/>
-            </a:pPr>
-            <a:r>
-              <a:rPr lang="en-US" sz="800" b="1" spc="200" kern="0" dirty="0">
+            <a:pPr marL="0" indent="0">
+              <a:buNone/>
+            </a:pPr>
+            <a:r>
+              <a:rPr lang="en-US" sz="800" b="1" kern="0" spc="200" dirty="0">
                 <a:solidFill>
                   <a:srgbClr val="22C55E"/>
                 </a:solidFill>
@@ -7621,7 +7451,7 @@
           <a:bodyPr wrap="square" lIns="0" tIns="0" rIns="0" bIns="0" rtlCol="0" anchor="ctr"/>
           <a:lstStyle/>
           <a:p>
-            <a:pPr indent="0" marL="0">
+            <a:pPr marL="0" indent="0">
               <a:buNone/>
             </a:pPr>
             <a:r>
@@ -7660,7 +7490,7 @@
           <a:bodyPr wrap="square" lIns="0" tIns="0" rIns="0" bIns="0" rtlCol="0" anchor="ctr"/>
           <a:lstStyle/>
           <a:p>
-            <a:pPr indent="0" marL="0">
+            <a:pPr marL="0" indent="0">
               <a:buNone/>
             </a:pPr>
             <a:r>
@@ -7744,11 +7574,11 @@
           <a:bodyPr wrap="square" lIns="0" tIns="0" rIns="0" bIns="0" rtlCol="0" anchor="ctr"/>
           <a:lstStyle/>
           <a:p>
-            <a:pPr indent="0" marL="0">
-              <a:buNone/>
-            </a:pPr>
-            <a:r>
-              <a:rPr lang="en-US" sz="800" b="1" spc="200" kern="0" dirty="0">
+            <a:pPr marL="0" indent="0">
+              <a:buNone/>
+            </a:pPr>
+            <a:r>
+              <a:rPr lang="en-US" sz="800" b="1" kern="0" spc="200" dirty="0">
                 <a:solidFill>
                   <a:srgbClr val="60A5FA"/>
                 </a:solidFill>
@@ -7783,7 +7613,7 @@
           <a:bodyPr wrap="square" lIns="0" tIns="0" rIns="0" bIns="0" rtlCol="0" anchor="ctr"/>
           <a:lstStyle/>
           <a:p>
-            <a:pPr indent="0" marL="0">
+            <a:pPr marL="0" indent="0">
               <a:buNone/>
             </a:pPr>
             <a:r>
@@ -7822,7 +7652,7 @@
           <a:bodyPr wrap="square" lIns="0" tIns="0" rIns="0" bIns="0" rtlCol="0" anchor="ctr"/>
           <a:lstStyle/>
           <a:p>
-            <a:pPr indent="0" marL="0">
+            <a:pPr marL="0" indent="0">
               <a:buNone/>
             </a:pPr>
             <a:r>
@@ -7906,11 +7736,11 @@
           <a:bodyPr wrap="square" lIns="0" tIns="0" rIns="0" bIns="0" rtlCol="0" anchor="ctr"/>
           <a:lstStyle/>
           <a:p>
-            <a:pPr indent="0" marL="0">
-              <a:buNone/>
-            </a:pPr>
-            <a:r>
-              <a:rPr lang="en-US" sz="800" b="1" spc="200" kern="0" dirty="0">
+            <a:pPr marL="0" indent="0">
+              <a:buNone/>
+            </a:pPr>
+            <a:r>
+              <a:rPr lang="en-US" sz="800" b="1" kern="0" spc="200" dirty="0">
                 <a:solidFill>
                   <a:srgbClr val="86EFAC"/>
                 </a:solidFill>
@@ -7945,7 +7775,7 @@
           <a:bodyPr wrap="square" lIns="0" tIns="0" rIns="0" bIns="0" rtlCol="0" anchor="ctr"/>
           <a:lstStyle/>
           <a:p>
-            <a:pPr indent="0" marL="0">
+            <a:pPr marL="0" indent="0">
               <a:buNone/>
             </a:pPr>
             <a:r>
@@ -7984,7 +7814,7 @@
           <a:bodyPr wrap="square" lIns="0" tIns="0" rIns="0" bIns="0" rtlCol="0" anchor="ctr"/>
           <a:lstStyle/>
           <a:p>
-            <a:pPr indent="0" marL="0">
+            <a:pPr marL="0" indent="0">
               <a:buNone/>
             </a:pPr>
             <a:r>
@@ -8023,7 +7853,7 @@
           <a:bodyPr wrap="square" lIns="0" tIns="0" rIns="0" bIns="0" rtlCol="0" anchor="ctr"/>
           <a:lstStyle/>
           <a:p>
-            <a:pPr algn="ctr" indent="0" marL="0">
+            <a:pPr marL="0" indent="0" algn="ctr">
               <a:buNone/>
             </a:pPr>
             <a:r>
@@ -8057,6 +7887,7 @@
         <a:solidFill>
           <a:srgbClr val="0A0E0B"/>
         </a:solidFill>
+        <a:effectLst/>
       </p:bgPr>
     </p:bg>
     <p:spTree>
@@ -8094,11 +7925,11 @@
           <a:bodyPr wrap="square" lIns="0" tIns="0" rIns="0" bIns="0" rtlCol="0" anchor="ctr"/>
           <a:lstStyle/>
           <a:p>
-            <a:pPr algn="l" indent="0" marL="0">
-              <a:buNone/>
-            </a:pPr>
-            <a:r>
-              <a:rPr lang="en-US" sz="800" b="1" spc="400" kern="0" dirty="0">
+            <a:pPr marL="0" indent="0" algn="l">
+              <a:buNone/>
+            </a:pPr>
+            <a:r>
+              <a:rPr lang="en-US" sz="800" b="1" kern="0" spc="400" dirty="0">
                 <a:solidFill>
                   <a:srgbClr val="22C55E"/>
                 </a:solidFill>
@@ -8130,7 +7961,7 @@
           <a:bodyPr wrap="square" lIns="0" tIns="0" rIns="0" bIns="0" rtlCol="0" anchor="ctr"/>
           <a:lstStyle/>
           <a:p>
-            <a:pPr indent="0" marL="0">
+            <a:pPr marL="0" indent="0">
               <a:buNone/>
             </a:pPr>
             <a:r>
@@ -8147,7 +7978,7 @@
             <a:endParaRPr lang="en-US" sz="2800" dirty="0"/>
           </a:p>
           <a:p>
-            <a:pPr indent="0" marL="0">
+            <a:pPr marL="0" indent="0">
               <a:buNone/>
             </a:pPr>
             <a:r>
@@ -8228,7 +8059,7 @@
           <a:bodyPr wrap="square" lIns="0" tIns="0" rIns="0" bIns="0" rtlCol="0" anchor="ctr"/>
           <a:lstStyle/>
           <a:p>
-            <a:pPr indent="0" marL="0">
+            <a:pPr marL="0" indent="0">
               <a:buNone/>
             </a:pPr>
             <a:r>
@@ -8267,7 +8098,7 @@
           <a:bodyPr wrap="square" lIns="0" tIns="0" rIns="0" bIns="0" rtlCol="0" anchor="ctr"/>
           <a:lstStyle/>
           <a:p>
-            <a:pPr indent="0" marL="0">
+            <a:pPr marL="0" indent="0">
               <a:buNone/>
             </a:pPr>
             <a:r>
@@ -8348,7 +8179,7 @@
           <a:bodyPr wrap="square" lIns="0" tIns="0" rIns="0" bIns="0" rtlCol="0" anchor="ctr"/>
           <a:lstStyle/>
           <a:p>
-            <a:pPr indent="0" marL="0">
+            <a:pPr marL="0" indent="0">
               <a:buNone/>
             </a:pPr>
             <a:r>
@@ -8387,7 +8218,7 @@
           <a:bodyPr wrap="square" lIns="0" tIns="0" rIns="0" bIns="0" rtlCol="0" anchor="ctr"/>
           <a:lstStyle/>
           <a:p>
-            <a:pPr indent="0" marL="0">
+            <a:pPr marL="0" indent="0">
               <a:buNone/>
             </a:pPr>
             <a:r>
@@ -8468,7 +8299,7 @@
           <a:bodyPr wrap="square" lIns="0" tIns="0" rIns="0" bIns="0" rtlCol="0" anchor="ctr"/>
           <a:lstStyle/>
           <a:p>
-            <a:pPr indent="0" marL="0">
+            <a:pPr marL="0" indent="0">
               <a:buNone/>
             </a:pPr>
             <a:r>
@@ -8507,7 +8338,7 @@
           <a:bodyPr wrap="square" lIns="0" tIns="0" rIns="0" bIns="0" rtlCol="0" anchor="ctr"/>
           <a:lstStyle/>
           <a:p>
-            <a:pPr indent="0" marL="0">
+            <a:pPr marL="0" indent="0">
               <a:buNone/>
             </a:pPr>
             <a:r>
@@ -8527,7 +8358,7 @@
       </p:sp>
       <p:graphicFrame>
         <p:nvGraphicFramePr>
-          <p:cNvPr id="16" name="Chart 0" descr=""/>
+          <p:cNvPr id="16" name="Chart 0"/>
           <p:cNvGraphicFramePr/>
           <p:nvPr/>
         </p:nvGraphicFramePr>
@@ -8535,9 +8366,9 @@
           <a:off x="5303520" y="1188720"/>
           <a:ext cx="3474720" cy="3200400"/>
         </p:xfrm>
-        <a:graphic xmlns:a="http://schemas.openxmlformats.org/drawingml/2006/main">
+        <a:graphic>
           <a:graphicData uri="http://schemas.openxmlformats.org/drawingml/2006/chart">
-            <c:chart xmlns:c="http://schemas.openxmlformats.org/drawingml/2006/chart" r:id="rId1"/>
+            <c:chart xmlns:c="http://schemas.openxmlformats.org/drawingml/2006/chart" xmlns:r="http://schemas.openxmlformats.org/officeDocument/2006/relationships" r:id="rId3"/>
           </a:graphicData>
         </a:graphic>
       </p:graphicFrame>
@@ -8607,7 +8438,7 @@
           <a:bodyPr wrap="square" lIns="0" tIns="0" rIns="0" bIns="0" rtlCol="0" anchor="ctr"/>
           <a:lstStyle/>
           <a:p>
-            <a:pPr indent="0" marL="0">
+            <a:pPr marL="0" indent="0">
               <a:buNone/>
             </a:pPr>
             <a:r>
@@ -8641,6 +8472,7 @@
         <a:solidFill>
           <a:srgbClr val="0A0E0B"/>
         </a:solidFill>
+        <a:effectLst/>
       </p:bgPr>
     </p:bg>
     <p:spTree>
@@ -8678,11 +8510,11 @@
           <a:bodyPr wrap="square" lIns="0" tIns="0" rIns="0" bIns="0" rtlCol="0" anchor="ctr"/>
           <a:lstStyle/>
           <a:p>
-            <a:pPr algn="l" indent="0" marL="0">
-              <a:buNone/>
-            </a:pPr>
-            <a:r>
-              <a:rPr lang="en-US" sz="800" b="1" spc="400" kern="0" dirty="0">
+            <a:pPr marL="0" indent="0" algn="l">
+              <a:buNone/>
+            </a:pPr>
+            <a:r>
+              <a:rPr lang="en-US" sz="800" b="1" kern="0" spc="400" dirty="0">
                 <a:solidFill>
                   <a:srgbClr val="22C55E"/>
                 </a:solidFill>
@@ -8714,7 +8546,7 @@
           <a:bodyPr wrap="square" lIns="0" tIns="0" rIns="0" bIns="0" rtlCol="0" anchor="ctr"/>
           <a:lstStyle/>
           <a:p>
-            <a:pPr indent="0" marL="0">
+            <a:pPr marL="0" indent="0">
               <a:buNone/>
             </a:pPr>
             <a:r>
@@ -8731,7 +8563,7 @@
             <a:endParaRPr lang="en-US" sz="3400" dirty="0"/>
           </a:p>
           <a:p>
-            <a:pPr indent="0" marL="0">
+            <a:pPr marL="0" indent="0">
               <a:buNone/>
             </a:pPr>
             <a:r>
@@ -8815,7 +8647,7 @@
           <a:bodyPr wrap="square" lIns="0" tIns="0" rIns="0" bIns="0" rtlCol="0" anchor="ctr"/>
           <a:lstStyle/>
           <a:p>
-            <a:pPr indent="0" marL="0">
+            <a:pPr marL="0" indent="0">
               <a:buNone/>
             </a:pPr>
             <a:r>
@@ -8854,7 +8686,7 @@
           <a:bodyPr wrap="square" lIns="0" tIns="0" rIns="0" bIns="0" rtlCol="0" anchor="ctr"/>
           <a:lstStyle/>
           <a:p>
-            <a:pPr indent="0" marL="0">
+            <a:pPr marL="0" indent="0">
               <a:buNone/>
             </a:pPr>
             <a:r>
@@ -8871,7 +8703,7 @@
             <a:endParaRPr lang="en-US" sz="1100" dirty="0"/>
           </a:p>
           <a:p>
-            <a:pPr indent="0" marL="0">
+            <a:pPr marL="0" indent="0">
               <a:buNone/>
             </a:pPr>
             <a:r>
@@ -8888,7 +8720,7 @@
             <a:endParaRPr lang="en-US" sz="1100" dirty="0"/>
           </a:p>
           <a:p>
-            <a:pPr indent="0" marL="0">
+            <a:pPr marL="0" indent="0">
               <a:buNone/>
             </a:pPr>
             <a:r>
@@ -8947,7 +8779,7 @@
           <a:bodyPr wrap="square" lIns="0" tIns="0" rIns="0" bIns="0" rtlCol="0" anchor="ctr"/>
           <a:lstStyle/>
           <a:p>
-            <a:pPr indent="0" marL="0">
+            <a:pPr marL="0" indent="0">
               <a:buNone/>
             </a:pPr>
             <a:r>
@@ -8986,7 +8818,7 @@
           <a:bodyPr wrap="square" lIns="0" tIns="0" rIns="0" bIns="0" rtlCol="0" anchor="ctr"/>
           <a:lstStyle/>
           <a:p>
-            <a:pPr indent="0" marL="0">
+            <a:pPr marL="0" indent="0">
               <a:buNone/>
             </a:pPr>
             <a:r>
@@ -9031,261 +8863,7 @@
       </p:sp>
       <p:pic>
         <p:nvPicPr>
-          <p:cNvPr id="12" name="Image 0" descr="preencoded.png">    </p:cNvPr>
-          <p:cNvPicPr>
-            <a:picLocks noChangeAspect="1"/>
-          </p:cNvPicPr>
-          <p:nvPr/>
-        </p:nvPicPr>
-        <p:blipFill>
-          <a:blip r:embed="rId1"/>
-          <a:stretch>
-            <a:fillRect/>
-          </a:stretch>
-        </p:blipFill>
-        <p:spPr>
-          <a:xfrm>
-            <a:off x="4828032" y="1892808"/>
-            <a:ext cx="384048" cy="384048"/>
-          </a:xfrm>
-          <a:prstGeom prst="rect">
-            <a:avLst/>
-          </a:prstGeom>
-        </p:spPr>
-      </p:pic>
-      <p:sp>
-        <p:nvSpPr>
-          <p:cNvPr id="13" name="Text 10"/>
-          <p:cNvSpPr/>
-          <p:nvPr/>
-        </p:nvSpPr>
-        <p:spPr>
-          <a:xfrm>
-            <a:off x="5349240" y="1783080"/>
-            <a:ext cx="3200400" cy="320040"/>
-          </a:xfrm>
-          <a:prstGeom prst="rect">
-            <a:avLst/>
-          </a:prstGeom>
-          <a:noFill/>
-          <a:ln/>
-        </p:spPr>
-        <p:txBody>
-          <a:bodyPr wrap="square" lIns="0" tIns="0" rIns="0" bIns="0" rtlCol="0" anchor="ctr"/>
-          <a:lstStyle/>
-          <a:p>
-            <a:pPr indent="0" marL="0">
-              <a:buNone/>
-            </a:pPr>
-            <a:r>
-              <a:rPr lang="en-US" sz="1300" b="1" dirty="0">
-                <a:solidFill>
-                  <a:srgbClr val="FFFFFF"/>
-                </a:solidFill>
-                <a:latin typeface="Trebuchet MS" pitchFamily="34" charset="0"/>
-                <a:ea typeface="Trebuchet MS" pitchFamily="34" charset="-122"/>
-                <a:cs typeface="Trebuchet MS" pitchFamily="34" charset="-120"/>
-              </a:rPr>
-              <a:t>BIG Club</a:t>
-            </a:r>
-            <a:endParaRPr lang="en-US" sz="1300" dirty="0"/>
-          </a:p>
-        </p:txBody>
-      </p:sp>
-      <p:sp>
-        <p:nvSpPr>
-          <p:cNvPr id="14" name="Text 11"/>
-          <p:cNvSpPr/>
-          <p:nvPr/>
-        </p:nvSpPr>
-        <p:spPr>
-          <a:xfrm>
-            <a:off x="5349240" y="2130552"/>
-            <a:ext cx="3200400" cy="365760"/>
-          </a:xfrm>
-          <a:prstGeom prst="rect">
-            <a:avLst/>
-          </a:prstGeom>
-          <a:noFill/>
-          <a:ln/>
-        </p:spPr>
-        <p:txBody>
-          <a:bodyPr wrap="square" lIns="0" tIns="0" rIns="0" bIns="0" rtlCol="0" anchor="ctr"/>
-          <a:lstStyle/>
-          <a:p>
-            <a:pPr indent="0" marL="0">
-              <a:buNone/>
-            </a:pPr>
-            <a:r>
-              <a:rPr lang="en-US" sz="1000" dirty="0">
-                <a:solidFill>
-                  <a:srgbClr val="E8EDE9"/>
-                </a:solidFill>
-                <a:latin typeface="Calibri" pitchFamily="34" charset="0"/>
-                <a:ea typeface="Calibri" pitchFamily="34" charset="-122"/>
-                <a:cs typeface="Calibri" pitchFamily="34" charset="-120"/>
-              </a:rPr>
-              <a:t>AI tools initiative at school. Teaches students to build with AI.</a:t>
-            </a:r>
-            <a:endParaRPr lang="en-US" sz="1000" dirty="0"/>
-          </a:p>
-        </p:txBody>
-      </p:sp>
-      <p:sp>
-        <p:nvSpPr>
-          <p:cNvPr id="15" name="Shape 12"/>
-          <p:cNvSpPr/>
-          <p:nvPr/>
-        </p:nvSpPr>
-        <p:spPr>
-          <a:xfrm>
-            <a:off x="4663440" y="2770632"/>
-            <a:ext cx="4023360" cy="914400"/>
-          </a:xfrm>
-          <a:prstGeom prst="rect">
-            <a:avLst/>
-          </a:prstGeom>
-          <a:solidFill>
-            <a:srgbClr val="131810"/>
-          </a:solidFill>
-          <a:ln w="6350">
-            <a:solidFill>
-              <a:srgbClr val="223020"/>
-            </a:solidFill>
-            <a:prstDash val="solid"/>
-          </a:ln>
-        </p:spPr>
-      </p:sp>
-      <p:pic>
-        <p:nvPicPr>
-          <p:cNvPr id="16" name="Image 1" descr="preencoded.png">    </p:cNvPr>
-          <p:cNvPicPr>
-            <a:picLocks noChangeAspect="1"/>
-          </p:cNvPicPr>
-          <p:nvPr/>
-        </p:nvPicPr>
-        <p:blipFill>
-          <a:blip r:embed="rId2"/>
-          <a:stretch>
-            <a:fillRect/>
-          </a:stretch>
-        </p:blipFill>
-        <p:spPr>
-          <a:xfrm>
-            <a:off x="4828032" y="2971800"/>
-            <a:ext cx="384048" cy="384048"/>
-          </a:xfrm>
-          <a:prstGeom prst="rect">
-            <a:avLst/>
-          </a:prstGeom>
-        </p:spPr>
-      </p:pic>
-      <p:sp>
-        <p:nvSpPr>
-          <p:cNvPr id="17" name="Text 13"/>
-          <p:cNvSpPr/>
-          <p:nvPr/>
-        </p:nvSpPr>
-        <p:spPr>
-          <a:xfrm>
-            <a:off x="5349240" y="2862072"/>
-            <a:ext cx="3200400" cy="320040"/>
-          </a:xfrm>
-          <a:prstGeom prst="rect">
-            <a:avLst/>
-          </a:prstGeom>
-          <a:noFill/>
-          <a:ln/>
-        </p:spPr>
-        <p:txBody>
-          <a:bodyPr wrap="square" lIns="0" tIns="0" rIns="0" bIns="0" rtlCol="0" anchor="ctr"/>
-          <a:lstStyle/>
-          <a:p>
-            <a:pPr indent="0" marL="0">
-              <a:buNone/>
-            </a:pPr>
-            <a:r>
-              <a:rPr lang="en-US" sz="1300" b="1" dirty="0">
-                <a:solidFill>
-                  <a:srgbClr val="FFFFFF"/>
-                </a:solidFill>
-                <a:latin typeface="Trebuchet MS" pitchFamily="34" charset="0"/>
-                <a:ea typeface="Trebuchet MS" pitchFamily="34" charset="-122"/>
-                <a:cs typeface="Trebuchet MS" pitchFamily="34" charset="-120"/>
-              </a:rPr>
-              <a:t>Maqsad</a:t>
-            </a:r>
-            <a:endParaRPr lang="en-US" sz="1300" dirty="0"/>
-          </a:p>
-        </p:txBody>
-      </p:sp>
-      <p:sp>
-        <p:nvSpPr>
-          <p:cNvPr id="18" name="Text 14"/>
-          <p:cNvSpPr/>
-          <p:nvPr/>
-        </p:nvSpPr>
-        <p:spPr>
-          <a:xfrm>
-            <a:off x="5349240" y="3209544"/>
-            <a:ext cx="3200400" cy="365760"/>
-          </a:xfrm>
-          <a:prstGeom prst="rect">
-            <a:avLst/>
-          </a:prstGeom>
-          <a:noFill/>
-          <a:ln/>
-        </p:spPr>
-        <p:txBody>
-          <a:bodyPr wrap="square" lIns="0" tIns="0" rIns="0" bIns="0" rtlCol="0" anchor="ctr"/>
-          <a:lstStyle/>
-          <a:p>
-            <a:pPr indent="0" marL="0">
-              <a:buNone/>
-            </a:pPr>
-            <a:r>
-              <a:rPr lang="en-US" sz="1000" dirty="0">
-                <a:solidFill>
-                  <a:srgbClr val="E8EDE9"/>
-                </a:solidFill>
-                <a:latin typeface="Calibri" pitchFamily="34" charset="0"/>
-                <a:ea typeface="Calibri" pitchFamily="34" charset="-122"/>
-                <a:cs typeface="Calibri" pitchFamily="34" charset="-120"/>
-              </a:rPr>
-              <a:t>Student opportunity platform connecting youth with scholarships and programs.</a:t>
-            </a:r>
-            <a:endParaRPr lang="en-US" sz="1000" dirty="0"/>
-          </a:p>
-        </p:txBody>
-      </p:sp>
-      <p:sp>
-        <p:nvSpPr>
-          <p:cNvPr id="19" name="Shape 15"/>
-          <p:cNvSpPr/>
-          <p:nvPr/>
-        </p:nvSpPr>
-        <p:spPr>
-          <a:xfrm>
-            <a:off x="4663440" y="3849624"/>
-            <a:ext cx="4023360" cy="914400"/>
-          </a:xfrm>
-          <a:prstGeom prst="rect">
-            <a:avLst/>
-          </a:prstGeom>
-          <a:solidFill>
-            <a:srgbClr val="131810"/>
-          </a:solidFill>
-          <a:ln w="6350">
-            <a:solidFill>
-              <a:srgbClr val="223020"/>
-            </a:solidFill>
-            <a:prstDash val="solid"/>
-          </a:ln>
-        </p:spPr>
-      </p:sp>
-      <p:pic>
-        <p:nvPicPr>
-          <p:cNvPr id="20" name="Image 2" descr="preencoded.png">    </p:cNvPr>
+          <p:cNvPr id="12" name="Image 0" descr="preencoded.png"/>
           <p:cNvPicPr>
             <a:picLocks noChangeAspect="1"/>
           </p:cNvPicPr>
@@ -9299,7 +8877,7 @@
         </p:blipFill>
         <p:spPr>
           <a:xfrm>
-            <a:off x="4828032" y="4050792"/>
+            <a:off x="4828032" y="1892808"/>
             <a:ext cx="384048" cy="384048"/>
           </a:xfrm>
           <a:prstGeom prst="rect">
@@ -9309,13 +8887,13 @@
       </p:pic>
       <p:sp>
         <p:nvSpPr>
-          <p:cNvPr id="21" name="Text 16"/>
-          <p:cNvSpPr/>
-          <p:nvPr/>
-        </p:nvSpPr>
-        <p:spPr>
-          <a:xfrm>
-            <a:off x="5349240" y="3941064"/>
+          <p:cNvPr id="13" name="Text 10"/>
+          <p:cNvSpPr/>
+          <p:nvPr/>
+        </p:nvSpPr>
+        <p:spPr>
+          <a:xfrm>
+            <a:off x="5349240" y="1783080"/>
             <a:ext cx="3200400" cy="320040"/>
           </a:xfrm>
           <a:prstGeom prst="rect">
@@ -9328,7 +8906,7 @@
           <a:bodyPr wrap="square" lIns="0" tIns="0" rIns="0" bIns="0" rtlCol="0" anchor="ctr"/>
           <a:lstStyle/>
           <a:p>
-            <a:pPr indent="0" marL="0">
+            <a:pPr marL="0" indent="0">
               <a:buNone/>
             </a:pPr>
             <a:r>
@@ -9340,7 +8918,7 @@
                 <a:ea typeface="Trebuchet MS" pitchFamily="34" charset="-122"/>
                 <a:cs typeface="Trebuchet MS" pitchFamily="34" charset="-120"/>
               </a:rPr>
-              <a:t>Canadian Computing Competition</a:t>
+              <a:t>BIG Club</a:t>
             </a:r>
             <a:endParaRPr lang="en-US" sz="1300" dirty="0"/>
           </a:p>
@@ -9348,13 +8926,13 @@
       </p:sp>
       <p:sp>
         <p:nvSpPr>
-          <p:cNvPr id="22" name="Text 17"/>
-          <p:cNvSpPr/>
-          <p:nvPr/>
-        </p:nvSpPr>
-        <p:spPr>
-          <a:xfrm>
-            <a:off x="5349240" y="4288536"/>
+          <p:cNvPr id="14" name="Text 11"/>
+          <p:cNvSpPr/>
+          <p:nvPr/>
+        </p:nvSpPr>
+        <p:spPr>
+          <a:xfrm>
+            <a:off x="5349240" y="2130552"/>
             <a:ext cx="3200400" cy="365760"/>
           </a:xfrm>
           <a:prstGeom prst="rect">
@@ -9367,7 +8945,7 @@
           <a:bodyPr wrap="square" lIns="0" tIns="0" rIns="0" bIns="0" rtlCol="0" anchor="ctr"/>
           <a:lstStyle/>
           <a:p>
-            <a:pPr indent="0" marL="0">
+            <a:pPr marL="0" indent="0">
               <a:buNone/>
             </a:pPr>
             <a:r>
@@ -9379,6 +8957,260 @@
                 <a:ea typeface="Calibri" pitchFamily="34" charset="-122"/>
                 <a:cs typeface="Calibri" pitchFamily="34" charset="-120"/>
               </a:rPr>
+              <a:t>AI tools initiative at school. Teaches students to build with AI.</a:t>
+            </a:r>
+            <a:endParaRPr lang="en-US" sz="1000" dirty="0"/>
+          </a:p>
+        </p:txBody>
+      </p:sp>
+      <p:sp>
+        <p:nvSpPr>
+          <p:cNvPr id="15" name="Shape 12"/>
+          <p:cNvSpPr/>
+          <p:nvPr/>
+        </p:nvSpPr>
+        <p:spPr>
+          <a:xfrm>
+            <a:off x="4663440" y="2770632"/>
+            <a:ext cx="4023360" cy="914400"/>
+          </a:xfrm>
+          <a:prstGeom prst="rect">
+            <a:avLst/>
+          </a:prstGeom>
+          <a:solidFill>
+            <a:srgbClr val="131810"/>
+          </a:solidFill>
+          <a:ln w="6350">
+            <a:solidFill>
+              <a:srgbClr val="223020"/>
+            </a:solidFill>
+            <a:prstDash val="solid"/>
+          </a:ln>
+        </p:spPr>
+      </p:sp>
+      <p:pic>
+        <p:nvPicPr>
+          <p:cNvPr id="16" name="Image 1" descr="preencoded.png"/>
+          <p:cNvPicPr>
+            <a:picLocks noChangeAspect="1"/>
+          </p:cNvPicPr>
+          <p:nvPr/>
+        </p:nvPicPr>
+        <p:blipFill>
+          <a:blip r:embed="rId4"/>
+          <a:stretch>
+            <a:fillRect/>
+          </a:stretch>
+        </p:blipFill>
+        <p:spPr>
+          <a:xfrm>
+            <a:off x="4828032" y="2971800"/>
+            <a:ext cx="384048" cy="384048"/>
+          </a:xfrm>
+          <a:prstGeom prst="rect">
+            <a:avLst/>
+          </a:prstGeom>
+        </p:spPr>
+      </p:pic>
+      <p:sp>
+        <p:nvSpPr>
+          <p:cNvPr id="17" name="Text 13"/>
+          <p:cNvSpPr/>
+          <p:nvPr/>
+        </p:nvSpPr>
+        <p:spPr>
+          <a:xfrm>
+            <a:off x="5349240" y="2862072"/>
+            <a:ext cx="3200400" cy="320040"/>
+          </a:xfrm>
+          <a:prstGeom prst="rect">
+            <a:avLst/>
+          </a:prstGeom>
+          <a:noFill/>
+          <a:ln/>
+        </p:spPr>
+        <p:txBody>
+          <a:bodyPr wrap="square" lIns="0" tIns="0" rIns="0" bIns="0" rtlCol="0" anchor="ctr"/>
+          <a:lstStyle/>
+          <a:p>
+            <a:pPr marL="0" indent="0">
+              <a:buNone/>
+            </a:pPr>
+            <a:r>
+              <a:rPr lang="en-US" sz="1300" b="1" dirty="0">
+                <a:solidFill>
+                  <a:srgbClr val="FFFFFF"/>
+                </a:solidFill>
+                <a:latin typeface="Trebuchet MS" pitchFamily="34" charset="0"/>
+                <a:ea typeface="Trebuchet MS" pitchFamily="34" charset="-122"/>
+                <a:cs typeface="Trebuchet MS" pitchFamily="34" charset="-120"/>
+              </a:rPr>
+              <a:t>Maqsad</a:t>
+            </a:r>
+            <a:endParaRPr lang="en-US" sz="1300" dirty="0"/>
+          </a:p>
+        </p:txBody>
+      </p:sp>
+      <p:sp>
+        <p:nvSpPr>
+          <p:cNvPr id="18" name="Text 14"/>
+          <p:cNvSpPr/>
+          <p:nvPr/>
+        </p:nvSpPr>
+        <p:spPr>
+          <a:xfrm>
+            <a:off x="5349240" y="3209544"/>
+            <a:ext cx="3200400" cy="365760"/>
+          </a:xfrm>
+          <a:prstGeom prst="rect">
+            <a:avLst/>
+          </a:prstGeom>
+          <a:noFill/>
+          <a:ln/>
+        </p:spPr>
+        <p:txBody>
+          <a:bodyPr wrap="square" lIns="0" tIns="0" rIns="0" bIns="0" rtlCol="0" anchor="ctr"/>
+          <a:lstStyle/>
+          <a:p>
+            <a:pPr marL="0" indent="0">
+              <a:buNone/>
+            </a:pPr>
+            <a:r>
+              <a:rPr lang="en-US" sz="1000" dirty="0">
+                <a:solidFill>
+                  <a:srgbClr val="E8EDE9"/>
+                </a:solidFill>
+                <a:latin typeface="Calibri" pitchFamily="34" charset="0"/>
+                <a:ea typeface="Calibri" pitchFamily="34" charset="-122"/>
+                <a:cs typeface="Calibri" pitchFamily="34" charset="-120"/>
+              </a:rPr>
+              <a:t>Student opportunity platform connecting youth with scholarships and programs.</a:t>
+            </a:r>
+            <a:endParaRPr lang="en-US" sz="1000" dirty="0"/>
+          </a:p>
+        </p:txBody>
+      </p:sp>
+      <p:sp>
+        <p:nvSpPr>
+          <p:cNvPr id="19" name="Shape 15"/>
+          <p:cNvSpPr/>
+          <p:nvPr/>
+        </p:nvSpPr>
+        <p:spPr>
+          <a:xfrm>
+            <a:off x="4663440" y="3849624"/>
+            <a:ext cx="4023360" cy="914400"/>
+          </a:xfrm>
+          <a:prstGeom prst="rect">
+            <a:avLst/>
+          </a:prstGeom>
+          <a:solidFill>
+            <a:srgbClr val="131810"/>
+          </a:solidFill>
+          <a:ln w="6350">
+            <a:solidFill>
+              <a:srgbClr val="223020"/>
+            </a:solidFill>
+            <a:prstDash val="solid"/>
+          </a:ln>
+        </p:spPr>
+      </p:sp>
+      <p:pic>
+        <p:nvPicPr>
+          <p:cNvPr id="20" name="Image 2" descr="preencoded.png"/>
+          <p:cNvPicPr>
+            <a:picLocks noChangeAspect="1"/>
+          </p:cNvPicPr>
+          <p:nvPr/>
+        </p:nvPicPr>
+        <p:blipFill>
+          <a:blip r:embed="rId5"/>
+          <a:stretch>
+            <a:fillRect/>
+          </a:stretch>
+        </p:blipFill>
+        <p:spPr>
+          <a:xfrm>
+            <a:off x="4828032" y="4050792"/>
+            <a:ext cx="384048" cy="384048"/>
+          </a:xfrm>
+          <a:prstGeom prst="rect">
+            <a:avLst/>
+          </a:prstGeom>
+        </p:spPr>
+      </p:pic>
+      <p:sp>
+        <p:nvSpPr>
+          <p:cNvPr id="21" name="Text 16"/>
+          <p:cNvSpPr/>
+          <p:nvPr/>
+        </p:nvSpPr>
+        <p:spPr>
+          <a:xfrm>
+            <a:off x="5349240" y="3941064"/>
+            <a:ext cx="3200400" cy="320040"/>
+          </a:xfrm>
+          <a:prstGeom prst="rect">
+            <a:avLst/>
+          </a:prstGeom>
+          <a:noFill/>
+          <a:ln/>
+        </p:spPr>
+        <p:txBody>
+          <a:bodyPr wrap="square" lIns="0" tIns="0" rIns="0" bIns="0" rtlCol="0" anchor="ctr"/>
+          <a:lstStyle/>
+          <a:p>
+            <a:pPr marL="0" indent="0">
+              <a:buNone/>
+            </a:pPr>
+            <a:r>
+              <a:rPr lang="en-US" sz="1300" b="1" dirty="0">
+                <a:solidFill>
+                  <a:srgbClr val="FFFFFF"/>
+                </a:solidFill>
+                <a:latin typeface="Trebuchet MS" pitchFamily="34" charset="0"/>
+                <a:ea typeface="Trebuchet MS" pitchFamily="34" charset="-122"/>
+                <a:cs typeface="Trebuchet MS" pitchFamily="34" charset="-120"/>
+              </a:rPr>
+              <a:t>Canadian Computing Competition</a:t>
+            </a:r>
+            <a:endParaRPr lang="en-US" sz="1300" dirty="0"/>
+          </a:p>
+        </p:txBody>
+      </p:sp>
+      <p:sp>
+        <p:nvSpPr>
+          <p:cNvPr id="22" name="Text 17"/>
+          <p:cNvSpPr/>
+          <p:nvPr/>
+        </p:nvSpPr>
+        <p:spPr>
+          <a:xfrm>
+            <a:off x="5349240" y="4288536"/>
+            <a:ext cx="3200400" cy="365760"/>
+          </a:xfrm>
+          <a:prstGeom prst="rect">
+            <a:avLst/>
+          </a:prstGeom>
+          <a:noFill/>
+          <a:ln/>
+        </p:spPr>
+        <p:txBody>
+          <a:bodyPr wrap="square" lIns="0" tIns="0" rIns="0" bIns="0" rtlCol="0" anchor="ctr"/>
+          <a:lstStyle/>
+          <a:p>
+            <a:pPr marL="0" indent="0">
+              <a:buNone/>
+            </a:pPr>
+            <a:r>
+              <a:rPr lang="en-US" sz="1000" dirty="0">
+                <a:solidFill>
+                  <a:srgbClr val="E8EDE9"/>
+                </a:solidFill>
+                <a:latin typeface="Calibri" pitchFamily="34" charset="0"/>
+                <a:ea typeface="Calibri" pitchFamily="34" charset="-122"/>
+                <a:cs typeface="Calibri" pitchFamily="34" charset="-120"/>
+              </a:rPr>
               <a:t>Active participant. Competing in algorithmic problem-solving.</a:t>
             </a:r>
             <a:endParaRPr lang="en-US" sz="1000" dirty="0"/>
@@ -9393,7 +9225,7 @@
         </p:nvSpPr>
         <p:spPr>
           <a:xfrm>
-            <a:off x="4663440" y="4343400"/>
+            <a:off x="4663440" y="690372"/>
             <a:ext cx="4023360" cy="594360"/>
           </a:xfrm>
           <a:prstGeom prst="rect">
@@ -9418,7 +9250,7 @@
         </p:nvSpPr>
         <p:spPr>
           <a:xfrm>
-            <a:off x="4846320" y="4416552"/>
+            <a:off x="4890770" y="766826"/>
             <a:ext cx="3749040" cy="457200"/>
           </a:xfrm>
           <a:prstGeom prst="rect">
@@ -9431,7 +9263,7 @@
           <a:bodyPr wrap="square" lIns="0" tIns="0" rIns="0" bIns="0" rtlCol="0" anchor="ctr"/>
           <a:lstStyle/>
           <a:p>
-            <a:pPr indent="0" marL="0">
+            <a:pPr marL="0" indent="0">
               <a:buNone/>
             </a:pPr>
             <a:r>
@@ -9750,4 +9582,265 @@
     </a:ext>
   </a:extLst>
 </a:theme>
+</file>
+
+<file path=ppt/theme/theme2.xml><?xml version="1.0" encoding="utf-8"?>
+<a:theme xmlns:a="http://schemas.openxmlformats.org/drawingml/2006/main" name="Office Theme">
+  <a:themeElements>
+    <a:clrScheme name="Office">
+      <a:dk1>
+        <a:sysClr val="windowText" lastClr="000000"/>
+      </a:dk1>
+      <a:lt1>
+        <a:sysClr val="window" lastClr="FFFFFF"/>
+      </a:lt1>
+      <a:dk2>
+        <a:srgbClr val="44546A"/>
+      </a:dk2>
+      <a:lt2>
+        <a:srgbClr val="E7E6E6"/>
+      </a:lt2>
+      <a:accent1>
+        <a:srgbClr val="5B9BD5"/>
+      </a:accent1>
+      <a:accent2>
+        <a:srgbClr val="ED7D31"/>
+      </a:accent2>
+      <a:accent3>
+        <a:srgbClr val="A5A5A5"/>
+      </a:accent3>
+      <a:accent4>
+        <a:srgbClr val="FFC000"/>
+      </a:accent4>
+      <a:accent5>
+        <a:srgbClr val="4472C4"/>
+      </a:accent5>
+      <a:accent6>
+        <a:srgbClr val="70AD47"/>
+      </a:accent6>
+      <a:hlink>
+        <a:srgbClr val="0563C1"/>
+      </a:hlink>
+      <a:folHlink>
+        <a:srgbClr val="954F72"/>
+      </a:folHlink>
+    </a:clrScheme>
+    <a:fontScheme name="Office">
+      <a:majorFont>
+        <a:latin typeface="Calibri Light" panose="020F0302020204030204"/>
+        <a:ea typeface=""/>
+        <a:cs typeface=""/>
+        <a:font script="Jpan" typeface="游ゴシック Light"/>
+        <a:font script="Hang" typeface="맑은 고딕"/>
+        <a:font script="Hans" typeface="等线 Light"/>
+        <a:font script="Hant" typeface="新細明體"/>
+        <a:font script="Arab" typeface="Times New Roman"/>
+        <a:font script="Hebr" typeface="Times New Roman"/>
+        <a:font script="Thai" typeface="Angsana New"/>
+        <a:font script="Ethi" typeface="Nyala"/>
+        <a:font script="Beng" typeface="Vrinda"/>
+        <a:font script="Gujr" typeface="Shruti"/>
+        <a:font script="Khmr" typeface="MoolBoran"/>
+        <a:font script="Knda" typeface="Tunga"/>
+        <a:font script="Guru" typeface="Raavi"/>
+        <a:font script="Cans" typeface="Euphemia"/>
+        <a:font script="Cher" typeface="Plantagenet Cherokee"/>
+        <a:font script="Yiii" typeface="Microsoft Yi Baiti"/>
+        <a:font script="Tibt" typeface="Microsoft Himalaya"/>
+        <a:font script="Thaa" typeface="MV Boli"/>
+        <a:font script="Deva" typeface="Mangal"/>
+        <a:font script="Telu" typeface="Gautami"/>
+        <a:font script="Taml" typeface="Latha"/>
+        <a:font script="Syrc" typeface="Estrangelo Edessa"/>
+        <a:font script="Orya" typeface="Kalinga"/>
+        <a:font script="Mlym" typeface="Kartika"/>
+        <a:font script="Laoo" typeface="DokChampa"/>
+        <a:font script="Sinh" typeface="Iskoola Pota"/>
+        <a:font script="Mong" typeface="Mongolian Baiti"/>
+        <a:font script="Viet" typeface="Times New Roman"/>
+        <a:font script="Uigh" typeface="Microsoft Uighur"/>
+        <a:font script="Geor" typeface="Sylfaen"/>
+      </a:majorFont>
+      <a:minorFont>
+        <a:latin typeface="Calibri" panose="020F0502020204030204"/>
+        <a:ea typeface=""/>
+        <a:cs typeface=""/>
+        <a:font script="Jpan" typeface="游ゴシック"/>
+        <a:font script="Hang" typeface="맑은 고딕"/>
+        <a:font script="Hans" typeface="等线"/>
+        <a:font script="Hant" typeface="新細明體"/>
+        <a:font script="Arab" typeface="Arial"/>
+        <a:font script="Hebr" typeface="Arial"/>
+        <a:font script="Thai" typeface="Cordia New"/>
+        <a:font script="Ethi" typeface="Nyala"/>
+        <a:font script="Beng" typeface="Vrinda"/>
+        <a:font script="Gujr" typeface="Shruti"/>
+        <a:font script="Khmr" typeface="DaunPenh"/>
+        <a:font script="Knda" typeface="Tunga"/>
+        <a:font script="Guru" typeface="Raavi"/>
+        <a:font script="Cans" typeface="Euphemia"/>
+        <a:font script="Cher" typeface="Plantagenet Cherokee"/>
+        <a:font script="Yiii" typeface="Microsoft Yi Baiti"/>
+        <a:font script="Tibt" typeface="Microsoft Himalaya"/>
+        <a:font script="Thaa" typeface="MV Boli"/>
+        <a:font script="Deva" typeface="Mangal"/>
+        <a:font script="Telu" typeface="Gautami"/>
+        <a:font script="Taml" typeface="Latha"/>
+        <a:font script="Syrc" typeface="Estrangelo Edessa"/>
+        <a:font script="Orya" typeface="Kalinga"/>
+        <a:font script="Mlym" typeface="Kartika"/>
+        <a:font script="Laoo" typeface="DokChampa"/>
+        <a:font script="Sinh" typeface="Iskoola Pota"/>
+        <a:font script="Mong" typeface="Mongolian Baiti"/>
+        <a:font script="Viet" typeface="Arial"/>
+        <a:font script="Uigh" typeface="Microsoft Uighur"/>
+        <a:font script="Geor" typeface="Sylfaen"/>
+      </a:minorFont>
+    </a:fontScheme>
+    <a:fmtScheme name="Office">
+      <a:fillStyleLst>
+        <a:solidFill>
+          <a:schemeClr val="phClr"/>
+        </a:solidFill>
+        <a:gradFill rotWithShape="1">
+          <a:gsLst>
+            <a:gs pos="0">
+              <a:schemeClr val="phClr">
+                <a:lumMod val="110000"/>
+                <a:satMod val="105000"/>
+                <a:tint val="67000"/>
+              </a:schemeClr>
+            </a:gs>
+            <a:gs pos="50000">
+              <a:schemeClr val="phClr">
+                <a:lumMod val="105000"/>
+                <a:satMod val="103000"/>
+                <a:tint val="73000"/>
+              </a:schemeClr>
+            </a:gs>
+            <a:gs pos="100000">
+              <a:schemeClr val="phClr">
+                <a:lumMod val="105000"/>
+                <a:satMod val="109000"/>
+                <a:tint val="81000"/>
+              </a:schemeClr>
+            </a:gs>
+          </a:gsLst>
+          <a:lin ang="5400000" scaled="0"/>
+        </a:gradFill>
+        <a:gradFill rotWithShape="1">
+          <a:gsLst>
+            <a:gs pos="0">
+              <a:schemeClr val="phClr">
+                <a:satMod val="103000"/>
+                <a:lumMod val="102000"/>
+                <a:tint val="94000"/>
+              </a:schemeClr>
+            </a:gs>
+            <a:gs pos="50000">
+              <a:schemeClr val="phClr">
+                <a:satMod val="110000"/>
+                <a:lumMod val="100000"/>
+                <a:shade val="100000"/>
+              </a:schemeClr>
+            </a:gs>
+            <a:gs pos="100000">
+              <a:schemeClr val="phClr">
+                <a:lumMod val="99000"/>
+                <a:satMod val="120000"/>
+                <a:shade val="78000"/>
+              </a:schemeClr>
+            </a:gs>
+          </a:gsLst>
+          <a:lin ang="5400000" scaled="0"/>
+        </a:gradFill>
+      </a:fillStyleLst>
+      <a:lnStyleLst>
+        <a:ln w="6350" cap="flat" cmpd="sng" algn="ctr">
+          <a:solidFill>
+            <a:schemeClr val="phClr"/>
+          </a:solidFill>
+          <a:prstDash val="solid"/>
+          <a:miter lim="800000"/>
+        </a:ln>
+        <a:ln w="12700" cap="flat" cmpd="sng" algn="ctr">
+          <a:solidFill>
+            <a:schemeClr val="phClr"/>
+          </a:solidFill>
+          <a:prstDash val="solid"/>
+          <a:miter lim="800000"/>
+        </a:ln>
+        <a:ln w="19050" cap="flat" cmpd="sng" algn="ctr">
+          <a:solidFill>
+            <a:schemeClr val="phClr"/>
+          </a:solidFill>
+          <a:prstDash val="solid"/>
+          <a:miter lim="800000"/>
+        </a:ln>
+      </a:lnStyleLst>
+      <a:effectStyleLst>
+        <a:effectStyle>
+          <a:effectLst/>
+        </a:effectStyle>
+        <a:effectStyle>
+          <a:effectLst/>
+        </a:effectStyle>
+        <a:effectStyle>
+          <a:effectLst>
+            <a:outerShdw blurRad="57150" dist="19050" dir="5400000" algn="ctr" rotWithShape="0">
+              <a:srgbClr val="000000">
+                <a:alpha val="63000"/>
+              </a:srgbClr>
+            </a:outerShdw>
+          </a:effectLst>
+        </a:effectStyle>
+      </a:effectStyleLst>
+      <a:bgFillStyleLst>
+        <a:solidFill>
+          <a:schemeClr val="phClr"/>
+        </a:solidFill>
+        <a:solidFill>
+          <a:schemeClr val="phClr">
+            <a:tint val="95000"/>
+            <a:satMod val="170000"/>
+          </a:schemeClr>
+        </a:solidFill>
+        <a:gradFill rotWithShape="1">
+          <a:gsLst>
+            <a:gs pos="0">
+              <a:schemeClr val="phClr">
+                <a:tint val="93000"/>
+                <a:satMod val="150000"/>
+                <a:shade val="98000"/>
+                <a:lumMod val="102000"/>
+              </a:schemeClr>
+            </a:gs>
+            <a:gs pos="50000">
+              <a:schemeClr val="phClr">
+                <a:tint val="98000"/>
+                <a:satMod val="130000"/>
+                <a:shade val="90000"/>
+                <a:lumMod val="103000"/>
+              </a:schemeClr>
+            </a:gs>
+            <a:gs pos="100000">
+              <a:schemeClr val="phClr">
+                <a:shade val="63000"/>
+                <a:satMod val="120000"/>
+              </a:schemeClr>
+            </a:gs>
+          </a:gsLst>
+          <a:lin ang="5400000" scaled="0"/>
+        </a:gradFill>
+      </a:bgFillStyleLst>
+    </a:fmtScheme>
+  </a:themeElements>
+  <a:objectDefaults/>
+  <a:extraClrSchemeLst/>
+  <a:extLst>
+    <a:ext uri="{05A4C25C-085E-4340-85A3-A5531E510DB2}">
+      <thm15:themeFamily xmlns:thm15="http://schemas.microsoft.com/office/thememl/2012/main" name="Office Theme" id="{62F939B6-93AF-4DB8-9C6B-D6C7DFDC589F}" vid="{4A3C46E8-61CC-4603-A589-7422A47A8E4A}"/>
+    </a:ext>
+  </a:extLst>
+</a:theme>
 </file>